--- a/docs/slides_proposal_editable.pptx
+++ b/docs/slides_proposal_editable.pptx
@@ -3365,9 +3365,457 @@
           </a:p>
         </p:txBody>
       </p:sp>
+      <p:sp>
+        <p:nvSpPr>
+          <p:cNvPr id="4" name="Rounded Rectangle 3"/>
+          <p:cNvSpPr/>
+          <p:nvPr/>
+        </p:nvSpPr>
+        <p:spPr>
+          <a:xfrm>
+            <a:off x="274320" y="1417320"/>
+            <a:ext cx="6446520" cy="4526280"/>
+          </a:xfrm>
+          <a:prstGeom prst="roundRect">
+            <a:avLst/>
+          </a:prstGeom>
+          <a:solidFill>
+            <a:srgbClr val="EEF4FB"/>
+          </a:solidFill>
+          <a:ln>
+            <a:noFill/>
+          </a:ln>
+          <a:effectLst/>
+        </p:spPr>
+        <p:style>
+          <a:lnRef idx="1">
+            <a:schemeClr val="accent1"/>
+          </a:lnRef>
+          <a:fillRef idx="3">
+            <a:schemeClr val="accent1"/>
+          </a:fillRef>
+          <a:effectRef idx="2">
+            <a:schemeClr val="accent1"/>
+          </a:effectRef>
+          <a:fontRef idx="minor">
+            <a:schemeClr val="lt1"/>
+          </a:fontRef>
+        </p:style>
+        <p:txBody>
+          <a:bodyPr rtlCol="0" anchor="ctr"/>
+          <a:lstStyle/>
+          <a:p>
+            <a:pPr algn="ctr"/>
+          </a:p>
+        </p:txBody>
+      </p:sp>
+      <p:sp>
+        <p:nvSpPr>
+          <p:cNvPr id="5" name="Rounded Rectangle 4"/>
+          <p:cNvSpPr/>
+          <p:nvPr/>
+        </p:nvSpPr>
+        <p:spPr>
+          <a:xfrm>
+            <a:off x="6903720" y="1417320"/>
+            <a:ext cx="4983480" cy="4526280"/>
+          </a:xfrm>
+          <a:prstGeom prst="roundRect">
+            <a:avLst/>
+          </a:prstGeom>
+          <a:solidFill>
+            <a:srgbClr val="FDF0EF"/>
+          </a:solidFill>
+          <a:ln>
+            <a:noFill/>
+          </a:ln>
+          <a:effectLst/>
+        </p:spPr>
+        <p:style>
+          <a:lnRef idx="1">
+            <a:schemeClr val="accent1"/>
+          </a:lnRef>
+          <a:fillRef idx="3">
+            <a:schemeClr val="accent1"/>
+          </a:fillRef>
+          <a:effectRef idx="2">
+            <a:schemeClr val="accent1"/>
+          </a:effectRef>
+          <a:fontRef idx="minor">
+            <a:schemeClr val="lt1"/>
+          </a:fontRef>
+        </p:style>
+        <p:txBody>
+          <a:bodyPr rtlCol="0" anchor="ctr"/>
+          <a:lstStyle/>
+          <a:p>
+            <a:pPr algn="ctr"/>
+          </a:p>
+        </p:txBody>
+      </p:sp>
+      <p:sp>
+        <p:nvSpPr>
+          <p:cNvPr id="6" name="TextBox 5"/>
+          <p:cNvSpPr txBox="1"/>
+          <p:nvPr/>
+        </p:nvSpPr>
+        <p:spPr>
+          <a:xfrm>
+            <a:off x="411480" y="1517904"/>
+            <a:ext cx="6217920" cy="502920"/>
+          </a:xfrm>
+          <a:prstGeom prst="rect">
+            <a:avLst/>
+          </a:prstGeom>
+          <a:noFill/>
+        </p:spPr>
+        <p:txBody>
+          <a:bodyPr wrap="square" anchor="t">
+            <a:spAutoFit/>
+          </a:bodyPr>
+          <a:lstStyle/>
+          <a:p>
+            <a:pPr algn="ctr">
+              <a:lnSpc>
+                <a:spcPct val="105000"/>
+              </a:lnSpc>
+            </a:pPr>
+            <a:r>
+              <a:rPr sz="1300" b="1" i="0">
+                <a:solidFill>
+                  <a:srgbClr val="1A365D"/>
+                </a:solidFill>
+                <a:latin typeface="Arial"/>
+              </a:rPr>
+              <a:t>MY THESIS</a:t>
+            </a:r>
+            <a:r>
+              <a:rPr sz="1250" b="0" i="0">
+                <a:solidFill>
+                  <a:srgbClr val="1A365D"/>
+                </a:solidFill>
+                <a:latin typeface="Arial"/>
+              </a:rPr>
+              <a:t>  ·  Affordance &amp; taxonomy-aware grasp pose generation</a:t>
+            </a:r>
+          </a:p>
+        </p:txBody>
+      </p:sp>
+      <p:sp>
+        <p:nvSpPr>
+          <p:cNvPr id="7" name="TextBox 6"/>
+          <p:cNvSpPr txBox="1"/>
+          <p:nvPr/>
+        </p:nvSpPr>
+        <p:spPr>
+          <a:xfrm>
+            <a:off x="6949440" y="1517904"/>
+            <a:ext cx="4892040" cy="502920"/>
+          </a:xfrm>
+          <a:prstGeom prst="rect">
+            <a:avLst/>
+          </a:prstGeom>
+          <a:noFill/>
+        </p:spPr>
+        <p:txBody>
+          <a:bodyPr wrap="square" anchor="t">
+            <a:spAutoFit/>
+          </a:bodyPr>
+          <a:lstStyle/>
+          <a:p>
+            <a:pPr algn="ctr">
+              <a:lnSpc>
+                <a:spcPct val="105000"/>
+              </a:lnSpc>
+            </a:pPr>
+            <a:r>
+              <a:rPr sz="1250" b="1" i="0">
+                <a:solidFill>
+                  <a:srgbClr val="A93226"/>
+                </a:solidFill>
+                <a:latin typeface="Arial"/>
+              </a:rPr>
+              <a:t>THIS PROJECT  ·  spill-free carry (motion planning)</a:t>
+            </a:r>
+          </a:p>
+        </p:txBody>
+      </p:sp>
+      <p:sp>
+        <p:nvSpPr>
+          <p:cNvPr id="8" name="Rounded Rectangle 7"/>
+          <p:cNvSpPr/>
+          <p:nvPr/>
+        </p:nvSpPr>
+        <p:spPr>
+          <a:xfrm>
+            <a:off x="502920" y="2423160"/>
+            <a:ext cx="1554480" cy="640080"/>
+          </a:xfrm>
+          <a:prstGeom prst="roundRect">
+            <a:avLst/>
+          </a:prstGeom>
+          <a:solidFill>
+            <a:srgbClr val="FFFFFF"/>
+          </a:solidFill>
+          <a:ln w="19050">
+            <a:solidFill>
+              <a:srgbClr val="2C6FBB"/>
+            </a:solidFill>
+          </a:ln>
+          <a:effectLst/>
+        </p:spPr>
+        <p:style>
+          <a:lnRef idx="1">
+            <a:schemeClr val="accent1"/>
+          </a:lnRef>
+          <a:fillRef idx="3">
+            <a:schemeClr val="accent1"/>
+          </a:fillRef>
+          <a:effectRef idx="2">
+            <a:schemeClr val="accent1"/>
+          </a:effectRef>
+          <a:fontRef idx="minor">
+            <a:schemeClr val="lt1"/>
+          </a:fontRef>
+        </p:style>
+        <p:txBody>
+          <a:bodyPr rtlCol="0" anchor="ctr" wrap="square" lIns="45720" rIns="45720" tIns="18288" bIns="18288"/>
+          <a:lstStyle/>
+          <a:p>
+            <a:pPr algn="ctr"/>
+            <a:r>
+              <a:rPr sz="1100" b="0">
+                <a:solidFill>
+                  <a:srgbClr val="2C3E50"/>
+                </a:solidFill>
+                <a:latin typeface="Arial"/>
+              </a:rPr>
+              <a:t>object</a:t>
+            </a:r>
+          </a:p>
+          <a:p>
+            <a:pPr algn="ctr"/>
+            <a:r>
+              <a:rPr sz="1100" b="0">
+                <a:solidFill>
+                  <a:srgbClr val="2C3E50"/>
+                </a:solidFill>
+                <a:latin typeface="Arial"/>
+              </a:rPr>
+              <a:t>mesh</a:t>
+            </a:r>
+          </a:p>
+        </p:txBody>
+      </p:sp>
+      <p:sp>
+        <p:nvSpPr>
+          <p:cNvPr id="9" name="Rounded Rectangle 8"/>
+          <p:cNvSpPr/>
+          <p:nvPr/>
+        </p:nvSpPr>
+        <p:spPr>
+          <a:xfrm>
+            <a:off x="502920" y="3429000"/>
+            <a:ext cx="1920240" cy="1051560"/>
+          </a:xfrm>
+          <a:prstGeom prst="roundRect">
+            <a:avLst/>
+          </a:prstGeom>
+          <a:solidFill>
+            <a:srgbClr val="FFFFFF"/>
+          </a:solidFill>
+          <a:ln w="19050">
+            <a:solidFill>
+              <a:srgbClr val="2C6FBB"/>
+            </a:solidFill>
+          </a:ln>
+          <a:effectLst/>
+        </p:spPr>
+        <p:style>
+          <a:lnRef idx="1">
+            <a:schemeClr val="accent1"/>
+          </a:lnRef>
+          <a:fillRef idx="3">
+            <a:schemeClr val="accent1"/>
+          </a:fillRef>
+          <a:effectRef idx="2">
+            <a:schemeClr val="accent1"/>
+          </a:effectRef>
+          <a:fontRef idx="minor">
+            <a:schemeClr val="lt1"/>
+          </a:fontRef>
+        </p:style>
+        <p:txBody>
+          <a:bodyPr rtlCol="0" anchor="ctr" wrap="square" lIns="45720" rIns="45720" tIns="18288" bIns="18288"/>
+          <a:lstStyle/>
+          <a:p>
+            <a:pPr algn="ctr"/>
+            <a:r>
+              <a:rPr sz="1100" b="0">
+                <a:solidFill>
+                  <a:srgbClr val="2C3E50"/>
+                </a:solidFill>
+                <a:latin typeface="Arial"/>
+              </a:rPr>
+              <a:t>task (language)</a:t>
+            </a:r>
+          </a:p>
+          <a:p>
+            <a:pPr algn="ctr"/>
+            <a:r>
+              <a:rPr sz="1000" b="0">
+                <a:solidFill>
+                  <a:srgbClr val="2C3E50"/>
+                </a:solidFill>
+                <a:latin typeface="Arial"/>
+              </a:rPr>
+              <a:t>"pour" / "drink" / "hand over"</a:t>
+            </a:r>
+          </a:p>
+        </p:txBody>
+      </p:sp>
+      <p:sp>
+        <p:nvSpPr>
+          <p:cNvPr id="10" name="Rounded Rectangle 9"/>
+          <p:cNvSpPr/>
+          <p:nvPr/>
+        </p:nvSpPr>
+        <p:spPr>
+          <a:xfrm>
+            <a:off x="2697480" y="2743200"/>
+            <a:ext cx="1417320" cy="1188720"/>
+          </a:xfrm>
+          <a:prstGeom prst="roundRect">
+            <a:avLst/>
+          </a:prstGeom>
+          <a:solidFill>
+            <a:srgbClr val="FFFFFF"/>
+          </a:solidFill>
+          <a:ln w="19050">
+            <a:solidFill>
+              <a:srgbClr val="2C6FBB"/>
+            </a:solidFill>
+          </a:ln>
+          <a:effectLst/>
+        </p:spPr>
+        <p:style>
+          <a:lnRef idx="1">
+            <a:schemeClr val="accent1"/>
+          </a:lnRef>
+          <a:fillRef idx="3">
+            <a:schemeClr val="accent1"/>
+          </a:fillRef>
+          <a:effectRef idx="2">
+            <a:schemeClr val="accent1"/>
+          </a:effectRef>
+          <a:fontRef idx="minor">
+            <a:schemeClr val="lt1"/>
+          </a:fontRef>
+        </p:style>
+        <p:txBody>
+          <a:bodyPr rtlCol="0" anchor="ctr" wrap="square" lIns="45720" rIns="45720" tIns="18288" bIns="18288"/>
+          <a:lstStyle/>
+          <a:p>
+            <a:pPr algn="ctr"/>
+            <a:r>
+              <a:rPr sz="1250" b="1">
+                <a:solidFill>
+                  <a:srgbClr val="2C3E50"/>
+                </a:solidFill>
+                <a:latin typeface="Arial"/>
+              </a:rPr>
+              <a:t>Grasp</a:t>
+            </a:r>
+          </a:p>
+          <a:p>
+            <a:pPr algn="ctr"/>
+            <a:r>
+              <a:rPr sz="1250" b="1">
+                <a:solidFill>
+                  <a:srgbClr val="2C3E50"/>
+                </a:solidFill>
+                <a:latin typeface="Arial"/>
+              </a:rPr>
+              <a:t>generation</a:t>
+            </a:r>
+          </a:p>
+        </p:txBody>
+      </p:sp>
+      <p:cxnSp>
+        <p:nvCxnSpPr>
+          <p:cNvPr id="11" name="Connector 10"/>
+          <p:cNvCxnSpPr/>
+          <p:nvPr/>
+        </p:nvCxnSpPr>
+        <p:spPr>
+          <a:xfrm>
+            <a:off x="2075688" y="2697480"/>
+            <a:ext cx="603504" cy="411480"/>
+          </a:xfrm>
+          <a:prstGeom prst="line">
+            <a:avLst/>
+          </a:prstGeom>
+          <a:ln w="22225">
+            <a:solidFill>
+              <a:srgbClr val="888888"/>
+            </a:solidFill>
+            <a:tailEnd type="triangle" w="med" len="med"/>
+          </a:ln>
+        </p:spPr>
+        <p:style>
+          <a:lnRef idx="2">
+            <a:schemeClr val="accent1"/>
+          </a:lnRef>
+          <a:fillRef idx="0">
+            <a:schemeClr val="accent1"/>
+          </a:fillRef>
+          <a:effectRef idx="1">
+            <a:schemeClr val="accent1"/>
+          </a:effectRef>
+          <a:fontRef idx="minor">
+            <a:schemeClr val="tx1"/>
+          </a:fontRef>
+        </p:style>
+      </p:cxnSp>
+      <p:cxnSp>
+        <p:nvCxnSpPr>
+          <p:cNvPr id="12" name="Connector 11"/>
+          <p:cNvCxnSpPr/>
+          <p:nvPr/>
+        </p:nvCxnSpPr>
+        <p:spPr>
+          <a:xfrm flipV="1">
+            <a:off x="2441448" y="3520440"/>
+            <a:ext cx="237744" cy="228599"/>
+          </a:xfrm>
+          <a:prstGeom prst="line">
+            <a:avLst/>
+          </a:prstGeom>
+          <a:ln w="22225">
+            <a:solidFill>
+              <a:srgbClr val="888888"/>
+            </a:solidFill>
+            <a:tailEnd type="triangle" w="med" len="med"/>
+          </a:ln>
+        </p:spPr>
+        <p:style>
+          <a:lnRef idx="2">
+            <a:schemeClr val="accent1"/>
+          </a:lnRef>
+          <a:fillRef idx="0">
+            <a:schemeClr val="accent1"/>
+          </a:fillRef>
+          <a:effectRef idx="1">
+            <a:schemeClr val="accent1"/>
+          </a:effectRef>
+          <a:fontRef idx="minor">
+            <a:schemeClr val="tx1"/>
+          </a:fontRef>
+        </p:style>
+      </p:cxnSp>
       <p:pic>
         <p:nvPicPr>
-          <p:cNvPr id="4" name="Picture 3" descr="overview_thesis_project.png"/>
+          <p:cNvPr id="13" name="Picture 12" descr="grasp_drinking_c.png"/>
           <p:cNvPicPr>
             <a:picLocks noChangeAspect="1"/>
           </p:cNvPicPr>
@@ -3381,24 +3829,60 @@
         </p:blipFill>
         <p:spPr>
           <a:xfrm>
-            <a:off x="1378702" y="1371600"/>
-            <a:ext cx="9434290" cy="4297680"/>
+            <a:off x="4526280" y="1702147"/>
+            <a:ext cx="1325880" cy="1076264"/>
           </a:xfrm>
           <a:prstGeom prst="rect">
             <a:avLst/>
           </a:prstGeom>
         </p:spPr>
       </p:pic>
-      <p:sp>
-        <p:nvSpPr>
-          <p:cNvPr id="5" name="TextBox 4"/>
+      <p:cxnSp>
+        <p:nvCxnSpPr>
+          <p:cNvPr id="14" name="Connector 13"/>
+          <p:cNvCxnSpPr/>
+          <p:nvPr/>
+        </p:nvCxnSpPr>
+        <p:spPr>
+          <a:xfrm flipV="1">
+            <a:off x="4160520" y="2240280"/>
+            <a:ext cx="347472" cy="1097280"/>
+          </a:xfrm>
+          <a:prstGeom prst="line">
+            <a:avLst/>
+          </a:prstGeom>
+          <a:ln w="17780">
+            <a:solidFill>
+              <a:srgbClr val="27865A"/>
+            </a:solidFill>
+            <a:tailEnd type="triangle" w="med" len="med"/>
+          </a:ln>
+        </p:spPr>
+        <p:style>
+          <a:lnRef idx="2">
+            <a:schemeClr val="accent1"/>
+          </a:lnRef>
+          <a:fillRef idx="0">
+            <a:schemeClr val="accent1"/>
+          </a:fillRef>
+          <a:effectRef idx="1">
+            <a:schemeClr val="accent1"/>
+          </a:effectRef>
+          <a:fontRef idx="minor">
+            <a:schemeClr val="tx1"/>
+          </a:fontRef>
+        </p:style>
+      </p:cxnSp>
+      <p:sp>
+        <p:nvSpPr>
+          <p:cNvPr id="15" name="TextBox 14"/>
           <p:cNvSpPr txBox="1"/>
           <p:nvPr/>
         </p:nvSpPr>
         <p:spPr>
           <a:xfrm>
-            <a:off x="640080" y="5779008"/>
-            <a:ext cx="10972800" cy="822960"/>
+            <a:off x="5897880" y="2057400"/>
+            <a:ext cx="914400" cy="365760"/>
           </a:xfrm>
           <a:prstGeom prst="rect">
             <a:avLst/>
@@ -3406,7 +3890,7 @@
           <a:noFill/>
         </p:spPr>
         <p:txBody>
-          <a:bodyPr wrap="square" anchor="t">
+          <a:bodyPr wrap="square" anchor="ctr">
             <a:spAutoFit/>
           </a:bodyPr>
           <a:lstStyle/>
@@ -3417,47 +3901,1291 @@
               </a:lnSpc>
             </a:pPr>
             <a:r>
-              <a:rPr sz="1300" b="1" i="0">
+              <a:rPr sz="1100" b="1" i="0">
+                <a:solidFill>
+                  <a:srgbClr val="27865A"/>
+                </a:solidFill>
+                <a:latin typeface="Arial"/>
+              </a:rPr>
+              <a:t>drink</a:t>
+            </a:r>
+          </a:p>
+        </p:txBody>
+      </p:sp>
+      <p:pic>
+        <p:nvPicPr>
+          <p:cNvPr id="16" name="Picture 15" descr="grasp_pouring_c.png"/>
+          <p:cNvPicPr>
+            <a:picLocks noChangeAspect="1"/>
+          </p:cNvPicPr>
+          <p:nvPr/>
+        </p:nvPicPr>
+        <p:blipFill>
+          <a:blip r:embed="rId3"/>
+          <a:stretch>
+            <a:fillRect/>
+          </a:stretch>
+        </p:blipFill>
+        <p:spPr>
+          <a:xfrm>
+            <a:off x="4526280" y="2863967"/>
+            <a:ext cx="1325880" cy="1312944"/>
+          </a:xfrm>
+          <a:prstGeom prst="rect">
+            <a:avLst/>
+          </a:prstGeom>
+        </p:spPr>
+      </p:pic>
+      <p:cxnSp>
+        <p:nvCxnSpPr>
+          <p:cNvPr id="17" name="Connector 16"/>
+          <p:cNvCxnSpPr/>
+          <p:nvPr/>
+        </p:nvCxnSpPr>
+        <p:spPr>
+          <a:xfrm>
+            <a:off x="4160520" y="3337560"/>
+            <a:ext cx="347472" cy="182880"/>
+          </a:xfrm>
+          <a:prstGeom prst="line">
+            <a:avLst/>
+          </a:prstGeom>
+          <a:ln w="17780">
+            <a:solidFill>
+              <a:srgbClr val="2C6FBB"/>
+            </a:solidFill>
+            <a:tailEnd type="triangle" w="med" len="med"/>
+          </a:ln>
+        </p:spPr>
+        <p:style>
+          <a:lnRef idx="2">
+            <a:schemeClr val="accent1"/>
+          </a:lnRef>
+          <a:fillRef idx="0">
+            <a:schemeClr val="accent1"/>
+          </a:fillRef>
+          <a:effectRef idx="1">
+            <a:schemeClr val="accent1"/>
+          </a:effectRef>
+          <a:fontRef idx="minor">
+            <a:schemeClr val="tx1"/>
+          </a:fontRef>
+        </p:style>
+      </p:cxnSp>
+      <p:sp>
+        <p:nvSpPr>
+          <p:cNvPr id="18" name="TextBox 17"/>
+          <p:cNvSpPr txBox="1"/>
+          <p:nvPr/>
+        </p:nvSpPr>
+        <p:spPr>
+          <a:xfrm>
+            <a:off x="5897880" y="3337560"/>
+            <a:ext cx="914400" cy="365760"/>
+          </a:xfrm>
+          <a:prstGeom prst="rect">
+            <a:avLst/>
+          </a:prstGeom>
+          <a:noFill/>
+        </p:spPr>
+        <p:txBody>
+          <a:bodyPr wrap="square" anchor="ctr">
+            <a:spAutoFit/>
+          </a:bodyPr>
+          <a:lstStyle/>
+          <a:p>
+            <a:pPr algn="l">
+              <a:lnSpc>
+                <a:spcPct val="105000"/>
+              </a:lnSpc>
+            </a:pPr>
+            <a:r>
+              <a:rPr sz="1100" b="1" i="0">
+                <a:solidFill>
+                  <a:srgbClr val="2C6FBB"/>
+                </a:solidFill>
+                <a:latin typeface="Arial"/>
+              </a:rPr>
+              <a:t>pour</a:t>
+            </a:r>
+          </a:p>
+        </p:txBody>
+      </p:sp>
+      <p:pic>
+        <p:nvPicPr>
+          <p:cNvPr id="19" name="Picture 18" descr="grasp_handover_c.png"/>
+          <p:cNvPicPr>
+            <a:picLocks noChangeAspect="1"/>
+          </p:cNvPicPr>
+          <p:nvPr/>
+        </p:nvPicPr>
+        <p:blipFill>
+          <a:blip r:embed="rId4"/>
+          <a:stretch>
+            <a:fillRect/>
+          </a:stretch>
+        </p:blipFill>
+        <p:spPr>
+          <a:xfrm>
+            <a:off x="4526280" y="4218704"/>
+            <a:ext cx="1325880" cy="1163791"/>
+          </a:xfrm>
+          <a:prstGeom prst="rect">
+            <a:avLst/>
+          </a:prstGeom>
+        </p:spPr>
+      </p:pic>
+      <p:cxnSp>
+        <p:nvCxnSpPr>
+          <p:cNvPr id="20" name="Connector 19"/>
+          <p:cNvCxnSpPr/>
+          <p:nvPr/>
+        </p:nvCxnSpPr>
+        <p:spPr>
+          <a:xfrm>
+            <a:off x="4160520" y="3337560"/>
+            <a:ext cx="347472" cy="1463040"/>
+          </a:xfrm>
+          <a:prstGeom prst="line">
+            <a:avLst/>
+          </a:prstGeom>
+          <a:ln w="17780">
+            <a:solidFill>
+              <a:srgbClr val="8E44AD"/>
+            </a:solidFill>
+            <a:tailEnd type="triangle" w="med" len="med"/>
+          </a:ln>
+        </p:spPr>
+        <p:style>
+          <a:lnRef idx="2">
+            <a:schemeClr val="accent1"/>
+          </a:lnRef>
+          <a:fillRef idx="0">
+            <a:schemeClr val="accent1"/>
+          </a:fillRef>
+          <a:effectRef idx="1">
+            <a:schemeClr val="accent1"/>
+          </a:effectRef>
+          <a:fontRef idx="minor">
+            <a:schemeClr val="tx1"/>
+          </a:fontRef>
+        </p:style>
+      </p:cxnSp>
+      <p:sp>
+        <p:nvSpPr>
+          <p:cNvPr id="21" name="TextBox 20"/>
+          <p:cNvSpPr txBox="1"/>
+          <p:nvPr/>
+        </p:nvSpPr>
+        <p:spPr>
+          <a:xfrm>
+            <a:off x="5897880" y="4617720"/>
+            <a:ext cx="914400" cy="365760"/>
+          </a:xfrm>
+          <a:prstGeom prst="rect">
+            <a:avLst/>
+          </a:prstGeom>
+          <a:noFill/>
+        </p:spPr>
+        <p:txBody>
+          <a:bodyPr wrap="square" anchor="ctr">
+            <a:spAutoFit/>
+          </a:bodyPr>
+          <a:lstStyle/>
+          <a:p>
+            <a:pPr algn="l">
+              <a:lnSpc>
+                <a:spcPct val="105000"/>
+              </a:lnSpc>
+            </a:pPr>
+            <a:r>
+              <a:rPr sz="1100" b="1" i="0">
+                <a:solidFill>
+                  <a:srgbClr val="8E44AD"/>
+                </a:solidFill>
+                <a:latin typeface="Arial"/>
+              </a:rPr>
+              <a:t>hand-over</a:t>
+            </a:r>
+          </a:p>
+        </p:txBody>
+      </p:sp>
+      <p:sp>
+        <p:nvSpPr>
+          <p:cNvPr id="22" name="TextBox 21"/>
+          <p:cNvSpPr txBox="1"/>
+          <p:nvPr/>
+        </p:nvSpPr>
+        <p:spPr>
+          <a:xfrm>
+            <a:off x="3108960" y="5532120"/>
+            <a:ext cx="3566160" cy="320040"/>
+          </a:xfrm>
+          <a:prstGeom prst="rect">
+            <a:avLst/>
+          </a:prstGeom>
+          <a:noFill/>
+        </p:spPr>
+        <p:txBody>
+          <a:bodyPr wrap="square" anchor="t">
+            <a:spAutoFit/>
+          </a:bodyPr>
+          <a:lstStyle/>
+          <a:p>
+            <a:pPr algn="ctr">
+              <a:lnSpc>
+                <a:spcPct val="105000"/>
+              </a:lnSpc>
+            </a:pPr>
+            <a:r>
+              <a:rPr sz="1000" b="0" i="1">
+                <a:solidFill>
+                  <a:srgbClr val="2C3E50"/>
+                </a:solidFill>
+                <a:latin typeface="Arial"/>
+              </a:rPr>
+              <a:t>same mug, task → different grasp</a:t>
+            </a:r>
+          </a:p>
+        </p:txBody>
+      </p:sp>
+      <p:cxnSp>
+        <p:nvCxnSpPr>
+          <p:cNvPr id="23" name="Connector 22"/>
+          <p:cNvCxnSpPr/>
+          <p:nvPr/>
+        </p:nvCxnSpPr>
+        <p:spPr>
+          <a:xfrm flipV="1">
+            <a:off x="5989320" y="2697480"/>
+            <a:ext cx="1097280" cy="548640"/>
+          </a:xfrm>
+          <a:prstGeom prst="line">
+            <a:avLst/>
+          </a:prstGeom>
+          <a:ln w="31750">
+            <a:solidFill>
+              <a:srgbClr val="1A365D"/>
+            </a:solidFill>
+            <a:tailEnd type="triangle" w="med" len="med"/>
+          </a:ln>
+        </p:spPr>
+        <p:style>
+          <a:lnRef idx="2">
+            <a:schemeClr val="accent1"/>
+          </a:lnRef>
+          <a:fillRef idx="0">
+            <a:schemeClr val="accent1"/>
+          </a:fillRef>
+          <a:effectRef idx="1">
+            <a:schemeClr val="accent1"/>
+          </a:effectRef>
+          <a:fontRef idx="minor">
+            <a:schemeClr val="tx1"/>
+          </a:fontRef>
+        </p:style>
+      </p:cxnSp>
+      <p:sp>
+        <p:nvSpPr>
+          <p:cNvPr id="24" name="TextBox 23"/>
+          <p:cNvSpPr txBox="1"/>
+          <p:nvPr/>
+        </p:nvSpPr>
+        <p:spPr>
+          <a:xfrm>
+            <a:off x="5989320" y="2606040"/>
+            <a:ext cx="1097280" cy="320040"/>
+          </a:xfrm>
+          <a:prstGeom prst="rect">
+            <a:avLst/>
+          </a:prstGeom>
+          <a:noFill/>
+        </p:spPr>
+        <p:txBody>
+          <a:bodyPr wrap="square" anchor="t">
+            <a:spAutoFit/>
+          </a:bodyPr>
+          <a:lstStyle/>
+          <a:p>
+            <a:pPr algn="l">
+              <a:lnSpc>
+                <a:spcPct val="105000"/>
+              </a:lnSpc>
+            </a:pPr>
+            <a:r>
+              <a:rPr sz="1100" b="1" i="0">
                 <a:solidFill>
                   <a:srgbClr val="1A365D"/>
                 </a:solidFill>
                 <a:latin typeface="Arial"/>
               </a:rPr>
-              <a:t>My thesis (left): </a:t>
-            </a:r>
-            <a:r>
-              <a:rPr sz="1300" b="0" i="0">
+              <a:t>a grasp</a:t>
+            </a:r>
+          </a:p>
+        </p:txBody>
+      </p:sp>
+      <p:sp>
+        <p:nvSpPr>
+          <p:cNvPr id="25" name="Rounded Rectangle 24"/>
+          <p:cNvSpPr/>
+          <p:nvPr/>
+        </p:nvSpPr>
+        <p:spPr>
+          <a:xfrm>
+            <a:off x="7132320" y="2240280"/>
+            <a:ext cx="4526280" cy="640080"/>
+          </a:xfrm>
+          <a:prstGeom prst="roundRect">
+            <a:avLst/>
+          </a:prstGeom>
+          <a:solidFill>
+            <a:srgbClr val="FFFFFF"/>
+          </a:solidFill>
+          <a:ln w="19050">
+            <a:solidFill>
+              <a:srgbClr val="A93226"/>
+            </a:solidFill>
+          </a:ln>
+          <a:effectLst/>
+        </p:spPr>
+        <p:style>
+          <a:lnRef idx="1">
+            <a:schemeClr val="accent1"/>
+          </a:lnRef>
+          <a:fillRef idx="3">
+            <a:schemeClr val="accent1"/>
+          </a:fillRef>
+          <a:effectRef idx="2">
+            <a:schemeClr val="accent1"/>
+          </a:effectRef>
+          <a:fontRef idx="minor">
+            <a:schemeClr val="lt1"/>
+          </a:fontRef>
+        </p:style>
+        <p:txBody>
+          <a:bodyPr rtlCol="0" anchor="ctr" wrap="square" lIns="45720" rIns="45720" tIns="18288" bIns="18288"/>
+          <a:lstStyle/>
+          <a:p>
+            <a:pPr algn="ctr"/>
+            <a:r>
+              <a:rPr sz="1200" b="0">
                 <a:solidFill>
                   <a:srgbClr val="2C3E50"/>
                 </a:solidFill>
                 <a:latin typeface="Arial"/>
               </a:rPr>
-              <a:t>object mesh + a natural-language task → a dexterous grasp (same mug, the task picks a different grasp).   </a:t>
-            </a:r>
-            <a:r>
-              <a:rPr sz="1300" b="1" i="0">
+              <a:t>inputs:  grasp pose  +  start &amp; goal EE poses</a:t>
+            </a:r>
+          </a:p>
+        </p:txBody>
+      </p:sp>
+      <p:cxnSp>
+        <p:nvCxnSpPr>
+          <p:cNvPr id="26" name="Connector 25"/>
+          <p:cNvCxnSpPr/>
+          <p:nvPr/>
+        </p:nvCxnSpPr>
+        <p:spPr>
+          <a:xfrm>
+            <a:off x="9390888" y="2880360"/>
+            <a:ext cx="0" cy="301752"/>
+          </a:xfrm>
+          <a:prstGeom prst="line">
+            <a:avLst/>
+          </a:prstGeom>
+          <a:ln w="22225">
+            <a:solidFill>
+              <a:srgbClr val="888888"/>
+            </a:solidFill>
+            <a:tailEnd type="triangle" w="med" len="med"/>
+          </a:ln>
+        </p:spPr>
+        <p:style>
+          <a:lnRef idx="2">
+            <a:schemeClr val="accent1"/>
+          </a:lnRef>
+          <a:fillRef idx="0">
+            <a:schemeClr val="accent1"/>
+          </a:fillRef>
+          <a:effectRef idx="1">
+            <a:schemeClr val="accent1"/>
+          </a:effectRef>
+          <a:fontRef idx="minor">
+            <a:schemeClr val="tx1"/>
+          </a:fontRef>
+        </p:style>
+      </p:cxnSp>
+      <p:sp>
+        <p:nvSpPr>
+          <p:cNvPr id="27" name="Rounded Rectangle 26"/>
+          <p:cNvSpPr/>
+          <p:nvPr/>
+        </p:nvSpPr>
+        <p:spPr>
+          <a:xfrm>
+            <a:off x="7543800" y="3200400"/>
+            <a:ext cx="3703320" cy="868680"/>
+          </a:xfrm>
+          <a:prstGeom prst="roundRect">
+            <a:avLst/>
+          </a:prstGeom>
+          <a:solidFill>
+            <a:srgbClr val="FFFFFF"/>
+          </a:solidFill>
+          <a:ln w="19050">
+            <a:solidFill>
+              <a:srgbClr val="C0392B"/>
+            </a:solidFill>
+          </a:ln>
+          <a:effectLst/>
+        </p:spPr>
+        <p:style>
+          <a:lnRef idx="1">
+            <a:schemeClr val="accent1"/>
+          </a:lnRef>
+          <a:fillRef idx="3">
+            <a:schemeClr val="accent1"/>
+          </a:fillRef>
+          <a:effectRef idx="2">
+            <a:schemeClr val="accent1"/>
+          </a:effectRef>
+          <a:fontRef idx="minor">
+            <a:schemeClr val="lt1"/>
+          </a:fontRef>
+        </p:style>
+        <p:txBody>
+          <a:bodyPr rtlCol="0" anchor="ctr" wrap="square" lIns="45720" rIns="45720" tIns="18288" bIns="18288"/>
+          <a:lstStyle/>
+          <a:p>
+            <a:pPr algn="ctr"/>
+            <a:r>
+              <a:rPr sz="1250" b="1">
+                <a:solidFill>
+                  <a:srgbClr val="2C3E50"/>
+                </a:solidFill>
+                <a:latin typeface="Arial"/>
+              </a:rPr>
+              <a:t>Spill-free trajectory optimization</a:t>
+            </a:r>
+          </a:p>
+          <a:p>
+            <a:pPr algn="ctr"/>
+            <a:r>
+              <a:rPr sz="1100" b="0">
+                <a:solidFill>
+                  <a:srgbClr val="2C3E50"/>
+                </a:solidFill>
+                <a:latin typeface="Arial"/>
+              </a:rPr>
+              <a:t>(CHOMP + spill cost — ours)</a:t>
+            </a:r>
+          </a:p>
+        </p:txBody>
+      </p:sp>
+      <p:cxnSp>
+        <p:nvCxnSpPr>
+          <p:cNvPr id="28" name="Connector 27"/>
+          <p:cNvCxnSpPr/>
+          <p:nvPr/>
+        </p:nvCxnSpPr>
+        <p:spPr>
+          <a:xfrm>
+            <a:off x="9390888" y="4069080"/>
+            <a:ext cx="0" cy="301752"/>
+          </a:xfrm>
+          <a:prstGeom prst="line">
+            <a:avLst/>
+          </a:prstGeom>
+          <a:ln w="22225">
+            <a:solidFill>
+              <a:srgbClr val="888888"/>
+            </a:solidFill>
+            <a:tailEnd type="triangle" w="med" len="med"/>
+          </a:ln>
+        </p:spPr>
+        <p:style>
+          <a:lnRef idx="2">
+            <a:schemeClr val="accent1"/>
+          </a:lnRef>
+          <a:fillRef idx="0">
+            <a:schemeClr val="accent1"/>
+          </a:fillRef>
+          <a:effectRef idx="1">
+            <a:schemeClr val="accent1"/>
+          </a:effectRef>
+          <a:fontRef idx="minor">
+            <a:schemeClr val="tx1"/>
+          </a:fontRef>
+        </p:style>
+      </p:cxnSp>
+      <p:cxnSp>
+        <p:nvCxnSpPr>
+          <p:cNvPr id="29" name="Connector 28"/>
+          <p:cNvCxnSpPr/>
+          <p:nvPr/>
+        </p:nvCxnSpPr>
+        <p:spPr>
+          <a:xfrm flipV="1">
+            <a:off x="8092440" y="5316928"/>
+            <a:ext cx="162877" cy="169472"/>
+          </a:xfrm>
+          <a:prstGeom prst="line">
+            <a:avLst/>
+          </a:prstGeom>
+          <a:ln w="33020">
+            <a:solidFill>
+              <a:srgbClr val="C0392B"/>
+            </a:solidFill>
+          </a:ln>
+        </p:spPr>
+        <p:style>
+          <a:lnRef idx="2">
+            <a:schemeClr val="accent1"/>
+          </a:lnRef>
+          <a:fillRef idx="0">
+            <a:schemeClr val="accent1"/>
+          </a:fillRef>
+          <a:effectRef idx="1">
+            <a:schemeClr val="accent1"/>
+          </a:effectRef>
+          <a:fontRef idx="minor">
+            <a:schemeClr val="tx1"/>
+          </a:fontRef>
+        </p:style>
+      </p:cxnSp>
+      <p:cxnSp>
+        <p:nvCxnSpPr>
+          <p:cNvPr id="30" name="Connector 29"/>
+          <p:cNvCxnSpPr/>
+          <p:nvPr/>
+        </p:nvCxnSpPr>
+        <p:spPr>
+          <a:xfrm flipV="1">
+            <a:off x="8255317" y="5153970"/>
+            <a:ext cx="162877" cy="162958"/>
+          </a:xfrm>
+          <a:prstGeom prst="line">
+            <a:avLst/>
+          </a:prstGeom>
+          <a:ln w="33020">
+            <a:solidFill>
+              <a:srgbClr val="C0392B"/>
+            </a:solidFill>
+          </a:ln>
+        </p:spPr>
+        <p:style>
+          <a:lnRef idx="2">
+            <a:schemeClr val="accent1"/>
+          </a:lnRef>
+          <a:fillRef idx="0">
+            <a:schemeClr val="accent1"/>
+          </a:fillRef>
+          <a:effectRef idx="1">
+            <a:schemeClr val="accent1"/>
+          </a:effectRef>
+          <a:fontRef idx="minor">
+            <a:schemeClr val="tx1"/>
+          </a:fontRef>
+        </p:style>
+      </p:cxnSp>
+      <p:cxnSp>
+        <p:nvCxnSpPr>
+          <p:cNvPr id="31" name="Connector 30"/>
+          <p:cNvCxnSpPr/>
+          <p:nvPr/>
+        </p:nvCxnSpPr>
+        <p:spPr>
+          <a:xfrm flipV="1">
+            <a:off x="8418194" y="5003787"/>
+            <a:ext cx="162878" cy="150183"/>
+          </a:xfrm>
+          <a:prstGeom prst="line">
+            <a:avLst/>
+          </a:prstGeom>
+          <a:ln w="33020">
+            <a:solidFill>
+              <a:srgbClr val="C0392B"/>
+            </a:solidFill>
+          </a:ln>
+        </p:spPr>
+        <p:style>
+          <a:lnRef idx="2">
+            <a:schemeClr val="accent1"/>
+          </a:lnRef>
+          <a:fillRef idx="0">
+            <a:schemeClr val="accent1"/>
+          </a:fillRef>
+          <a:effectRef idx="1">
+            <a:schemeClr val="accent1"/>
+          </a:effectRef>
+          <a:fontRef idx="minor">
+            <a:schemeClr val="tx1"/>
+          </a:fontRef>
+        </p:style>
+      </p:cxnSp>
+      <p:cxnSp>
+        <p:nvCxnSpPr>
+          <p:cNvPr id="32" name="Connector 31"/>
+          <p:cNvCxnSpPr/>
+          <p:nvPr/>
+        </p:nvCxnSpPr>
+        <p:spPr>
+          <a:xfrm flipV="1">
+            <a:off x="8581072" y="4872150"/>
+            <a:ext cx="162878" cy="131637"/>
+          </a:xfrm>
+          <a:prstGeom prst="line">
+            <a:avLst/>
+          </a:prstGeom>
+          <a:ln w="33020">
+            <a:solidFill>
+              <a:srgbClr val="C0392B"/>
+            </a:solidFill>
+          </a:ln>
+        </p:spPr>
+        <p:style>
+          <a:lnRef idx="2">
+            <a:schemeClr val="accent1"/>
+          </a:lnRef>
+          <a:fillRef idx="0">
+            <a:schemeClr val="accent1"/>
+          </a:fillRef>
+          <a:effectRef idx="1">
+            <a:schemeClr val="accent1"/>
+          </a:effectRef>
+          <a:fontRef idx="minor">
+            <a:schemeClr val="tx1"/>
+          </a:fontRef>
+        </p:style>
+      </p:cxnSp>
+      <p:cxnSp>
+        <p:nvCxnSpPr>
+          <p:cNvPr id="33" name="Connector 32"/>
+          <p:cNvCxnSpPr/>
+          <p:nvPr/>
+        </p:nvCxnSpPr>
+        <p:spPr>
+          <a:xfrm flipV="1">
+            <a:off x="8743950" y="4764118"/>
+            <a:ext cx="162877" cy="108032"/>
+          </a:xfrm>
+          <a:prstGeom prst="line">
+            <a:avLst/>
+          </a:prstGeom>
+          <a:ln w="33020">
+            <a:solidFill>
+              <a:srgbClr val="C0392B"/>
+            </a:solidFill>
+          </a:ln>
+        </p:spPr>
+        <p:style>
+          <a:lnRef idx="2">
+            <a:schemeClr val="accent1"/>
+          </a:lnRef>
+          <a:fillRef idx="0">
+            <a:schemeClr val="accent1"/>
+          </a:fillRef>
+          <a:effectRef idx="1">
+            <a:schemeClr val="accent1"/>
+          </a:effectRef>
+          <a:fontRef idx="minor">
+            <a:schemeClr val="tx1"/>
+          </a:fontRef>
+        </p:style>
+      </p:cxnSp>
+      <p:cxnSp>
+        <p:nvCxnSpPr>
+          <p:cNvPr id="34" name="Connector 33"/>
+          <p:cNvCxnSpPr/>
+          <p:nvPr/>
+        </p:nvCxnSpPr>
+        <p:spPr>
+          <a:xfrm flipV="1">
+            <a:off x="8906827" y="4683844"/>
+            <a:ext cx="162878" cy="80274"/>
+          </a:xfrm>
+          <a:prstGeom prst="line">
+            <a:avLst/>
+          </a:prstGeom>
+          <a:ln w="33020">
+            <a:solidFill>
+              <a:srgbClr val="C0392B"/>
+            </a:solidFill>
+          </a:ln>
+        </p:spPr>
+        <p:style>
+          <a:lnRef idx="2">
+            <a:schemeClr val="accent1"/>
+          </a:lnRef>
+          <a:fillRef idx="0">
+            <a:schemeClr val="accent1"/>
+          </a:fillRef>
+          <a:effectRef idx="1">
+            <a:schemeClr val="accent1"/>
+          </a:effectRef>
+          <a:fontRef idx="minor">
+            <a:schemeClr val="tx1"/>
+          </a:fontRef>
+        </p:style>
+      </p:cxnSp>
+      <p:cxnSp>
+        <p:nvCxnSpPr>
+          <p:cNvPr id="35" name="Connector 34"/>
+          <p:cNvCxnSpPr/>
+          <p:nvPr/>
+        </p:nvCxnSpPr>
+        <p:spPr>
+          <a:xfrm flipV="1">
+            <a:off x="9069705" y="4634411"/>
+            <a:ext cx="162877" cy="49433"/>
+          </a:xfrm>
+          <a:prstGeom prst="line">
+            <a:avLst/>
+          </a:prstGeom>
+          <a:ln w="33020">
+            <a:solidFill>
+              <a:srgbClr val="C0392B"/>
+            </a:solidFill>
+          </a:ln>
+        </p:spPr>
+        <p:style>
+          <a:lnRef idx="2">
+            <a:schemeClr val="accent1"/>
+          </a:lnRef>
+          <a:fillRef idx="0">
+            <a:schemeClr val="accent1"/>
+          </a:fillRef>
+          <a:effectRef idx="1">
+            <a:schemeClr val="accent1"/>
+          </a:effectRef>
+          <a:fontRef idx="minor">
+            <a:schemeClr val="tx1"/>
+          </a:fontRef>
+        </p:style>
+      </p:cxnSp>
+      <p:cxnSp>
+        <p:nvCxnSpPr>
+          <p:cNvPr id="36" name="Connector 35"/>
+          <p:cNvCxnSpPr/>
+          <p:nvPr/>
+        </p:nvCxnSpPr>
+        <p:spPr>
+          <a:xfrm flipV="1">
+            <a:off x="9232582" y="4617720"/>
+            <a:ext cx="162877" cy="16691"/>
+          </a:xfrm>
+          <a:prstGeom prst="line">
+            <a:avLst/>
+          </a:prstGeom>
+          <a:ln w="33020">
+            <a:solidFill>
+              <a:srgbClr val="C0392B"/>
+            </a:solidFill>
+          </a:ln>
+        </p:spPr>
+        <p:style>
+          <a:lnRef idx="2">
+            <a:schemeClr val="accent1"/>
+          </a:lnRef>
+          <a:fillRef idx="0">
+            <a:schemeClr val="accent1"/>
+          </a:fillRef>
+          <a:effectRef idx="1">
+            <a:schemeClr val="accent1"/>
+          </a:effectRef>
+          <a:fontRef idx="minor">
+            <a:schemeClr val="tx1"/>
+          </a:fontRef>
+        </p:style>
+      </p:cxnSp>
+      <p:cxnSp>
+        <p:nvCxnSpPr>
+          <p:cNvPr id="37" name="Connector 36"/>
+          <p:cNvCxnSpPr/>
+          <p:nvPr/>
+        </p:nvCxnSpPr>
+        <p:spPr>
+          <a:xfrm>
+            <a:off x="9395459" y="4617720"/>
+            <a:ext cx="162878" cy="16691"/>
+          </a:xfrm>
+          <a:prstGeom prst="line">
+            <a:avLst/>
+          </a:prstGeom>
+          <a:ln w="33020">
+            <a:solidFill>
+              <a:srgbClr val="C0392B"/>
+            </a:solidFill>
+          </a:ln>
+        </p:spPr>
+        <p:style>
+          <a:lnRef idx="2">
+            <a:schemeClr val="accent1"/>
+          </a:lnRef>
+          <a:fillRef idx="0">
+            <a:schemeClr val="accent1"/>
+          </a:fillRef>
+          <a:effectRef idx="1">
+            <a:schemeClr val="accent1"/>
+          </a:effectRef>
+          <a:fontRef idx="minor">
+            <a:schemeClr val="tx1"/>
+          </a:fontRef>
+        </p:style>
+      </p:cxnSp>
+      <p:cxnSp>
+        <p:nvCxnSpPr>
+          <p:cNvPr id="38" name="Connector 37"/>
+          <p:cNvCxnSpPr/>
+          <p:nvPr/>
+        </p:nvCxnSpPr>
+        <p:spPr>
+          <a:xfrm>
+            <a:off x="9558337" y="4634411"/>
+            <a:ext cx="162878" cy="49433"/>
+          </a:xfrm>
+          <a:prstGeom prst="line">
+            <a:avLst/>
+          </a:prstGeom>
+          <a:ln w="33020">
+            <a:solidFill>
+              <a:srgbClr val="C0392B"/>
+            </a:solidFill>
+          </a:ln>
+        </p:spPr>
+        <p:style>
+          <a:lnRef idx="2">
+            <a:schemeClr val="accent1"/>
+          </a:lnRef>
+          <a:fillRef idx="0">
+            <a:schemeClr val="accent1"/>
+          </a:fillRef>
+          <a:effectRef idx="1">
+            <a:schemeClr val="accent1"/>
+          </a:effectRef>
+          <a:fontRef idx="minor">
+            <a:schemeClr val="tx1"/>
+          </a:fontRef>
+        </p:style>
+      </p:cxnSp>
+      <p:cxnSp>
+        <p:nvCxnSpPr>
+          <p:cNvPr id="39" name="Connector 38"/>
+          <p:cNvCxnSpPr/>
+          <p:nvPr/>
+        </p:nvCxnSpPr>
+        <p:spPr>
+          <a:xfrm>
+            <a:off x="9721215" y="4683844"/>
+            <a:ext cx="162877" cy="80274"/>
+          </a:xfrm>
+          <a:prstGeom prst="line">
+            <a:avLst/>
+          </a:prstGeom>
+          <a:ln w="33020">
+            <a:solidFill>
+              <a:srgbClr val="C0392B"/>
+            </a:solidFill>
+          </a:ln>
+        </p:spPr>
+        <p:style>
+          <a:lnRef idx="2">
+            <a:schemeClr val="accent1"/>
+          </a:lnRef>
+          <a:fillRef idx="0">
+            <a:schemeClr val="accent1"/>
+          </a:fillRef>
+          <a:effectRef idx="1">
+            <a:schemeClr val="accent1"/>
+          </a:effectRef>
+          <a:fontRef idx="minor">
+            <a:schemeClr val="tx1"/>
+          </a:fontRef>
+        </p:style>
+      </p:cxnSp>
+      <p:cxnSp>
+        <p:nvCxnSpPr>
+          <p:cNvPr id="40" name="Connector 39"/>
+          <p:cNvCxnSpPr/>
+          <p:nvPr/>
+        </p:nvCxnSpPr>
+        <p:spPr>
+          <a:xfrm>
+            <a:off x="9884092" y="4764118"/>
+            <a:ext cx="162877" cy="108032"/>
+          </a:xfrm>
+          <a:prstGeom prst="line">
+            <a:avLst/>
+          </a:prstGeom>
+          <a:ln w="33020">
+            <a:solidFill>
+              <a:srgbClr val="C0392B"/>
+            </a:solidFill>
+          </a:ln>
+        </p:spPr>
+        <p:style>
+          <a:lnRef idx="2">
+            <a:schemeClr val="accent1"/>
+          </a:lnRef>
+          <a:fillRef idx="0">
+            <a:schemeClr val="accent1"/>
+          </a:fillRef>
+          <a:effectRef idx="1">
+            <a:schemeClr val="accent1"/>
+          </a:effectRef>
+          <a:fontRef idx="minor">
+            <a:schemeClr val="tx1"/>
+          </a:fontRef>
+        </p:style>
+      </p:cxnSp>
+      <p:cxnSp>
+        <p:nvCxnSpPr>
+          <p:cNvPr id="41" name="Connector 40"/>
+          <p:cNvCxnSpPr/>
+          <p:nvPr/>
+        </p:nvCxnSpPr>
+        <p:spPr>
+          <a:xfrm>
+            <a:off x="10046969" y="4872150"/>
+            <a:ext cx="162878" cy="131637"/>
+          </a:xfrm>
+          <a:prstGeom prst="line">
+            <a:avLst/>
+          </a:prstGeom>
+          <a:ln w="33020">
+            <a:solidFill>
+              <a:srgbClr val="C0392B"/>
+            </a:solidFill>
+          </a:ln>
+        </p:spPr>
+        <p:style>
+          <a:lnRef idx="2">
+            <a:schemeClr val="accent1"/>
+          </a:lnRef>
+          <a:fillRef idx="0">
+            <a:schemeClr val="accent1"/>
+          </a:fillRef>
+          <a:effectRef idx="1">
+            <a:schemeClr val="accent1"/>
+          </a:effectRef>
+          <a:fontRef idx="minor">
+            <a:schemeClr val="tx1"/>
+          </a:fontRef>
+        </p:style>
+      </p:cxnSp>
+      <p:cxnSp>
+        <p:nvCxnSpPr>
+          <p:cNvPr id="42" name="Connector 41"/>
+          <p:cNvCxnSpPr/>
+          <p:nvPr/>
+        </p:nvCxnSpPr>
+        <p:spPr>
+          <a:xfrm>
+            <a:off x="10209847" y="5003787"/>
+            <a:ext cx="162878" cy="150183"/>
+          </a:xfrm>
+          <a:prstGeom prst="line">
+            <a:avLst/>
+          </a:prstGeom>
+          <a:ln w="33020">
+            <a:solidFill>
+              <a:srgbClr val="C0392B"/>
+            </a:solidFill>
+          </a:ln>
+        </p:spPr>
+        <p:style>
+          <a:lnRef idx="2">
+            <a:schemeClr val="accent1"/>
+          </a:lnRef>
+          <a:fillRef idx="0">
+            <a:schemeClr val="accent1"/>
+          </a:fillRef>
+          <a:effectRef idx="1">
+            <a:schemeClr val="accent1"/>
+          </a:effectRef>
+          <a:fontRef idx="minor">
+            <a:schemeClr val="tx1"/>
+          </a:fontRef>
+        </p:style>
+      </p:cxnSp>
+      <p:cxnSp>
+        <p:nvCxnSpPr>
+          <p:cNvPr id="43" name="Connector 42"/>
+          <p:cNvCxnSpPr/>
+          <p:nvPr/>
+        </p:nvCxnSpPr>
+        <p:spPr>
+          <a:xfrm>
+            <a:off x="10372725" y="5153970"/>
+            <a:ext cx="162877" cy="162958"/>
+          </a:xfrm>
+          <a:prstGeom prst="line">
+            <a:avLst/>
+          </a:prstGeom>
+          <a:ln w="33020">
+            <a:solidFill>
+              <a:srgbClr val="C0392B"/>
+            </a:solidFill>
+          </a:ln>
+        </p:spPr>
+        <p:style>
+          <a:lnRef idx="2">
+            <a:schemeClr val="accent1"/>
+          </a:lnRef>
+          <a:fillRef idx="0">
+            <a:schemeClr val="accent1"/>
+          </a:fillRef>
+          <a:effectRef idx="1">
+            <a:schemeClr val="accent1"/>
+          </a:effectRef>
+          <a:fontRef idx="minor">
+            <a:schemeClr val="tx1"/>
+          </a:fontRef>
+        </p:style>
+      </p:cxnSp>
+      <p:cxnSp>
+        <p:nvCxnSpPr>
+          <p:cNvPr id="44" name="Connector 43"/>
+          <p:cNvCxnSpPr/>
+          <p:nvPr/>
+        </p:nvCxnSpPr>
+        <p:spPr>
+          <a:xfrm>
+            <a:off x="10535602" y="5316928"/>
+            <a:ext cx="162878" cy="169472"/>
+          </a:xfrm>
+          <a:prstGeom prst="line">
+            <a:avLst/>
+          </a:prstGeom>
+          <a:ln w="33020">
+            <a:solidFill>
+              <a:srgbClr val="C0392B"/>
+            </a:solidFill>
+          </a:ln>
+        </p:spPr>
+        <p:style>
+          <a:lnRef idx="2">
+            <a:schemeClr val="accent1"/>
+          </a:lnRef>
+          <a:fillRef idx="0">
+            <a:schemeClr val="accent1"/>
+          </a:fillRef>
+          <a:effectRef idx="1">
+            <a:schemeClr val="accent1"/>
+          </a:effectRef>
+          <a:fontRef idx="minor">
+            <a:schemeClr val="tx1"/>
+          </a:fontRef>
+        </p:style>
+      </p:cxnSp>
+      <p:sp>
+        <p:nvSpPr>
+          <p:cNvPr id="45" name="Oval 44"/>
+          <p:cNvSpPr/>
+          <p:nvPr/>
+        </p:nvSpPr>
+        <p:spPr>
+          <a:xfrm>
+            <a:off x="8010144" y="5404104"/>
+            <a:ext cx="164592" cy="164592"/>
+          </a:xfrm>
+          <a:prstGeom prst="ellipse">
+            <a:avLst/>
+          </a:prstGeom>
+          <a:solidFill>
+            <a:srgbClr val="27865A"/>
+          </a:solidFill>
+          <a:ln>
+            <a:noFill/>
+          </a:ln>
+          <a:effectLst/>
+        </p:spPr>
+        <p:style>
+          <a:lnRef idx="1">
+            <a:schemeClr val="accent1"/>
+          </a:lnRef>
+          <a:fillRef idx="3">
+            <a:schemeClr val="accent1"/>
+          </a:fillRef>
+          <a:effectRef idx="2">
+            <a:schemeClr val="accent1"/>
+          </a:effectRef>
+          <a:fontRef idx="minor">
+            <a:schemeClr val="lt1"/>
+          </a:fontRef>
+        </p:style>
+        <p:txBody>
+          <a:bodyPr rtlCol="0" anchor="ctr"/>
+          <a:lstStyle/>
+          <a:p>
+            <a:pPr algn="ctr"/>
+          </a:p>
+        </p:txBody>
+      </p:sp>
+      <p:sp>
+        <p:nvSpPr>
+          <p:cNvPr id="46" name="Oval 45"/>
+          <p:cNvSpPr/>
+          <p:nvPr/>
+        </p:nvSpPr>
+        <p:spPr>
+          <a:xfrm>
+            <a:off x="10616184" y="5404104"/>
+            <a:ext cx="164592" cy="164592"/>
+          </a:xfrm>
+          <a:prstGeom prst="ellipse">
+            <a:avLst/>
+          </a:prstGeom>
+          <a:solidFill>
+            <a:srgbClr val="1A365D"/>
+          </a:solidFill>
+          <a:ln>
+            <a:noFill/>
+          </a:ln>
+          <a:effectLst/>
+        </p:spPr>
+        <p:style>
+          <a:lnRef idx="1">
+            <a:schemeClr val="accent1"/>
+          </a:lnRef>
+          <a:fillRef idx="3">
+            <a:schemeClr val="accent1"/>
+          </a:fillRef>
+          <a:effectRef idx="2">
+            <a:schemeClr val="accent1"/>
+          </a:effectRef>
+          <a:fontRef idx="minor">
+            <a:schemeClr val="lt1"/>
+          </a:fontRef>
+        </p:style>
+        <p:txBody>
+          <a:bodyPr rtlCol="0" anchor="ctr"/>
+          <a:lstStyle/>
+          <a:p>
+            <a:pPr algn="ctr"/>
+          </a:p>
+        </p:txBody>
+      </p:sp>
+      <p:sp>
+        <p:nvSpPr>
+          <p:cNvPr id="47" name="TextBox 46"/>
+          <p:cNvSpPr txBox="1"/>
+          <p:nvPr/>
+        </p:nvSpPr>
+        <p:spPr>
+          <a:xfrm>
+            <a:off x="7772400" y="5559552"/>
+            <a:ext cx="822960" cy="274320"/>
+          </a:xfrm>
+          <a:prstGeom prst="rect">
+            <a:avLst/>
+          </a:prstGeom>
+          <a:noFill/>
+        </p:spPr>
+        <p:txBody>
+          <a:bodyPr wrap="square" anchor="t">
+            <a:spAutoFit/>
+          </a:bodyPr>
+          <a:lstStyle/>
+          <a:p>
+            <a:pPr algn="ctr">
+              <a:lnSpc>
+                <a:spcPct val="105000"/>
+              </a:lnSpc>
+            </a:pPr>
+            <a:r>
+              <a:rPr sz="950" b="0" i="0">
+                <a:solidFill>
+                  <a:srgbClr val="27865A"/>
+                </a:solidFill>
+                <a:latin typeface="Arial"/>
+              </a:rPr>
+              <a:t>start</a:t>
+            </a:r>
+          </a:p>
+        </p:txBody>
+      </p:sp>
+      <p:sp>
+        <p:nvSpPr>
+          <p:cNvPr id="48" name="TextBox 47"/>
+          <p:cNvSpPr txBox="1"/>
+          <p:nvPr/>
+        </p:nvSpPr>
+        <p:spPr>
+          <a:xfrm>
+            <a:off x="10378440" y="5559552"/>
+            <a:ext cx="822960" cy="274320"/>
+          </a:xfrm>
+          <a:prstGeom prst="rect">
+            <a:avLst/>
+          </a:prstGeom>
+          <a:noFill/>
+        </p:spPr>
+        <p:txBody>
+          <a:bodyPr wrap="square" anchor="t">
+            <a:spAutoFit/>
+          </a:bodyPr>
+          <a:lstStyle/>
+          <a:p>
+            <a:pPr algn="ctr">
+              <a:lnSpc>
+                <a:spcPct val="105000"/>
+              </a:lnSpc>
+            </a:pPr>
+            <a:r>
+              <a:rPr sz="950" b="0" i="0">
+                <a:solidFill>
+                  <a:srgbClr val="1A365D"/>
+                </a:solidFill>
+                <a:latin typeface="Arial"/>
+              </a:rPr>
+              <a:t>goal</a:t>
+            </a:r>
+          </a:p>
+        </p:txBody>
+      </p:sp>
+      <p:sp>
+        <p:nvSpPr>
+          <p:cNvPr id="49" name="TextBox 48"/>
+          <p:cNvSpPr txBox="1"/>
+          <p:nvPr/>
+        </p:nvSpPr>
+        <p:spPr>
+          <a:xfrm>
+            <a:off x="7132320" y="5623560"/>
+            <a:ext cx="4526280" cy="320040"/>
+          </a:xfrm>
+          <a:prstGeom prst="rect">
+            <a:avLst/>
+          </a:prstGeom>
+          <a:noFill/>
+        </p:spPr>
+        <p:txBody>
+          <a:bodyPr wrap="square" anchor="t">
+            <a:spAutoFit/>
+          </a:bodyPr>
+          <a:lstStyle/>
+          <a:p>
+            <a:pPr algn="ctr">
+              <a:lnSpc>
+                <a:spcPct val="105000"/>
+              </a:lnSpc>
+            </a:pPr>
+            <a:r>
+              <a:rPr sz="1050" b="1" i="0">
                 <a:solidFill>
                   <a:srgbClr val="A93226"/>
                 </a:solidFill>
                 <a:latin typeface="Arial"/>
               </a:rPr>
-              <a:t>This project (right): </a:t>
-            </a:r>
-            <a:r>
-              <a:rPr sz="1300" b="0" i="0">
-                <a:solidFill>
-                  <a:srgbClr val="2C3E50"/>
-                </a:solidFill>
-                <a:latin typeface="Arial"/>
-              </a:rPr>
-              <a:t>take that grasp + start/goal poses → plan a spill-free carry trajectory.</a:t>
-            </a:r>
-          </a:p>
-        </p:txBody>
-      </p:sp>
-      <p:sp>
-        <p:nvSpPr>
-          <p:cNvPr id="6" name="TextBox 5"/>
+              <a:t>no-spill SE(3) carry trajectory</a:t>
+            </a:r>
+          </a:p>
+        </p:txBody>
+      </p:sp>
+      <p:sp>
+        <p:nvSpPr>
+          <p:cNvPr id="50" name="TextBox 49"/>
           <p:cNvSpPr txBox="1"/>
           <p:nvPr/>
         </p:nvSpPr>

--- a/docs/slides_proposal_editable.pptx
+++ b/docs/slides_proposal_editable.pptx
@@ -3374,7 +3374,7 @@
         <p:spPr>
           <a:xfrm>
             <a:off x="274320" y="1417320"/>
-            <a:ext cx="6446520" cy="4526280"/>
+            <a:ext cx="6446520" cy="4389120"/>
           </a:xfrm>
           <a:prstGeom prst="roundRect">
             <a:avLst/>
@@ -3418,7 +3418,7 @@
         <p:spPr>
           <a:xfrm>
             <a:off x="6903720" y="1417320"/>
-            <a:ext cx="4983480" cy="4526280"/>
+            <a:ext cx="4983480" cy="4389120"/>
           </a:xfrm>
           <a:prstGeom prst="roundRect">
             <a:avLst/>
@@ -5152,8 +5152,8 @@
         </p:nvSpPr>
         <p:spPr>
           <a:xfrm>
-            <a:off x="7132320" y="5623560"/>
-            <a:ext cx="4526280" cy="320040"/>
+            <a:off x="7132320" y="5577840"/>
+            <a:ext cx="4526280" cy="292608"/>
           </a:xfrm>
           <a:prstGeom prst="rect">
             <a:avLst/>
@@ -5183,9 +5183,143 @@
           </a:p>
         </p:txBody>
       </p:sp>
-      <p:sp>
-        <p:nvSpPr>
-          <p:cNvPr id="50" name="TextBox 49"/>
+      <p:cxnSp>
+        <p:nvCxnSpPr>
+          <p:cNvPr id="50" name="Connector 49"/>
+          <p:cNvCxnSpPr/>
+          <p:nvPr/>
+        </p:nvCxnSpPr>
+        <p:spPr>
+          <a:xfrm>
+            <a:off x="3474720" y="5852160"/>
+            <a:ext cx="2194560" cy="109728"/>
+          </a:xfrm>
+          <a:prstGeom prst="line">
+            <a:avLst/>
+          </a:prstGeom>
+          <a:ln w="25400">
+            <a:solidFill>
+              <a:srgbClr val="1A365D"/>
+            </a:solidFill>
+            <a:tailEnd type="triangle" w="med" len="med"/>
+          </a:ln>
+        </p:spPr>
+        <p:style>
+          <a:lnRef idx="2">
+            <a:schemeClr val="accent1"/>
+          </a:lnRef>
+          <a:fillRef idx="0">
+            <a:schemeClr val="accent1"/>
+          </a:fillRef>
+          <a:effectRef idx="1">
+            <a:schemeClr val="accent1"/>
+          </a:effectRef>
+          <a:fontRef idx="minor">
+            <a:schemeClr val="tx1"/>
+          </a:fontRef>
+        </p:style>
+      </p:cxnSp>
+      <p:cxnSp>
+        <p:nvCxnSpPr>
+          <p:cNvPr id="51" name="Connector 50"/>
+          <p:cNvCxnSpPr/>
+          <p:nvPr/>
+        </p:nvCxnSpPr>
+        <p:spPr>
+          <a:xfrm flipH="1">
+            <a:off x="6766560" y="5852160"/>
+            <a:ext cx="2560320" cy="109728"/>
+          </a:xfrm>
+          <a:prstGeom prst="line">
+            <a:avLst/>
+          </a:prstGeom>
+          <a:ln w="25400">
+            <a:solidFill>
+              <a:srgbClr val="1A365D"/>
+            </a:solidFill>
+            <a:tailEnd type="triangle" w="med" len="med"/>
+          </a:ln>
+        </p:spPr>
+        <p:style>
+          <a:lnRef idx="2">
+            <a:schemeClr val="accent1"/>
+          </a:lnRef>
+          <a:fillRef idx="0">
+            <a:schemeClr val="accent1"/>
+          </a:fillRef>
+          <a:effectRef idx="1">
+            <a:schemeClr val="accent1"/>
+          </a:effectRef>
+          <a:fontRef idx="minor">
+            <a:schemeClr val="tx1"/>
+          </a:fontRef>
+        </p:style>
+      </p:cxnSp>
+      <p:sp>
+        <p:nvSpPr>
+          <p:cNvPr id="52" name="Rounded Rectangle 51"/>
+          <p:cNvSpPr/>
+          <p:nvPr/>
+        </p:nvSpPr>
+        <p:spPr>
+          <a:xfrm>
+            <a:off x="1371600" y="5989320"/>
+            <a:ext cx="9418320" cy="566928"/>
+          </a:xfrm>
+          <a:prstGeom prst="roundRect">
+            <a:avLst/>
+          </a:prstGeom>
+          <a:solidFill>
+            <a:srgbClr val="1A365D"/>
+          </a:solidFill>
+          <a:ln>
+            <a:noFill/>
+          </a:ln>
+          <a:effectLst/>
+        </p:spPr>
+        <p:style>
+          <a:lnRef idx="1">
+            <a:schemeClr val="accent1"/>
+          </a:lnRef>
+          <a:fillRef idx="3">
+            <a:schemeClr val="accent1"/>
+          </a:fillRef>
+          <a:effectRef idx="2">
+            <a:schemeClr val="accent1"/>
+          </a:effectRef>
+          <a:fontRef idx="minor">
+            <a:schemeClr val="lt1"/>
+          </a:fontRef>
+        </p:style>
+        <p:txBody>
+          <a:bodyPr rtlCol="0" anchor="ctr" wrap="square" lIns="45720" rIns="45720" tIns="18288" bIns="18288"/>
+          <a:lstStyle/>
+          <a:p>
+            <a:pPr algn="ctr"/>
+            <a:r>
+              <a:rPr sz="1400" b="1">
+                <a:solidFill>
+                  <a:srgbClr val="FFFFFF"/>
+                </a:solidFill>
+                <a:latin typeface="Arial"/>
+              </a:rPr>
+              <a:t>⟹  Together: a motion-aware grasp-pose selector</a:t>
+            </a:r>
+            <a:r>
+              <a:rPr sz="1150" b="0">
+                <a:solidFill>
+                  <a:srgbClr val="FFFFFF"/>
+                </a:solidFill>
+                <a:latin typeface="Arial"/>
+              </a:rPr>
+              <a:t>   — pick the grasp the spill-free planner carries with the largest margin</a:t>
+            </a:r>
+          </a:p>
+        </p:txBody>
+      </p:sp>
+      <p:sp>
+        <p:nvSpPr>
+          <p:cNvPr id="53" name="TextBox 52"/>
           <p:cNvSpPr txBox="1"/>
           <p:nvPr/>
         </p:nvSpPr>

--- a/docs/slides_proposal_editable.pptx
+++ b/docs/slides_proposal_editable.pptx
@@ -13,7 +13,6 @@
     <p:sldId id="261" r:id="rId12"/>
     <p:sldId id="262" r:id="rId13"/>
     <p:sldId id="263" r:id="rId14"/>
-    <p:sldId id="264" r:id="rId15"/>
   </p:sldIdLst>
   <p:sldSz cx="12191695" cy="6858000" type="screen4x3"/>
   <p:notesSz cx="6858000" cy="9144000"/>
@@ -5408,7 +5407,7 @@
                 </a:solidFill>
                 <a:latin typeface="Arial"/>
               </a:rPr>
-              <a:t>Problem — carry liquid from A to B without spilling</a:t>
+              <a:t>Problem — the danger is motion, not just tilt</a:t>
             </a:r>
           </a:p>
         </p:txBody>
@@ -5464,7 +5463,7 @@
         </p:nvSpPr>
         <p:spPr>
           <a:xfrm>
-            <a:off x="640080" y="1463040"/>
+            <a:off x="640080" y="1344168"/>
             <a:ext cx="10972800" cy="457200"/>
           </a:xfrm>
           <a:prstGeom prst="rect">
@@ -5484,27 +5483,60 @@
               </a:lnSpc>
             </a:pPr>
             <a:r>
-              <a:rPr sz="1900" b="0" i="0">
+              <a:rPr sz="1600" b="0" i="0">
                 <a:solidFill>
                   <a:srgbClr val="2C3E50"/>
                 </a:solidFill>
                 <a:latin typeface="Arial"/>
               </a:rPr>
-              <a:t>Given a grasped mug, plan a 6-DoF end-effector trajectory that is:</a:t>
-            </a:r>
-          </a:p>
-        </p:txBody>
-      </p:sp>
-      <p:sp>
-        <p:nvSpPr>
-          <p:cNvPr id="5" name="TextBox 4"/>
+              <a:t>Given a grasped mug + start/goal poses, plan a 6-DoF trajectory that is </a:t>
+            </a:r>
+            <a:r>
+              <a:rPr sz="1600" b="1" i="0">
+                <a:solidFill>
+                  <a:srgbClr val="2C3E50"/>
+                </a:solidFill>
+                <a:latin typeface="Arial"/>
+              </a:rPr>
+              <a:t>spill-free, obstacle-avoiding, and smooth.</a:t>
+            </a:r>
+          </a:p>
+        </p:txBody>
+      </p:sp>
+      <p:pic>
+        <p:nvPicPr>
+          <p:cNvPr id="5" name="Picture 4" descr="spill_cone.png"/>
+          <p:cNvPicPr>
+            <a:picLocks noChangeAspect="1"/>
+          </p:cNvPicPr>
+          <p:nvPr/>
+        </p:nvPicPr>
+        <p:blipFill>
+          <a:blip r:embed="rId2"/>
+          <a:stretch>
+            <a:fillRect/>
+          </a:stretch>
+        </p:blipFill>
+        <p:spPr>
+          <a:xfrm>
+            <a:off x="2585633" y="1874519"/>
+            <a:ext cx="7020428" cy="3383280"/>
+          </a:xfrm>
+          <a:prstGeom prst="rect">
+            <a:avLst/>
+          </a:prstGeom>
+        </p:spPr>
+      </p:pic>
+      <p:sp>
+        <p:nvSpPr>
+          <p:cNvPr id="6" name="TextBox 5"/>
           <p:cNvSpPr txBox="1"/>
           <p:nvPr/>
         </p:nvSpPr>
         <p:spPr>
           <a:xfrm>
-            <a:off x="868680" y="2103120"/>
-            <a:ext cx="10515600" cy="548640"/>
+            <a:off x="640080" y="5367528"/>
+            <a:ext cx="10972800" cy="731520"/>
           </a:xfrm>
           <a:prstGeom prst="rect">
             <a:avLst/>
@@ -5523,158 +5555,22 @@
               </a:lnSpc>
             </a:pPr>
             <a:r>
-              <a:rPr sz="1800" b="1" i="0">
+              <a:rPr sz="1400" b="1" i="0">
+                <a:solidFill>
+                  <a:srgbClr val="1A365D"/>
+                </a:solidFill>
+                <a:latin typeface="Arial"/>
+              </a:rPr>
+              <a:t>No-spill ⇔ apparent-up  a − g  stays inside the rim cone  θmax.   </a:t>
+            </a:r>
+            <a:r>
+              <a:rPr sz="1400" b="0" i="0">
                 <a:solidFill>
                   <a:srgbClr val="2C3E50"/>
                 </a:solidFill>
                 <a:latin typeface="Arial"/>
               </a:rPr>
-              <a:t>(a) </a:t>
-            </a:r>
-            <a:r>
-              <a:rPr sz="1800" b="0" i="0">
-                <a:solidFill>
-                  <a:srgbClr val="2C3E50"/>
-                </a:solidFill>
-                <a:latin typeface="Arial"/>
-              </a:rPr>
-              <a:t>spill-free      </a:t>
-            </a:r>
-            <a:r>
-              <a:rPr sz="1800" b="1" i="0">
-                <a:solidFill>
-                  <a:srgbClr val="2C3E50"/>
-                </a:solidFill>
-                <a:latin typeface="Arial"/>
-              </a:rPr>
-              <a:t>(b) </a:t>
-            </a:r>
-            <a:r>
-              <a:rPr sz="1800" b="0" i="0">
-                <a:solidFill>
-                  <a:srgbClr val="2C3E50"/>
-                </a:solidFill>
-                <a:latin typeface="Arial"/>
-              </a:rPr>
-              <a:t>obstacle-avoiding      </a:t>
-            </a:r>
-            <a:r>
-              <a:rPr sz="1800" b="1" i="0">
-                <a:solidFill>
-                  <a:srgbClr val="2C3E50"/>
-                </a:solidFill>
-                <a:latin typeface="Arial"/>
-              </a:rPr>
-              <a:t>(c) </a:t>
-            </a:r>
-            <a:r>
-              <a:rPr sz="1800" b="0" i="0">
-                <a:solidFill>
-                  <a:srgbClr val="2C3E50"/>
-                </a:solidFill>
-                <a:latin typeface="Arial"/>
-              </a:rPr>
-              <a:t>smooth      </a:t>
-            </a:r>
-            <a:r>
-              <a:rPr sz="1800" b="1" i="0">
-                <a:solidFill>
-                  <a:srgbClr val="2C3E50"/>
-                </a:solidFill>
-                <a:latin typeface="Arial"/>
-              </a:rPr>
-              <a:t>(d) </a:t>
-            </a:r>
-            <a:r>
-              <a:rPr sz="1800" b="0" i="0">
-                <a:solidFill>
-                  <a:srgbClr val="2C3E50"/>
-                </a:solidFill>
-                <a:latin typeface="Arial"/>
-              </a:rPr>
-              <a:t>tilt ≤ θmax</a:t>
-            </a:r>
-          </a:p>
-        </p:txBody>
-      </p:sp>
-      <p:sp>
-        <p:nvSpPr>
-          <p:cNvPr id="6" name="Rounded Rectangle 5"/>
-          <p:cNvSpPr/>
-          <p:nvPr/>
-        </p:nvSpPr>
-        <p:spPr>
-          <a:xfrm>
-            <a:off x="822960" y="3200400"/>
-            <a:ext cx="10515600" cy="1097280"/>
-          </a:xfrm>
-          <a:prstGeom prst="roundRect">
-            <a:avLst/>
-          </a:prstGeom>
-          <a:solidFill>
-            <a:srgbClr val="FBECEB"/>
-          </a:solidFill>
-          <a:ln w="19050">
-            <a:solidFill>
-              <a:srgbClr val="C0392B"/>
-            </a:solidFill>
-          </a:ln>
-          <a:effectLst/>
-        </p:spPr>
-        <p:style>
-          <a:lnRef idx="1">
-            <a:schemeClr val="accent1"/>
-          </a:lnRef>
-          <a:fillRef idx="3">
-            <a:schemeClr val="accent1"/>
-          </a:fillRef>
-          <a:effectRef idx="2">
-            <a:schemeClr val="accent1"/>
-          </a:effectRef>
-          <a:fontRef idx="minor">
-            <a:schemeClr val="lt1"/>
-          </a:fontRef>
-        </p:style>
-        <p:txBody>
-          <a:bodyPr rtlCol="0" anchor="ctr" wrap="square"/>
-          <a:lstStyle/>
-          <a:p>
-            <a:pPr algn="l"/>
-            <a:r>
-              <a:rPr sz="1900" b="1">
-                <a:solidFill>
-                  <a:srgbClr val="2C3E50"/>
-                </a:solidFill>
-                <a:latin typeface="Arial"/>
-              </a:rPr>
-              <a:t>Even a perfectly upright cup spills</a:t>
-            </a:r>
-            <a:r>
-              <a:rPr sz="1800" b="0">
-                <a:solidFill>
-                  <a:srgbClr val="2C3E50"/>
-                </a:solidFill>
-                <a:latin typeface="Arial"/>
-              </a:rPr>
-              <a:t> under a fast stop or turn — the danger is </a:t>
-            </a:r>
-            <a:r>
-              <a:rPr sz="1800" b="1">
-                <a:solidFill>
-                  <a:srgbClr val="C0392B"/>
-                </a:solidFill>
-                <a:latin typeface="Arial"/>
-              </a:rPr>
-              <a:t>motion</a:t>
-            </a:r>
-            <a:r>
-              <a:rPr sz="1800" b="0">
-                <a:solidFill>
-                  <a:srgbClr val="2C3E50"/>
-                </a:solidFill>
-                <a:latin typeface="Arial"/>
-              </a:rPr>
-              <a:t>, not just orientation.</a:t>
+              <a:t>Static  tilt ≤ θmax  is the easy part; under acceleration  a − g  tilts away from vertical — that dynamic margin is the real constraint.</a:t>
             </a:r>
           </a:p>
         </p:txBody>
@@ -5682,45 +5578,6 @@
       <p:sp>
         <p:nvSpPr>
           <p:cNvPr id="7" name="TextBox 6"/>
-          <p:cNvSpPr txBox="1"/>
-          <p:nvPr/>
-        </p:nvSpPr>
-        <p:spPr>
-          <a:xfrm>
-            <a:off x="868680" y="4754880"/>
-            <a:ext cx="5486400" cy="457200"/>
-          </a:xfrm>
-          <a:prstGeom prst="rect">
-            <a:avLst/>
-          </a:prstGeom>
-          <a:noFill/>
-        </p:spPr>
-        <p:txBody>
-          <a:bodyPr wrap="square" anchor="t">
-            <a:spAutoFit/>
-          </a:bodyPr>
-          <a:lstStyle/>
-          <a:p>
-            <a:pPr algn="l">
-              <a:lnSpc>
-                <a:spcPct val="105000"/>
-              </a:lnSpc>
-            </a:pPr>
-            <a:r>
-              <a:rPr sz="1400" b="0" i="1">
-                <a:solidFill>
-                  <a:srgbClr val="666666"/>
-                </a:solidFill>
-                <a:latin typeface="Arial"/>
-              </a:rPr>
-              <a:t>Why? — next slide.</a:t>
-            </a:r>
-          </a:p>
-        </p:txBody>
-      </p:sp>
-      <p:sp>
-        <p:nvSpPr>
-          <p:cNvPr id="8" name="TextBox 7"/>
           <p:cNvSpPr txBox="1"/>
           <p:nvPr/>
         </p:nvSpPr>
@@ -5809,7 +5666,7 @@
                 </a:solidFill>
                 <a:latin typeface="Arial"/>
               </a:rPr>
-              <a:t>Key insight — liquid follows effective gravity  g − a</a:t>
+              <a:t>Why the grasp matters — it reshapes the spill margin</a:t>
             </a:r>
           </a:p>
         </p:txBody>
@@ -5859,7 +5716,7 @@
       </p:sp>
       <p:pic>
         <p:nvPicPr>
-          <p:cNvPr id="4" name="Picture 3" descr="spill_cone.png"/>
+          <p:cNvPr id="4" name="Picture 3" descr="grasp_mechanism.png"/>
           <p:cNvPicPr>
             <a:picLocks noChangeAspect="1"/>
           </p:cNvPicPr>
@@ -5873,8 +5730,8 @@
         </p:blipFill>
         <p:spPr>
           <a:xfrm>
-            <a:off x="1921539" y="1417320"/>
-            <a:ext cx="8348617" cy="4023360"/>
+            <a:off x="3056485" y="1371600"/>
+            <a:ext cx="6078723" cy="2788920"/>
           </a:xfrm>
           <a:prstGeom prst="rect">
             <a:avLst/>
@@ -5889,8 +5746,8 @@
         </p:nvSpPr>
         <p:spPr>
           <a:xfrm>
-            <a:off x="640080" y="5577840"/>
-            <a:ext cx="10972800" cy="640080"/>
+            <a:off x="640080" y="4297680"/>
+            <a:ext cx="11064240" cy="2011680"/>
           </a:xfrm>
           <a:prstGeom prst="rect">
             <a:avLst/>
@@ -5905,44 +5762,92 @@
           <a:p>
             <a:pPr algn="l">
               <a:lnSpc>
-                <a:spcPct val="105000"/>
+                <a:spcPct val="115000"/>
               </a:lnSpc>
             </a:pPr>
             <a:r>
-              <a:rPr sz="1400" b="1" i="0">
-                <a:solidFill>
-                  <a:srgbClr val="1A365D"/>
-                </a:solidFill>
-                <a:latin typeface="Arial"/>
-              </a:rPr>
-              <a:t>No-spill </a:t>
-            </a:r>
-            <a:r>
-              <a:rPr sz="1400" b="0" i="0">
+              <a:rPr sz="1500" b="1" i="0">
                 <a:solidFill>
                   <a:srgbClr val="2C3E50"/>
                 </a:solidFill>
                 <a:latin typeface="Arial"/>
               </a:rPr>
-              <a:t>⇔ the apparent-up vector  a_cup − g  stays inside the cup's </a:t>
-            </a:r>
-            <a:r>
-              <a:rPr sz="1400" b="1" i="0">
+              <a:t>• The grasp fixes  T(hand→cup): </a:t>
+            </a:r>
+            <a:r>
+              <a:rPr sz="1500" b="0" i="0">
                 <a:solidFill>
                   <a:srgbClr val="2C3E50"/>
                 </a:solidFill>
                 <a:latin typeface="Arial"/>
               </a:rPr>
-              <a:t>rim cone</a:t>
-            </a:r>
-            <a:r>
-              <a:rPr sz="1400" b="0" i="0">
+              <a:t>the cup's offset r and orientation relative to the wrist.</a:t>
+            </a:r>
+          </a:p>
+          <a:p>
+            <a:pPr algn="l">
+              <a:lnSpc>
+                <a:spcPct val="115000"/>
+              </a:lnSpc>
+            </a:pPr>
+            <a:r>
+              <a:rPr sz="1500" b="0" i="0">
                 <a:solidFill>
                   <a:srgbClr val="2C3E50"/>
                 </a:solidFill>
                 <a:latin typeface="Arial"/>
               </a:rPr>
-              <a:t>  (half-angle θmax).  Acceleration is evaluated at the cup, not the wrist.</a:t>
+              <a:t>• Same arm motion → different cup acceleration  a_cup  (lever effect) → different spill margin.</a:t>
+            </a:r>
+          </a:p>
+          <a:p>
+            <a:pPr algn="l">
+              <a:lnSpc>
+                <a:spcPct val="115000"/>
+              </a:lnSpc>
+            </a:pPr>
+            <a:r>
+              <a:rPr sz="1500" b="0" i="0">
+                <a:solidFill>
+                  <a:srgbClr val="2C3E50"/>
+                </a:solidFill>
+                <a:latin typeface="Arial"/>
+              </a:rPr>
+              <a:t>• Plus arm reachability: some grasps keep the cup upright easily, others don't.</a:t>
+            </a:r>
+          </a:p>
+          <a:p>
+            <a:pPr algn="l">
+              <a:lnSpc>
+                <a:spcPct val="115000"/>
+              </a:lnSpc>
+            </a:pPr>
+            <a:r>
+              <a:rPr sz="1500" b="0" i="0">
+                <a:solidFill>
+                  <a:srgbClr val="2C3E50"/>
+                </a:solidFill>
+                <a:latin typeface="Arial"/>
+              </a:rPr>
+              <a:t>• The two effects can conflict → </a:t>
+            </a:r>
+            <a:r>
+              <a:rPr sz="1500" b="1" i="0">
+                <a:solidFill>
+                  <a:srgbClr val="A93226"/>
+                </a:solidFill>
+                <a:latin typeface="Arial"/>
+              </a:rPr>
+              <a:t>which grasp is safest is measured, not assumed</a:t>
+            </a:r>
+            <a:r>
+              <a:rPr sz="1500" b="0" i="0">
+                <a:solidFill>
+                  <a:srgbClr val="2C3E50"/>
+                </a:solidFill>
+                <a:latin typeface="Arial"/>
+              </a:rPr>
+              <a:t>  (see Method).</a:t>
             </a:r>
           </a:p>
         </p:txBody>
@@ -5995,283 +5900,6 @@
 </file>
 
 <file path=ppt/slides/slide5.xml><?xml version="1.0" encoding="utf-8"?>
-<p:sld xmlns:a="http://schemas.openxmlformats.org/drawingml/2006/main" xmlns:p="http://schemas.openxmlformats.org/presentationml/2006/main" xmlns:r="http://schemas.openxmlformats.org/officeDocument/2006/relationships">
-  <p:cSld>
-    <p:spTree>
-      <p:nvGrpSpPr>
-        <p:cNvPr id="1" name=""/>
-        <p:cNvGrpSpPr/>
-        <p:nvPr/>
-      </p:nvGrpSpPr>
-      <p:grpSpPr/>
-      <p:sp>
-        <p:nvSpPr>
-          <p:cNvPr id="2" name="TextBox 1"/>
-          <p:cNvSpPr txBox="1"/>
-          <p:nvPr/>
-        </p:nvSpPr>
-        <p:spPr>
-          <a:xfrm>
-            <a:off x="502920" y="274320"/>
-            <a:ext cx="11155680" cy="868680"/>
-          </a:xfrm>
-          <a:prstGeom prst="rect">
-            <a:avLst/>
-          </a:prstGeom>
-          <a:noFill/>
-        </p:spPr>
-        <p:txBody>
-          <a:bodyPr wrap="square" anchor="ctr">
-            <a:spAutoFit/>
-          </a:bodyPr>
-          <a:lstStyle/>
-          <a:p>
-            <a:pPr algn="l">
-              <a:lnSpc>
-                <a:spcPct val="105000"/>
-              </a:lnSpc>
-            </a:pPr>
-            <a:r>
-              <a:rPr sz="3000" b="1" i="0">
-                <a:solidFill>
-                  <a:srgbClr val="1A365D"/>
-                </a:solidFill>
-                <a:latin typeface="Arial"/>
-              </a:rPr>
-              <a:t>Why the grasp matters — it reshapes the spill margin</a:t>
-            </a:r>
-          </a:p>
-        </p:txBody>
-      </p:sp>
-      <p:sp>
-        <p:nvSpPr>
-          <p:cNvPr id="3" name="Rectangle 2"/>
-          <p:cNvSpPr/>
-          <p:nvPr/>
-        </p:nvSpPr>
-        <p:spPr>
-          <a:xfrm>
-            <a:off x="548640" y="1115568"/>
-            <a:ext cx="11064240" cy="27940"/>
-          </a:xfrm>
-          <a:prstGeom prst="rect">
-            <a:avLst/>
-          </a:prstGeom>
-          <a:solidFill>
-            <a:srgbClr val="CCCCCC"/>
-          </a:solidFill>
-          <a:ln>
-            <a:noFill/>
-          </a:ln>
-        </p:spPr>
-        <p:style>
-          <a:lnRef idx="1">
-            <a:schemeClr val="accent1"/>
-          </a:lnRef>
-          <a:fillRef idx="3">
-            <a:schemeClr val="accent1"/>
-          </a:fillRef>
-          <a:effectRef idx="2">
-            <a:schemeClr val="accent1"/>
-          </a:effectRef>
-          <a:fontRef idx="minor">
-            <a:schemeClr val="lt1"/>
-          </a:fontRef>
-        </p:style>
-        <p:txBody>
-          <a:bodyPr rtlCol="0" anchor="ctr"/>
-          <a:lstStyle/>
-          <a:p>
-            <a:pPr algn="ctr"/>
-          </a:p>
-        </p:txBody>
-      </p:sp>
-      <p:pic>
-        <p:nvPicPr>
-          <p:cNvPr id="4" name="Picture 3" descr="grasp_mechanism.png"/>
-          <p:cNvPicPr>
-            <a:picLocks noChangeAspect="1"/>
-          </p:cNvPicPr>
-          <p:nvPr/>
-        </p:nvPicPr>
-        <p:blipFill>
-          <a:blip r:embed="rId2"/>
-          <a:stretch>
-            <a:fillRect/>
-          </a:stretch>
-        </p:blipFill>
-        <p:spPr>
-          <a:xfrm>
-            <a:off x="2561848" y="1371600"/>
-            <a:ext cx="7067998" cy="2788920"/>
-          </a:xfrm>
-          <a:prstGeom prst="rect">
-            <a:avLst/>
-          </a:prstGeom>
-        </p:spPr>
-      </p:pic>
-      <p:sp>
-        <p:nvSpPr>
-          <p:cNvPr id="5" name="TextBox 4"/>
-          <p:cNvSpPr txBox="1"/>
-          <p:nvPr/>
-        </p:nvSpPr>
-        <p:spPr>
-          <a:xfrm>
-            <a:off x="640080" y="4297680"/>
-            <a:ext cx="11064240" cy="2011680"/>
-          </a:xfrm>
-          <a:prstGeom prst="rect">
-            <a:avLst/>
-          </a:prstGeom>
-          <a:noFill/>
-        </p:spPr>
-        <p:txBody>
-          <a:bodyPr wrap="square" anchor="t">
-            <a:spAutoFit/>
-          </a:bodyPr>
-          <a:lstStyle/>
-          <a:p>
-            <a:pPr algn="l">
-              <a:lnSpc>
-                <a:spcPct val="115000"/>
-              </a:lnSpc>
-            </a:pPr>
-            <a:r>
-              <a:rPr sz="1500" b="1" i="0">
-                <a:solidFill>
-                  <a:srgbClr val="2C3E50"/>
-                </a:solidFill>
-                <a:latin typeface="Arial"/>
-              </a:rPr>
-              <a:t>• The grasp fixes  T(hand→cup): </a:t>
-            </a:r>
-            <a:r>
-              <a:rPr sz="1500" b="0" i="0">
-                <a:solidFill>
-                  <a:srgbClr val="2C3E50"/>
-                </a:solidFill>
-                <a:latin typeface="Arial"/>
-              </a:rPr>
-              <a:t>the cup's offset r and orientation relative to the wrist.</a:t>
-            </a:r>
-          </a:p>
-          <a:p>
-            <a:pPr algn="l">
-              <a:lnSpc>
-                <a:spcPct val="115000"/>
-              </a:lnSpc>
-            </a:pPr>
-            <a:r>
-              <a:rPr sz="1500" b="0" i="0">
-                <a:solidFill>
-                  <a:srgbClr val="2C3E50"/>
-                </a:solidFill>
-                <a:latin typeface="Arial"/>
-              </a:rPr>
-              <a:t>• Same arm motion → different cup acceleration  a_cup  (lever effect) → different spill margin.</a:t>
-            </a:r>
-          </a:p>
-          <a:p>
-            <a:pPr algn="l">
-              <a:lnSpc>
-                <a:spcPct val="115000"/>
-              </a:lnSpc>
-            </a:pPr>
-            <a:r>
-              <a:rPr sz="1500" b="0" i="0">
-                <a:solidFill>
-                  <a:srgbClr val="2C3E50"/>
-                </a:solidFill>
-                <a:latin typeface="Arial"/>
-              </a:rPr>
-              <a:t>• Plus arm reachability: some grasps keep the cup upright easily, others don't.</a:t>
-            </a:r>
-          </a:p>
-          <a:p>
-            <a:pPr algn="l">
-              <a:lnSpc>
-                <a:spcPct val="115000"/>
-              </a:lnSpc>
-            </a:pPr>
-            <a:r>
-              <a:rPr sz="1500" b="0" i="0">
-                <a:solidFill>
-                  <a:srgbClr val="2C3E50"/>
-                </a:solidFill>
-                <a:latin typeface="Arial"/>
-              </a:rPr>
-              <a:t>• The two effects can conflict → </a:t>
-            </a:r>
-            <a:r>
-              <a:rPr sz="1500" b="1" i="0">
-                <a:solidFill>
-                  <a:srgbClr val="A93226"/>
-                </a:solidFill>
-                <a:latin typeface="Arial"/>
-              </a:rPr>
-              <a:t>which grasp is safest is measured, not assumed</a:t>
-            </a:r>
-            <a:r>
-              <a:rPr sz="1500" b="0" i="0">
-                <a:solidFill>
-                  <a:srgbClr val="2C3E50"/>
-                </a:solidFill>
-                <a:latin typeface="Arial"/>
-              </a:rPr>
-              <a:t>  (see Method).</a:t>
-            </a:r>
-          </a:p>
-        </p:txBody>
-      </p:sp>
-      <p:sp>
-        <p:nvSpPr>
-          <p:cNvPr id="6" name="TextBox 5"/>
-          <p:cNvSpPr txBox="1"/>
-          <p:nvPr/>
-        </p:nvSpPr>
-        <p:spPr>
-          <a:xfrm>
-            <a:off x="11612880" y="6400800"/>
-            <a:ext cx="457200" cy="320040"/>
-          </a:xfrm>
-          <a:prstGeom prst="rect">
-            <a:avLst/>
-          </a:prstGeom>
-          <a:noFill/>
-        </p:spPr>
-        <p:txBody>
-          <a:bodyPr wrap="square" anchor="t">
-            <a:spAutoFit/>
-          </a:bodyPr>
-          <a:lstStyle/>
-          <a:p>
-            <a:pPr algn="r">
-              <a:lnSpc>
-                <a:spcPct val="105000"/>
-              </a:lnSpc>
-            </a:pPr>
-            <a:r>
-              <a:rPr sz="1200" b="0" i="0">
-                <a:solidFill>
-                  <a:srgbClr val="666666"/>
-                </a:solidFill>
-                <a:latin typeface="Arial"/>
-              </a:rPr>
-              <a:t>5</a:t>
-            </a:r>
-          </a:p>
-        </p:txBody>
-      </p:sp>
-    </p:spTree>
-  </p:cSld>
-  <p:clrMapOvr>
-    <a:masterClrMapping/>
-  </p:clrMapOvr>
-</p:sld>
-</file>
-
-<file path=ppt/slides/slide6.xml><?xml version="1.0" encoding="utf-8"?>
 <p:sld xmlns:a="http://schemas.openxmlformats.org/drawingml/2006/main" xmlns:p="http://schemas.openxmlformats.org/presentationml/2006/main" xmlns:r="http://schemas.openxmlformats.org/officeDocument/2006/relationships">
   <p:cSld>
     <p:spTree>
@@ -6765,6 +6393,274 @@
                 </a:solidFill>
                 <a:latin typeface="Arial"/>
               </a:rPr>
+              <a:t>5</a:t>
+            </a:r>
+          </a:p>
+        </p:txBody>
+      </p:sp>
+    </p:spTree>
+  </p:cSld>
+  <p:clrMapOvr>
+    <a:masterClrMapping/>
+  </p:clrMapOvr>
+</p:sld>
+</file>
+
+<file path=ppt/slides/slide6.xml><?xml version="1.0" encoding="utf-8"?>
+<p:sld xmlns:a="http://schemas.openxmlformats.org/drawingml/2006/main" xmlns:p="http://schemas.openxmlformats.org/presentationml/2006/main" xmlns:r="http://schemas.openxmlformats.org/officeDocument/2006/relationships">
+  <p:cSld>
+    <p:spTree>
+      <p:nvGrpSpPr>
+        <p:cNvPr id="1" name=""/>
+        <p:cNvGrpSpPr/>
+        <p:nvPr/>
+      </p:nvGrpSpPr>
+      <p:grpSpPr/>
+      <p:sp>
+        <p:nvSpPr>
+          <p:cNvPr id="2" name="TextBox 1"/>
+          <p:cNvSpPr txBox="1"/>
+          <p:nvPr/>
+        </p:nvSpPr>
+        <p:spPr>
+          <a:xfrm>
+            <a:off x="502920" y="274320"/>
+            <a:ext cx="11155680" cy="868680"/>
+          </a:xfrm>
+          <a:prstGeom prst="rect">
+            <a:avLst/>
+          </a:prstGeom>
+          <a:noFill/>
+        </p:spPr>
+        <p:txBody>
+          <a:bodyPr wrap="square" anchor="ctr">
+            <a:spAutoFit/>
+          </a:bodyPr>
+          <a:lstStyle/>
+          <a:p>
+            <a:pPr algn="l">
+              <a:lnSpc>
+                <a:spcPct val="105000"/>
+              </a:lnSpc>
+            </a:pPr>
+            <a:r>
+              <a:rPr sz="3000" b="1" i="0">
+                <a:solidFill>
+                  <a:srgbClr val="1A365D"/>
+                </a:solidFill>
+                <a:latin typeface="Arial"/>
+              </a:rPr>
+              <a:t>Method — spill-aware CHOMP</a:t>
+            </a:r>
+          </a:p>
+        </p:txBody>
+      </p:sp>
+      <p:sp>
+        <p:nvSpPr>
+          <p:cNvPr id="3" name="Rectangle 2"/>
+          <p:cNvSpPr/>
+          <p:nvPr/>
+        </p:nvSpPr>
+        <p:spPr>
+          <a:xfrm>
+            <a:off x="548640" y="1115568"/>
+            <a:ext cx="11064240" cy="27940"/>
+          </a:xfrm>
+          <a:prstGeom prst="rect">
+            <a:avLst/>
+          </a:prstGeom>
+          <a:solidFill>
+            <a:srgbClr val="CCCCCC"/>
+          </a:solidFill>
+          <a:ln>
+            <a:noFill/>
+          </a:ln>
+        </p:spPr>
+        <p:style>
+          <a:lnRef idx="1">
+            <a:schemeClr val="accent1"/>
+          </a:lnRef>
+          <a:fillRef idx="3">
+            <a:schemeClr val="accent1"/>
+          </a:fillRef>
+          <a:effectRef idx="2">
+            <a:schemeClr val="accent1"/>
+          </a:effectRef>
+          <a:fontRef idx="minor">
+            <a:schemeClr val="lt1"/>
+          </a:fontRef>
+        </p:style>
+        <p:txBody>
+          <a:bodyPr rtlCol="0" anchor="ctr"/>
+          <a:lstStyle/>
+          <a:p>
+            <a:pPr algn="ctr"/>
+          </a:p>
+        </p:txBody>
+      </p:sp>
+      <p:pic>
+        <p:nvPicPr>
+          <p:cNvPr id="4" name="Picture 3" descr="method_pipeline.png"/>
+          <p:cNvPicPr>
+            <a:picLocks noChangeAspect="1"/>
+          </p:cNvPicPr>
+          <p:nvPr/>
+        </p:nvPicPr>
+        <p:blipFill>
+          <a:blip r:embed="rId2"/>
+          <a:stretch>
+            <a:fillRect/>
+          </a:stretch>
+        </p:blipFill>
+        <p:spPr>
+          <a:xfrm>
+            <a:off x="766582" y="1417320"/>
+            <a:ext cx="10658530" cy="2743200"/>
+          </a:xfrm>
+          <a:prstGeom prst="rect">
+            <a:avLst/>
+          </a:prstGeom>
+        </p:spPr>
+      </p:pic>
+      <p:sp>
+        <p:nvSpPr>
+          <p:cNvPr id="5" name="TextBox 4"/>
+          <p:cNvSpPr txBox="1"/>
+          <p:nvPr/>
+        </p:nvSpPr>
+        <p:spPr>
+          <a:xfrm>
+            <a:off x="640080" y="4343400"/>
+            <a:ext cx="10972800" cy="548640"/>
+          </a:xfrm>
+          <a:prstGeom prst="rect">
+            <a:avLst/>
+          </a:prstGeom>
+          <a:noFill/>
+        </p:spPr>
+        <p:txBody>
+          <a:bodyPr wrap="square" anchor="t">
+            <a:spAutoFit/>
+          </a:bodyPr>
+          <a:lstStyle/>
+          <a:p>
+            <a:pPr algn="ctr">
+              <a:lnSpc>
+                <a:spcPct val="105000"/>
+              </a:lnSpc>
+            </a:pPr>
+            <a:r>
+              <a:rPr sz="2000" b="1" i="0">
+                <a:solidFill>
+                  <a:srgbClr val="1A365D"/>
+                </a:solidFill>
+                <a:latin typeface="Arial"/>
+              </a:rPr>
+              <a:t>J(ξ) = J_smooth + J_obs + λₛ · J_spill</a:t>
+            </a:r>
+            <a:r>
+              <a:rPr sz="1800" b="0" i="0">
+                <a:solidFill>
+                  <a:srgbClr val="2C3E50"/>
+                </a:solidFill>
+                <a:latin typeface="Arial"/>
+              </a:rPr>
+              <a:t>          ξ ← ξ − η A⁻¹ ∇J(ξ)</a:t>
+            </a:r>
+          </a:p>
+        </p:txBody>
+      </p:sp>
+      <p:sp>
+        <p:nvSpPr>
+          <p:cNvPr id="6" name="TextBox 5"/>
+          <p:cNvSpPr txBox="1"/>
+          <p:nvPr/>
+        </p:nvSpPr>
+        <p:spPr>
+          <a:xfrm>
+            <a:off x="640080" y="5029200"/>
+            <a:ext cx="10972800" cy="731520"/>
+          </a:xfrm>
+          <a:prstGeom prst="rect">
+            <a:avLst/>
+          </a:prstGeom>
+          <a:noFill/>
+        </p:spPr>
+        <p:txBody>
+          <a:bodyPr wrap="square" anchor="t">
+            <a:spAutoFit/>
+          </a:bodyPr>
+          <a:lstStyle/>
+          <a:p>
+            <a:pPr algn="ctr">
+              <a:lnSpc>
+                <a:spcPct val="105000"/>
+              </a:lnSpc>
+            </a:pPr>
+            <a:r>
+              <a:rPr sz="1400" b="0" i="0">
+                <a:solidFill>
+                  <a:srgbClr val="2C3E50"/>
+                </a:solidFill>
+                <a:latin typeface="Arial"/>
+              </a:rPr>
+              <a:t>Course CHOMP (Lecture 8) + </a:t>
+            </a:r>
+            <a:r>
+              <a:rPr sz="1400" b="1" i="0">
+                <a:solidFill>
+                  <a:srgbClr val="A93226"/>
+                </a:solidFill>
+                <a:latin typeface="Arial"/>
+              </a:rPr>
+              <a:t>one differentiable spill term</a:t>
+            </a:r>
+            <a:r>
+              <a:rPr sz="1400" b="0" i="0">
+                <a:solidFill>
+                  <a:srgbClr val="2C3E50"/>
+                </a:solidFill>
+                <a:latin typeface="Arial"/>
+              </a:rPr>
+              <a:t>.  a_cup comes from finite differences of ξ — the same operator as the smoothness term, so the spill gradient is analytic.</a:t>
+            </a:r>
+          </a:p>
+        </p:txBody>
+      </p:sp>
+      <p:sp>
+        <p:nvSpPr>
+          <p:cNvPr id="7" name="TextBox 6"/>
+          <p:cNvSpPr txBox="1"/>
+          <p:nvPr/>
+        </p:nvSpPr>
+        <p:spPr>
+          <a:xfrm>
+            <a:off x="11612880" y="6400800"/>
+            <a:ext cx="457200" cy="320040"/>
+          </a:xfrm>
+          <a:prstGeom prst="rect">
+            <a:avLst/>
+          </a:prstGeom>
+          <a:noFill/>
+        </p:spPr>
+        <p:txBody>
+          <a:bodyPr wrap="square" anchor="t">
+            <a:spAutoFit/>
+          </a:bodyPr>
+          <a:lstStyle/>
+          <a:p>
+            <a:pPr algn="r">
+              <a:lnSpc>
+                <a:spcPct val="105000"/>
+              </a:lnSpc>
+            </a:pPr>
+            <a:r>
+              <a:rPr sz="1200" b="0" i="0">
+                <a:solidFill>
+                  <a:srgbClr val="666666"/>
+                </a:solidFill>
+                <a:latin typeface="Arial"/>
+              </a:rPr>
               <a:t>6</a:t>
             </a:r>
           </a:p>
@@ -6822,7 +6718,7 @@
                 </a:solidFill>
                 <a:latin typeface="Arial"/>
               </a:rPr>
-              <a:t>Method — spill-aware CHOMP</a:t>
+              <a:t>Method — the optimizer as a grasp evaluator</a:t>
             </a:r>
           </a:p>
         </p:txBody>
@@ -6870,40 +6766,16 @@
           </a:p>
         </p:txBody>
       </p:sp>
-      <p:pic>
-        <p:nvPicPr>
-          <p:cNvPr id="4" name="Picture 3" descr="method_pipeline.png"/>
-          <p:cNvPicPr>
-            <a:picLocks noChangeAspect="1"/>
-          </p:cNvPicPr>
-          <p:nvPr/>
-        </p:nvPicPr>
-        <p:blipFill>
-          <a:blip r:embed="rId2"/>
-          <a:stretch>
-            <a:fillRect/>
-          </a:stretch>
-        </p:blipFill>
-        <p:spPr>
-          <a:xfrm>
-            <a:off x="766582" y="1417320"/>
-            <a:ext cx="10658530" cy="2743200"/>
-          </a:xfrm>
-          <a:prstGeom prst="rect">
-            <a:avLst/>
-          </a:prstGeom>
-        </p:spPr>
-      </p:pic>
-      <p:sp>
-        <p:nvSpPr>
-          <p:cNvPr id="5" name="TextBox 4"/>
+      <p:sp>
+        <p:nvSpPr>
+          <p:cNvPr id="4" name="TextBox 3"/>
           <p:cNvSpPr txBox="1"/>
           <p:nvPr/>
         </p:nvSpPr>
         <p:spPr>
           <a:xfrm>
-            <a:off x="640080" y="4343400"/>
-            <a:ext cx="10972800" cy="548640"/>
+            <a:off x="411480" y="1463040"/>
+            <a:ext cx="2743200" cy="640080"/>
           </a:xfrm>
           <a:prstGeom prst="rect">
             <a:avLst/>
@@ -6922,36 +6794,368 @@
               </a:lnSpc>
             </a:pPr>
             <a:r>
-              <a:rPr sz="2000" b="1" i="0">
-                <a:solidFill>
-                  <a:srgbClr val="1A365D"/>
-                </a:solidFill>
-                <a:latin typeface="Arial"/>
-              </a:rPr>
-              <a:t>J(ξ) = J_smooth + J_obs + λₛ · J_spill</a:t>
-            </a:r>
-            <a:r>
-              <a:rPr sz="1800" b="0" i="0">
+              <a:rPr sz="1250" b="1" i="0">
                 <a:solidFill>
                   <a:srgbClr val="2C3E50"/>
                 </a:solidFill>
                 <a:latin typeface="Arial"/>
               </a:rPr>
-              <a:t>          ξ ← ξ − η A⁻¹ ∇J(ξ)</a:t>
-            </a:r>
-          </a:p>
-        </p:txBody>
-      </p:sp>
-      <p:sp>
-        <p:nvSpPr>
-          <p:cNvPr id="6" name="TextBox 5"/>
+              <a:t>candidate grasps
+(taxonomy / region)</a:t>
+            </a:r>
+          </a:p>
+        </p:txBody>
+      </p:sp>
+      <p:sp>
+        <p:nvSpPr>
+          <p:cNvPr id="5" name="Rounded Rectangle 4"/>
+          <p:cNvSpPr/>
+          <p:nvPr/>
+        </p:nvSpPr>
+        <p:spPr>
+          <a:xfrm>
+            <a:off x="548640" y="2331720"/>
+            <a:ext cx="2240280" cy="566928"/>
+          </a:xfrm>
+          <a:prstGeom prst="roundRect">
+            <a:avLst/>
+          </a:prstGeom>
+          <a:solidFill>
+            <a:srgbClr val="FFFFFF"/>
+          </a:solidFill>
+          <a:ln w="19050">
+            <a:solidFill>
+              <a:srgbClr val="27865A"/>
+            </a:solidFill>
+          </a:ln>
+          <a:effectLst/>
+        </p:spPr>
+        <p:style>
+          <a:lnRef idx="1">
+            <a:schemeClr val="accent1"/>
+          </a:lnRef>
+          <a:fillRef idx="3">
+            <a:schemeClr val="accent1"/>
+          </a:fillRef>
+          <a:effectRef idx="2">
+            <a:schemeClr val="accent1"/>
+          </a:effectRef>
+          <a:fontRef idx="minor">
+            <a:schemeClr val="lt1"/>
+          </a:fontRef>
+        </p:style>
+        <p:txBody>
+          <a:bodyPr rtlCol="0" anchor="ctr" wrap="square" lIns="45720" rIns="45720" tIns="18288" bIns="18288"/>
+          <a:lstStyle/>
+          <a:p>
+            <a:pPr algn="ctr"/>
+            <a:r>
+              <a:rPr sz="1300" b="1">
+                <a:solidFill>
+                  <a:srgbClr val="27865A"/>
+                </a:solidFill>
+                <a:latin typeface="Arial"/>
+              </a:rPr>
+              <a:t>handle grip</a:t>
+            </a:r>
+          </a:p>
+        </p:txBody>
+      </p:sp>
+      <p:sp>
+        <p:nvSpPr>
+          <p:cNvPr id="6" name="Rounded Rectangle 5"/>
+          <p:cNvSpPr/>
+          <p:nvPr/>
+        </p:nvSpPr>
+        <p:spPr>
+          <a:xfrm>
+            <a:off x="548640" y="3154680"/>
+            <a:ext cx="2240280" cy="566928"/>
+          </a:xfrm>
+          <a:prstGeom prst="roundRect">
+            <a:avLst/>
+          </a:prstGeom>
+          <a:solidFill>
+            <a:srgbClr val="FFFFFF"/>
+          </a:solidFill>
+          <a:ln w="19050">
+            <a:solidFill>
+              <a:srgbClr val="2C6FBB"/>
+            </a:solidFill>
+          </a:ln>
+          <a:effectLst/>
+        </p:spPr>
+        <p:style>
+          <a:lnRef idx="1">
+            <a:schemeClr val="accent1"/>
+          </a:lnRef>
+          <a:fillRef idx="3">
+            <a:schemeClr val="accent1"/>
+          </a:fillRef>
+          <a:effectRef idx="2">
+            <a:schemeClr val="accent1"/>
+          </a:effectRef>
+          <a:fontRef idx="minor">
+            <a:schemeClr val="lt1"/>
+          </a:fontRef>
+        </p:style>
+        <p:txBody>
+          <a:bodyPr rtlCol="0" anchor="ctr" wrap="square" lIns="45720" rIns="45720" tIns="18288" bIns="18288"/>
+          <a:lstStyle/>
+          <a:p>
+            <a:pPr algn="ctr"/>
+            <a:r>
+              <a:rPr sz="1300" b="1">
+                <a:solidFill>
+                  <a:srgbClr val="2C6FBB"/>
+                </a:solidFill>
+                <a:latin typeface="Arial"/>
+              </a:rPr>
+              <a:t>rim grip</a:t>
+            </a:r>
+          </a:p>
+        </p:txBody>
+      </p:sp>
+      <p:sp>
+        <p:nvSpPr>
+          <p:cNvPr id="7" name="Rounded Rectangle 6"/>
+          <p:cNvSpPr/>
+          <p:nvPr/>
+        </p:nvSpPr>
+        <p:spPr>
+          <a:xfrm>
+            <a:off x="548640" y="3977639"/>
+            <a:ext cx="2240280" cy="566928"/>
+          </a:xfrm>
+          <a:prstGeom prst="roundRect">
+            <a:avLst/>
+          </a:prstGeom>
+          <a:solidFill>
+            <a:srgbClr val="FFFFFF"/>
+          </a:solidFill>
+          <a:ln w="19050">
+            <a:solidFill>
+              <a:srgbClr val="C0392B"/>
+            </a:solidFill>
+          </a:ln>
+          <a:effectLst/>
+        </p:spPr>
+        <p:style>
+          <a:lnRef idx="1">
+            <a:schemeClr val="accent1"/>
+          </a:lnRef>
+          <a:fillRef idx="3">
+            <a:schemeClr val="accent1"/>
+          </a:fillRef>
+          <a:effectRef idx="2">
+            <a:schemeClr val="accent1"/>
+          </a:effectRef>
+          <a:fontRef idx="minor">
+            <a:schemeClr val="lt1"/>
+          </a:fontRef>
+        </p:style>
+        <p:txBody>
+          <a:bodyPr rtlCol="0" anchor="ctr" wrap="square" lIns="45720" rIns="45720" tIns="18288" bIns="18288"/>
+          <a:lstStyle/>
+          <a:p>
+            <a:pPr algn="ctr"/>
+            <a:r>
+              <a:rPr sz="1300" b="1">
+                <a:solidFill>
+                  <a:srgbClr val="C0392B"/>
+                </a:solidFill>
+                <a:latin typeface="Arial"/>
+              </a:rPr>
+              <a:t>body grip</a:t>
+            </a:r>
+          </a:p>
+        </p:txBody>
+      </p:sp>
+      <p:sp>
+        <p:nvSpPr>
+          <p:cNvPr id="8" name="Rounded Rectangle 7"/>
+          <p:cNvSpPr/>
+          <p:nvPr/>
+        </p:nvSpPr>
+        <p:spPr>
+          <a:xfrm>
+            <a:off x="3611880" y="2743200"/>
+            <a:ext cx="2148840" cy="1234440"/>
+          </a:xfrm>
+          <a:prstGeom prst="roundRect">
+            <a:avLst/>
+          </a:prstGeom>
+          <a:solidFill>
+            <a:srgbClr val="FFFFFF"/>
+          </a:solidFill>
+          <a:ln w="19050">
+            <a:solidFill>
+              <a:srgbClr val="C0392B"/>
+            </a:solidFill>
+          </a:ln>
+          <a:effectLst/>
+        </p:spPr>
+        <p:style>
+          <a:lnRef idx="1">
+            <a:schemeClr val="accent1"/>
+          </a:lnRef>
+          <a:fillRef idx="3">
+            <a:schemeClr val="accent1"/>
+          </a:fillRef>
+          <a:effectRef idx="2">
+            <a:schemeClr val="accent1"/>
+          </a:effectRef>
+          <a:fontRef idx="minor">
+            <a:schemeClr val="lt1"/>
+          </a:fontRef>
+        </p:style>
+        <p:txBody>
+          <a:bodyPr rtlCol="0" anchor="ctr" wrap="square" lIns="45720" rIns="45720" tIns="18288" bIns="18288"/>
+          <a:lstStyle/>
+          <a:p>
+            <a:pPr algn="ctr"/>
+            <a:r>
+              <a:rPr sz="1300" b="1">
+                <a:solidFill>
+                  <a:srgbClr val="2C3E50"/>
+                </a:solidFill>
+                <a:latin typeface="Arial"/>
+              </a:rPr>
+              <a:t>Spill-aware CHOMP</a:t>
+            </a:r>
+          </a:p>
+          <a:p>
+            <a:pPr algn="ctr"/>
+            <a:r>
+              <a:rPr sz="1100" b="0">
+                <a:solidFill>
+                  <a:srgbClr val="2C3E50"/>
+                </a:solidFill>
+                <a:latin typeface="Arial"/>
+              </a:rPr>
+              <a:t>(per grasp)</a:t>
+            </a:r>
+          </a:p>
+        </p:txBody>
+      </p:sp>
+      <p:cxnSp>
+        <p:nvCxnSpPr>
+          <p:cNvPr id="9" name="Connector 8"/>
+          <p:cNvCxnSpPr/>
+          <p:nvPr/>
+        </p:nvCxnSpPr>
+        <p:spPr>
+          <a:xfrm>
+            <a:off x="2807208" y="2615184"/>
+            <a:ext cx="786384" cy="749808"/>
+          </a:xfrm>
+          <a:prstGeom prst="line">
+            <a:avLst/>
+          </a:prstGeom>
+          <a:ln w="19050">
+            <a:solidFill>
+              <a:srgbClr val="27865A"/>
+            </a:solidFill>
+            <a:tailEnd type="triangle" w="med" len="med"/>
+          </a:ln>
+        </p:spPr>
+        <p:style>
+          <a:lnRef idx="2">
+            <a:schemeClr val="accent1"/>
+          </a:lnRef>
+          <a:fillRef idx="0">
+            <a:schemeClr val="accent1"/>
+          </a:fillRef>
+          <a:effectRef idx="1">
+            <a:schemeClr val="accent1"/>
+          </a:effectRef>
+          <a:fontRef idx="minor">
+            <a:schemeClr val="tx1"/>
+          </a:fontRef>
+        </p:style>
+      </p:cxnSp>
+      <p:cxnSp>
+        <p:nvCxnSpPr>
+          <p:cNvPr id="10" name="Connector 9"/>
+          <p:cNvCxnSpPr/>
+          <p:nvPr/>
+        </p:nvCxnSpPr>
+        <p:spPr>
+          <a:xfrm flipV="1">
+            <a:off x="2807208" y="3364992"/>
+            <a:ext cx="786384" cy="73152"/>
+          </a:xfrm>
+          <a:prstGeom prst="line">
+            <a:avLst/>
+          </a:prstGeom>
+          <a:ln w="19050">
+            <a:solidFill>
+              <a:srgbClr val="2C6FBB"/>
+            </a:solidFill>
+            <a:tailEnd type="triangle" w="med" len="med"/>
+          </a:ln>
+        </p:spPr>
+        <p:style>
+          <a:lnRef idx="2">
+            <a:schemeClr val="accent1"/>
+          </a:lnRef>
+          <a:fillRef idx="0">
+            <a:schemeClr val="accent1"/>
+          </a:fillRef>
+          <a:effectRef idx="1">
+            <a:schemeClr val="accent1"/>
+          </a:effectRef>
+          <a:fontRef idx="minor">
+            <a:schemeClr val="tx1"/>
+          </a:fontRef>
+        </p:style>
+      </p:cxnSp>
+      <p:cxnSp>
+        <p:nvCxnSpPr>
+          <p:cNvPr id="11" name="Connector 10"/>
+          <p:cNvCxnSpPr/>
+          <p:nvPr/>
+        </p:nvCxnSpPr>
+        <p:spPr>
+          <a:xfrm flipV="1">
+            <a:off x="2807208" y="3364992"/>
+            <a:ext cx="786384" cy="896111"/>
+          </a:xfrm>
+          <a:prstGeom prst="line">
+            <a:avLst/>
+          </a:prstGeom>
+          <a:ln w="19050">
+            <a:solidFill>
+              <a:srgbClr val="C0392B"/>
+            </a:solidFill>
+            <a:tailEnd type="triangle" w="med" len="med"/>
+          </a:ln>
+        </p:spPr>
+        <p:style>
+          <a:lnRef idx="2">
+            <a:schemeClr val="accent1"/>
+          </a:lnRef>
+          <a:fillRef idx="0">
+            <a:schemeClr val="accent1"/>
+          </a:fillRef>
+          <a:effectRef idx="1">
+            <a:schemeClr val="accent1"/>
+          </a:effectRef>
+          <a:fontRef idx="minor">
+            <a:schemeClr val="tx1"/>
+          </a:fontRef>
+        </p:style>
+      </p:cxnSp>
+      <p:sp>
+        <p:nvSpPr>
+          <p:cNvPr id="12" name="TextBox 11"/>
           <p:cNvSpPr txBox="1"/>
           <p:nvPr/>
         </p:nvSpPr>
         <p:spPr>
           <a:xfrm>
-            <a:off x="640080" y="5029200"/>
-            <a:ext cx="10972800" cy="731520"/>
+            <a:off x="6309360" y="1481328"/>
+            <a:ext cx="5394960" cy="411480"/>
           </a:xfrm>
           <a:prstGeom prst="rect">
             <a:avLst/>
@@ -6970,38 +7174,537 @@
               </a:lnSpc>
             </a:pPr>
             <a:r>
-              <a:rPr sz="1400" b="0" i="0">
-                <a:solidFill>
-                  <a:srgbClr val="2C3E50"/>
-                </a:solidFill>
-                <a:latin typeface="Arial"/>
-              </a:rPr>
-              <a:t>Course CHOMP (Lecture 8) + </a:t>
-            </a:r>
-            <a:r>
-              <a:rPr sz="1400" b="1" i="0">
-                <a:solidFill>
-                  <a:srgbClr val="A93226"/>
-                </a:solidFill>
-                <a:latin typeface="Arial"/>
-              </a:rPr>
-              <a:t>one differentiable spill term</a:t>
-            </a:r>
-            <a:r>
-              <a:rPr sz="1400" b="0" i="0">
-                <a:solidFill>
-                  <a:srgbClr val="2C3E50"/>
-                </a:solidFill>
-                <a:latin typeface="Arial"/>
-              </a:rPr>
-              <a:t>.  a_cup comes from finite differences of ξ — the same operator as the smoothness term, so the spill gradient is analytic.</a:t>
-            </a:r>
-          </a:p>
-        </p:txBody>
-      </p:sp>
-      <p:sp>
-        <p:nvSpPr>
-          <p:cNvPr id="7" name="TextBox 6"/>
+              <a:rPr sz="1250" b="1" i="0">
+                <a:solidFill>
+                  <a:srgbClr val="1A365D"/>
+                </a:solidFill>
+                <a:latin typeface="Arial"/>
+              </a:rPr>
+              <a:t>achievable spill margin  θmax  (score)</a:t>
+            </a:r>
+          </a:p>
+        </p:txBody>
+      </p:sp>
+      <p:cxnSp>
+        <p:nvCxnSpPr>
+          <p:cNvPr id="13" name="Connector 12"/>
+          <p:cNvCxnSpPr/>
+          <p:nvPr/>
+        </p:nvCxnSpPr>
+        <p:spPr>
+          <a:xfrm>
+            <a:off x="5779008" y="3364992"/>
+            <a:ext cx="1033272" cy="0"/>
+          </a:xfrm>
+          <a:prstGeom prst="line">
+            <a:avLst/>
+          </a:prstGeom>
+          <a:ln w="25400">
+            <a:solidFill>
+              <a:srgbClr val="888888"/>
+            </a:solidFill>
+            <a:tailEnd type="triangle" w="med" len="med"/>
+          </a:ln>
+        </p:spPr>
+        <p:style>
+          <a:lnRef idx="2">
+            <a:schemeClr val="accent1"/>
+          </a:lnRef>
+          <a:fillRef idx="0">
+            <a:schemeClr val="accent1"/>
+          </a:fillRef>
+          <a:effectRef idx="1">
+            <a:schemeClr val="accent1"/>
+          </a:effectRef>
+          <a:fontRef idx="minor">
+            <a:schemeClr val="tx1"/>
+          </a:fontRef>
+        </p:style>
+      </p:cxnSp>
+      <p:sp>
+        <p:nvSpPr>
+          <p:cNvPr id="14" name="Rectangle 13"/>
+          <p:cNvSpPr/>
+          <p:nvPr/>
+        </p:nvSpPr>
+        <p:spPr>
+          <a:xfrm>
+            <a:off x="6903720" y="2286000"/>
+            <a:ext cx="3915783" cy="548640"/>
+          </a:xfrm>
+          <a:prstGeom prst="rect">
+            <a:avLst/>
+          </a:prstGeom>
+          <a:solidFill>
+            <a:srgbClr val="27865A"/>
+          </a:solidFill>
+          <a:ln>
+            <a:noFill/>
+          </a:ln>
+          <a:effectLst/>
+        </p:spPr>
+        <p:style>
+          <a:lnRef idx="1">
+            <a:schemeClr val="accent1"/>
+          </a:lnRef>
+          <a:fillRef idx="3">
+            <a:schemeClr val="accent1"/>
+          </a:fillRef>
+          <a:effectRef idx="2">
+            <a:schemeClr val="accent1"/>
+          </a:effectRef>
+          <a:fontRef idx="minor">
+            <a:schemeClr val="lt1"/>
+          </a:fontRef>
+        </p:style>
+        <p:txBody>
+          <a:bodyPr rtlCol="0" anchor="ctr"/>
+          <a:lstStyle/>
+          <a:p>
+            <a:pPr algn="ctr"/>
+          </a:p>
+        </p:txBody>
+      </p:sp>
+      <p:sp>
+        <p:nvSpPr>
+          <p:cNvPr id="15" name="TextBox 14"/>
+          <p:cNvSpPr txBox="1"/>
+          <p:nvPr/>
+        </p:nvSpPr>
+        <p:spPr>
+          <a:xfrm>
+            <a:off x="6976872" y="2304288"/>
+            <a:ext cx="1280160" cy="502920"/>
+          </a:xfrm>
+          <a:prstGeom prst="rect">
+            <a:avLst/>
+          </a:prstGeom>
+          <a:noFill/>
+        </p:spPr>
+        <p:txBody>
+          <a:bodyPr wrap="square" anchor="ctr">
+            <a:spAutoFit/>
+          </a:bodyPr>
+          <a:lstStyle/>
+          <a:p>
+            <a:pPr algn="l">
+              <a:lnSpc>
+                <a:spcPct val="105000"/>
+              </a:lnSpc>
+            </a:pPr>
+            <a:r>
+              <a:rPr sz="1200" b="1" i="0">
+                <a:solidFill>
+                  <a:srgbClr val="FFFFFF"/>
+                </a:solidFill>
+                <a:latin typeface="Arial"/>
+              </a:rPr>
+              <a:t>handle</a:t>
+            </a:r>
+          </a:p>
+        </p:txBody>
+      </p:sp>
+      <p:sp>
+        <p:nvSpPr>
+          <p:cNvPr id="16" name="TextBox 15"/>
+          <p:cNvSpPr txBox="1"/>
+          <p:nvPr/>
+        </p:nvSpPr>
+        <p:spPr>
+          <a:xfrm>
+            <a:off x="10892655" y="2304288"/>
+            <a:ext cx="640080" cy="502920"/>
+          </a:xfrm>
+          <a:prstGeom prst="rect">
+            <a:avLst/>
+          </a:prstGeom>
+          <a:noFill/>
+        </p:spPr>
+        <p:txBody>
+          <a:bodyPr wrap="square" anchor="ctr">
+            <a:spAutoFit/>
+          </a:bodyPr>
+          <a:lstStyle/>
+          <a:p>
+            <a:pPr algn="l">
+              <a:lnSpc>
+                <a:spcPct val="105000"/>
+              </a:lnSpc>
+            </a:pPr>
+            <a:r>
+              <a:rPr sz="1300" b="1" i="0">
+                <a:solidFill>
+                  <a:srgbClr val="27865A"/>
+                </a:solidFill>
+                <a:latin typeface="Arial"/>
+              </a:rPr>
+              <a:t>32</a:t>
+            </a:r>
+          </a:p>
+        </p:txBody>
+      </p:sp>
+      <p:sp>
+        <p:nvSpPr>
+          <p:cNvPr id="17" name="Rectangle 16"/>
+          <p:cNvSpPr/>
+          <p:nvPr/>
+        </p:nvSpPr>
+        <p:spPr>
+          <a:xfrm>
+            <a:off x="6903720" y="3154680"/>
+            <a:ext cx="2692101" cy="548640"/>
+          </a:xfrm>
+          <a:prstGeom prst="rect">
+            <a:avLst/>
+          </a:prstGeom>
+          <a:solidFill>
+            <a:srgbClr val="2C6FBB"/>
+          </a:solidFill>
+          <a:ln>
+            <a:noFill/>
+          </a:ln>
+          <a:effectLst/>
+        </p:spPr>
+        <p:style>
+          <a:lnRef idx="1">
+            <a:schemeClr val="accent1"/>
+          </a:lnRef>
+          <a:fillRef idx="3">
+            <a:schemeClr val="accent1"/>
+          </a:fillRef>
+          <a:effectRef idx="2">
+            <a:schemeClr val="accent1"/>
+          </a:effectRef>
+          <a:fontRef idx="minor">
+            <a:schemeClr val="lt1"/>
+          </a:fontRef>
+        </p:style>
+        <p:txBody>
+          <a:bodyPr rtlCol="0" anchor="ctr"/>
+          <a:lstStyle/>
+          <a:p>
+            <a:pPr algn="ctr"/>
+          </a:p>
+        </p:txBody>
+      </p:sp>
+      <p:sp>
+        <p:nvSpPr>
+          <p:cNvPr id="18" name="TextBox 17"/>
+          <p:cNvSpPr txBox="1"/>
+          <p:nvPr/>
+        </p:nvSpPr>
+        <p:spPr>
+          <a:xfrm>
+            <a:off x="6976872" y="3172968"/>
+            <a:ext cx="1280160" cy="502920"/>
+          </a:xfrm>
+          <a:prstGeom prst="rect">
+            <a:avLst/>
+          </a:prstGeom>
+          <a:noFill/>
+        </p:spPr>
+        <p:txBody>
+          <a:bodyPr wrap="square" anchor="ctr">
+            <a:spAutoFit/>
+          </a:bodyPr>
+          <a:lstStyle/>
+          <a:p>
+            <a:pPr algn="l">
+              <a:lnSpc>
+                <a:spcPct val="105000"/>
+              </a:lnSpc>
+            </a:pPr>
+            <a:r>
+              <a:rPr sz="1200" b="1" i="0">
+                <a:solidFill>
+                  <a:srgbClr val="FFFFFF"/>
+                </a:solidFill>
+                <a:latin typeface="Arial"/>
+              </a:rPr>
+              <a:t>rim</a:t>
+            </a:r>
+          </a:p>
+        </p:txBody>
+      </p:sp>
+      <p:sp>
+        <p:nvSpPr>
+          <p:cNvPr id="19" name="TextBox 18"/>
+          <p:cNvSpPr txBox="1"/>
+          <p:nvPr/>
+        </p:nvSpPr>
+        <p:spPr>
+          <a:xfrm>
+            <a:off x="9668973" y="3172968"/>
+            <a:ext cx="640080" cy="502920"/>
+          </a:xfrm>
+          <a:prstGeom prst="rect">
+            <a:avLst/>
+          </a:prstGeom>
+          <a:noFill/>
+        </p:spPr>
+        <p:txBody>
+          <a:bodyPr wrap="square" anchor="ctr">
+            <a:spAutoFit/>
+          </a:bodyPr>
+          <a:lstStyle/>
+          <a:p>
+            <a:pPr algn="l">
+              <a:lnSpc>
+                <a:spcPct val="105000"/>
+              </a:lnSpc>
+            </a:pPr>
+            <a:r>
+              <a:rPr sz="1300" b="1" i="0">
+                <a:solidFill>
+                  <a:srgbClr val="2C6FBB"/>
+                </a:solidFill>
+                <a:latin typeface="Arial"/>
+              </a:rPr>
+              <a:t>22</a:t>
+            </a:r>
+          </a:p>
+        </p:txBody>
+      </p:sp>
+      <p:sp>
+        <p:nvSpPr>
+          <p:cNvPr id="20" name="Rectangle 19"/>
+          <p:cNvSpPr/>
+          <p:nvPr/>
+        </p:nvSpPr>
+        <p:spPr>
+          <a:xfrm>
+            <a:off x="6903720" y="4023360"/>
+            <a:ext cx="1468418" cy="548640"/>
+          </a:xfrm>
+          <a:prstGeom prst="rect">
+            <a:avLst/>
+          </a:prstGeom>
+          <a:solidFill>
+            <a:srgbClr val="C0392B"/>
+          </a:solidFill>
+          <a:ln>
+            <a:noFill/>
+          </a:ln>
+          <a:effectLst/>
+        </p:spPr>
+        <p:style>
+          <a:lnRef idx="1">
+            <a:schemeClr val="accent1"/>
+          </a:lnRef>
+          <a:fillRef idx="3">
+            <a:schemeClr val="accent1"/>
+          </a:fillRef>
+          <a:effectRef idx="2">
+            <a:schemeClr val="accent1"/>
+          </a:effectRef>
+          <a:fontRef idx="minor">
+            <a:schemeClr val="lt1"/>
+          </a:fontRef>
+        </p:style>
+        <p:txBody>
+          <a:bodyPr rtlCol="0" anchor="ctr"/>
+          <a:lstStyle/>
+          <a:p>
+            <a:pPr algn="ctr"/>
+          </a:p>
+        </p:txBody>
+      </p:sp>
+      <p:sp>
+        <p:nvSpPr>
+          <p:cNvPr id="21" name="TextBox 20"/>
+          <p:cNvSpPr txBox="1"/>
+          <p:nvPr/>
+        </p:nvSpPr>
+        <p:spPr>
+          <a:xfrm>
+            <a:off x="6976872" y="4041648"/>
+            <a:ext cx="1280160" cy="502920"/>
+          </a:xfrm>
+          <a:prstGeom prst="rect">
+            <a:avLst/>
+          </a:prstGeom>
+          <a:noFill/>
+        </p:spPr>
+        <p:txBody>
+          <a:bodyPr wrap="square" anchor="ctr">
+            <a:spAutoFit/>
+          </a:bodyPr>
+          <a:lstStyle/>
+          <a:p>
+            <a:pPr algn="l">
+              <a:lnSpc>
+                <a:spcPct val="105000"/>
+              </a:lnSpc>
+            </a:pPr>
+            <a:r>
+              <a:rPr sz="1200" b="1" i="0">
+                <a:solidFill>
+                  <a:srgbClr val="FFFFFF"/>
+                </a:solidFill>
+                <a:latin typeface="Arial"/>
+              </a:rPr>
+              <a:t>body</a:t>
+            </a:r>
+          </a:p>
+        </p:txBody>
+      </p:sp>
+      <p:sp>
+        <p:nvSpPr>
+          <p:cNvPr id="22" name="TextBox 21"/>
+          <p:cNvSpPr txBox="1"/>
+          <p:nvPr/>
+        </p:nvSpPr>
+        <p:spPr>
+          <a:xfrm>
+            <a:off x="8445290" y="4041648"/>
+            <a:ext cx="640080" cy="502920"/>
+          </a:xfrm>
+          <a:prstGeom prst="rect">
+            <a:avLst/>
+          </a:prstGeom>
+          <a:noFill/>
+        </p:spPr>
+        <p:txBody>
+          <a:bodyPr wrap="square" anchor="ctr">
+            <a:spAutoFit/>
+          </a:bodyPr>
+          <a:lstStyle/>
+          <a:p>
+            <a:pPr algn="l">
+              <a:lnSpc>
+                <a:spcPct val="105000"/>
+              </a:lnSpc>
+            </a:pPr>
+            <a:r>
+              <a:rPr sz="1300" b="1" i="0">
+                <a:solidFill>
+                  <a:srgbClr val="C0392B"/>
+                </a:solidFill>
+                <a:latin typeface="Arial"/>
+              </a:rPr>
+              <a:t>12</a:t>
+            </a:r>
+          </a:p>
+        </p:txBody>
+      </p:sp>
+      <p:sp>
+        <p:nvSpPr>
+          <p:cNvPr id="23" name="TextBox 22"/>
+          <p:cNvSpPr txBox="1"/>
+          <p:nvPr/>
+        </p:nvSpPr>
+        <p:spPr>
+          <a:xfrm>
+            <a:off x="6858000" y="4754880"/>
+            <a:ext cx="4754880" cy="365760"/>
+          </a:xfrm>
+          <a:prstGeom prst="rect">
+            <a:avLst/>
+          </a:prstGeom>
+          <a:noFill/>
+        </p:spPr>
+        <p:txBody>
+          <a:bodyPr wrap="square" anchor="t">
+            <a:spAutoFit/>
+          </a:bodyPr>
+          <a:lstStyle/>
+          <a:p>
+            <a:pPr algn="l">
+              <a:lnSpc>
+                <a:spcPct val="105000"/>
+              </a:lnSpc>
+            </a:pPr>
+            <a:r>
+              <a:rPr sz="1000" b="0" i="1">
+                <a:solidFill>
+                  <a:srgbClr val="666666"/>
+                </a:solidFill>
+                <a:latin typeface="Arial"/>
+              </a:rPr>
+              <a:t>wider margin = easier, safer carry  (illustrative)</a:t>
+            </a:r>
+          </a:p>
+        </p:txBody>
+      </p:sp>
+      <p:cxnSp>
+        <p:nvCxnSpPr>
+          <p:cNvPr id="24" name="Connector 23"/>
+          <p:cNvCxnSpPr/>
+          <p:nvPr/>
+        </p:nvCxnSpPr>
+        <p:spPr>
+          <a:xfrm flipH="1">
+            <a:off x="1645920" y="5440680"/>
+            <a:ext cx="8961120" cy="0"/>
+          </a:xfrm>
+          <a:prstGeom prst="line">
+            <a:avLst/>
+          </a:prstGeom>
+          <a:ln w="22860">
+            <a:solidFill>
+              <a:srgbClr val="1A365D"/>
+            </a:solidFill>
+            <a:prstDash val="dash"/>
+            <a:tailEnd type="triangle" w="med" len="med"/>
+          </a:ln>
+        </p:spPr>
+        <p:style>
+          <a:lnRef idx="2">
+            <a:schemeClr val="accent1"/>
+          </a:lnRef>
+          <a:fillRef idx="0">
+            <a:schemeClr val="accent1"/>
+          </a:fillRef>
+          <a:effectRef idx="1">
+            <a:schemeClr val="accent1"/>
+          </a:effectRef>
+          <a:fontRef idx="minor">
+            <a:schemeClr val="tx1"/>
+          </a:fontRef>
+        </p:style>
+      </p:cxnSp>
+      <p:sp>
+        <p:nvSpPr>
+          <p:cNvPr id="25" name="TextBox 24"/>
+          <p:cNvSpPr txBox="1"/>
+          <p:nvPr/>
+        </p:nvSpPr>
+        <p:spPr>
+          <a:xfrm>
+            <a:off x="1371600" y="5596128"/>
+            <a:ext cx="9509760" cy="365760"/>
+          </a:xfrm>
+          <a:prstGeom prst="rect">
+            <a:avLst/>
+          </a:prstGeom>
+          <a:noFill/>
+        </p:spPr>
+        <p:txBody>
+          <a:bodyPr wrap="square" anchor="t">
+            <a:spAutoFit/>
+          </a:bodyPr>
+          <a:lstStyle/>
+          <a:p>
+            <a:pPr algn="ctr">
+              <a:lnSpc>
+                <a:spcPct val="105000"/>
+              </a:lnSpc>
+            </a:pPr>
+            <a:r>
+              <a:rPr sz="1200" b="0" i="1">
+                <a:solidFill>
+                  <a:srgbClr val="1A365D"/>
+                </a:solidFill>
+                <a:latin typeface="Arial"/>
+              </a:rPr>
+              <a:t>future (thesis): spill margin → grasp-generation reward — close the loop</a:t>
+            </a:r>
+          </a:p>
+        </p:txBody>
+      </p:sp>
+      <p:sp>
+        <p:nvSpPr>
+          <p:cNvPr id="26" name="TextBox 25"/>
           <p:cNvSpPr txBox="1"/>
           <p:nvPr/>
         </p:nvSpPr>
@@ -7090,7 +7793,7 @@
                 </a:solidFill>
                 <a:latin typeface="Arial"/>
               </a:rPr>
-              <a:t>Method — the optimizer as a grasp evaluator</a:t>
+              <a:t>Evaluation &amp; plan</a:t>
             </a:r>
           </a:p>
         </p:txBody>
@@ -7140,7 +7843,7 @@
       </p:sp>
       <p:pic>
         <p:nvPicPr>
-          <p:cNvPr id="4" name="Picture 3" descr="grasp_evaluator.png"/>
+          <p:cNvPr id="4" name="Picture 3" descr="ablation_plan.png"/>
           <p:cNvPicPr>
             <a:picLocks noChangeAspect="1"/>
           </p:cNvPicPr>
@@ -7154,8 +7857,8 @@
         </p:blipFill>
         <p:spPr>
           <a:xfrm>
-            <a:off x="1013208" y="1417320"/>
-            <a:ext cx="10165277" cy="3657600"/>
+            <a:off x="1924680" y="1371600"/>
+            <a:ext cx="8342334" cy="2743200"/>
           </a:xfrm>
           <a:prstGeom prst="rect">
             <a:avLst/>
@@ -7170,8 +7873,8 @@
         </p:nvSpPr>
         <p:spPr>
           <a:xfrm>
-            <a:off x="640080" y="5184648"/>
-            <a:ext cx="10972800" cy="822960"/>
+            <a:off x="640080" y="4224528"/>
+            <a:ext cx="11064240" cy="1920240"/>
           </a:xfrm>
           <a:prstGeom prst="rect">
             <a:avLst/>
@@ -7186,53 +7889,101 @@
           <a:p>
             <a:pPr algn="l">
               <a:lnSpc>
-                <a:spcPct val="105000"/>
+                <a:spcPct val="112000"/>
               </a:lnSpc>
             </a:pPr>
             <a:r>
-              <a:rPr sz="1350" b="0" i="0">
+              <a:rPr sz="1450" b="1" i="0">
                 <a:solidFill>
                   <a:srgbClr val="2C3E50"/>
                 </a:solidFill>
                 <a:latin typeface="Arial"/>
               </a:rPr>
-              <a:t>Run the same spill-aware planner </a:t>
-            </a:r>
-            <a:r>
-              <a:rPr sz="1350" b="1" i="0">
-                <a:solidFill>
-                  <a:srgbClr val="1A365D"/>
-                </a:solidFill>
-                <a:latin typeface="Arial"/>
-              </a:rPr>
-              <a:t>per grasp</a:t>
-            </a:r>
-            <a:r>
-              <a:rPr sz="1350" b="0" i="0">
+              <a:t>• 3-way ablation: </a:t>
+            </a:r>
+            <a:r>
+              <a:rPr sz="1450" b="0" i="0">
                 <a:solidFill>
                   <a:srgbClr val="2C3E50"/>
                 </a:solidFill>
                 <a:latin typeface="Arial"/>
               </a:rPr>
-              <a:t> → each grasp gets an achievable spill-margin score; the optimizer becomes a downstream-aware </a:t>
-            </a:r>
-            <a:r>
-              <a:rPr sz="1350" b="1" i="0">
-                <a:solidFill>
-                  <a:srgbClr val="A93226"/>
-                </a:solidFill>
-                <a:latin typeface="Arial"/>
-              </a:rPr>
-              <a:t>grasp evaluator</a:t>
-            </a:r>
-            <a:r>
-              <a:rPr sz="1350" b="0" i="0">
+              <a:t>linear interp / CHOMP / CHOMP + spill — on a mug, with and without obstacles.</a:t>
+            </a:r>
+          </a:p>
+          <a:p>
+            <a:pPr algn="l">
+              <a:lnSpc>
+                <a:spcPct val="112000"/>
+              </a:lnSpc>
+            </a:pPr>
+            <a:r>
+              <a:rPr sz="1450" b="1" i="0">
                 <a:solidFill>
                   <a:srgbClr val="2C3E50"/>
                 </a:solidFill>
                 <a:latin typeface="Arial"/>
               </a:rPr>
-              <a:t>.  Future (thesis): feed that score back into grasp generation — closing the loop.</a:t>
+              <a:t>• Metrics: </a:t>
+            </a:r>
+            <a:r>
+              <a:rPr sz="1450" b="0" i="0">
+                <a:solidFill>
+                  <a:srgbClr val="2C3E50"/>
+                </a:solidFill>
+                <a:latin typeface="Arial"/>
+              </a:rPr>
+              <a:t>spill ratio, path length, smoothness (jerk), plan time; run across grasps to show the margin differs.</a:t>
+            </a:r>
+          </a:p>
+          <a:p>
+            <a:pPr algn="l">
+              <a:lnSpc>
+                <a:spcPct val="112000"/>
+              </a:lnSpc>
+            </a:pPr>
+            <a:r>
+              <a:rPr sz="1450" b="1" i="0">
+                <a:solidFill>
+                  <a:srgbClr val="2C3E50"/>
+                </a:solidFill>
+                <a:latin typeface="Arial"/>
+              </a:rPr>
+              <a:t>• Demo: </a:t>
+            </a:r>
+            <a:r>
+              <a:rPr sz="1450" b="0" i="0">
+                <a:solidFill>
+                  <a:srgbClr val="2C3E50"/>
+                </a:solidFill>
+                <a:latin typeface="Arial"/>
+              </a:rPr>
+              <a:t>SAPIEN particles on the liquid surface → count how many cross the rim.</a:t>
+            </a:r>
+          </a:p>
+          <a:p>
+            <a:pPr algn="l">
+              <a:lnSpc>
+                <a:spcPct val="112000"/>
+              </a:lnSpc>
+            </a:pPr>
+            <a:r>
+              <a:rPr sz="1450" b="1" i="0">
+                <a:solidFill>
+                  <a:srgbClr val="2C3E50"/>
+                </a:solidFill>
+                <a:latin typeface="Arial"/>
+              </a:rPr>
+              <a:t>• Timeline: </a:t>
+            </a:r>
+            <a:r>
+              <a:rPr sz="1450" b="0" i="0">
+                <a:solidFill>
+                  <a:srgbClr val="2C3E50"/>
+                </a:solidFill>
+                <a:latin typeface="Arial"/>
+              </a:rPr>
+              <a:t>implementation + ablation within ~1 week  (proposal 06-08 → report 06-15).</a:t>
             </a:r>
           </a:p>
         </p:txBody>
@@ -7272,292 +8023,6 @@
                 <a:latin typeface="Arial"/>
               </a:rPr>
               <a:t>8</a:t>
-            </a:r>
-          </a:p>
-        </p:txBody>
-      </p:sp>
-    </p:spTree>
-  </p:cSld>
-  <p:clrMapOvr>
-    <a:masterClrMapping/>
-  </p:clrMapOvr>
-</p:sld>
-</file>
-
-<file path=ppt/slides/slide9.xml><?xml version="1.0" encoding="utf-8"?>
-<p:sld xmlns:a="http://schemas.openxmlformats.org/drawingml/2006/main" xmlns:p="http://schemas.openxmlformats.org/presentationml/2006/main" xmlns:r="http://schemas.openxmlformats.org/officeDocument/2006/relationships">
-  <p:cSld>
-    <p:spTree>
-      <p:nvGrpSpPr>
-        <p:cNvPr id="1" name=""/>
-        <p:cNvGrpSpPr/>
-        <p:nvPr/>
-      </p:nvGrpSpPr>
-      <p:grpSpPr/>
-      <p:sp>
-        <p:nvSpPr>
-          <p:cNvPr id="2" name="TextBox 1"/>
-          <p:cNvSpPr txBox="1"/>
-          <p:nvPr/>
-        </p:nvSpPr>
-        <p:spPr>
-          <a:xfrm>
-            <a:off x="502920" y="274320"/>
-            <a:ext cx="11155680" cy="868680"/>
-          </a:xfrm>
-          <a:prstGeom prst="rect">
-            <a:avLst/>
-          </a:prstGeom>
-          <a:noFill/>
-        </p:spPr>
-        <p:txBody>
-          <a:bodyPr wrap="square" anchor="ctr">
-            <a:spAutoFit/>
-          </a:bodyPr>
-          <a:lstStyle/>
-          <a:p>
-            <a:pPr algn="l">
-              <a:lnSpc>
-                <a:spcPct val="105000"/>
-              </a:lnSpc>
-            </a:pPr>
-            <a:r>
-              <a:rPr sz="3000" b="1" i="0">
-                <a:solidFill>
-                  <a:srgbClr val="1A365D"/>
-                </a:solidFill>
-                <a:latin typeface="Arial"/>
-              </a:rPr>
-              <a:t>Evaluation &amp; plan</a:t>
-            </a:r>
-          </a:p>
-        </p:txBody>
-      </p:sp>
-      <p:sp>
-        <p:nvSpPr>
-          <p:cNvPr id="3" name="Rectangle 2"/>
-          <p:cNvSpPr/>
-          <p:nvPr/>
-        </p:nvSpPr>
-        <p:spPr>
-          <a:xfrm>
-            <a:off x="548640" y="1115568"/>
-            <a:ext cx="11064240" cy="27940"/>
-          </a:xfrm>
-          <a:prstGeom prst="rect">
-            <a:avLst/>
-          </a:prstGeom>
-          <a:solidFill>
-            <a:srgbClr val="CCCCCC"/>
-          </a:solidFill>
-          <a:ln>
-            <a:noFill/>
-          </a:ln>
-        </p:spPr>
-        <p:style>
-          <a:lnRef idx="1">
-            <a:schemeClr val="accent1"/>
-          </a:lnRef>
-          <a:fillRef idx="3">
-            <a:schemeClr val="accent1"/>
-          </a:fillRef>
-          <a:effectRef idx="2">
-            <a:schemeClr val="accent1"/>
-          </a:effectRef>
-          <a:fontRef idx="minor">
-            <a:schemeClr val="lt1"/>
-          </a:fontRef>
-        </p:style>
-        <p:txBody>
-          <a:bodyPr rtlCol="0" anchor="ctr"/>
-          <a:lstStyle/>
-          <a:p>
-            <a:pPr algn="ctr"/>
-          </a:p>
-        </p:txBody>
-      </p:sp>
-      <p:pic>
-        <p:nvPicPr>
-          <p:cNvPr id="4" name="Picture 3" descr="ablation_plan.png"/>
-          <p:cNvPicPr>
-            <a:picLocks noChangeAspect="1"/>
-          </p:cNvPicPr>
-          <p:nvPr/>
-        </p:nvPicPr>
-        <p:blipFill>
-          <a:blip r:embed="rId2"/>
-          <a:stretch>
-            <a:fillRect/>
-          </a:stretch>
-        </p:blipFill>
-        <p:spPr>
-          <a:xfrm>
-            <a:off x="1924680" y="1371600"/>
-            <a:ext cx="8342334" cy="2743200"/>
-          </a:xfrm>
-          <a:prstGeom prst="rect">
-            <a:avLst/>
-          </a:prstGeom>
-        </p:spPr>
-      </p:pic>
-      <p:sp>
-        <p:nvSpPr>
-          <p:cNvPr id="5" name="TextBox 4"/>
-          <p:cNvSpPr txBox="1"/>
-          <p:nvPr/>
-        </p:nvSpPr>
-        <p:spPr>
-          <a:xfrm>
-            <a:off x="640080" y="4224528"/>
-            <a:ext cx="11064240" cy="1920240"/>
-          </a:xfrm>
-          <a:prstGeom prst="rect">
-            <a:avLst/>
-          </a:prstGeom>
-          <a:noFill/>
-        </p:spPr>
-        <p:txBody>
-          <a:bodyPr wrap="square" anchor="t">
-            <a:spAutoFit/>
-          </a:bodyPr>
-          <a:lstStyle/>
-          <a:p>
-            <a:pPr algn="l">
-              <a:lnSpc>
-                <a:spcPct val="112000"/>
-              </a:lnSpc>
-            </a:pPr>
-            <a:r>
-              <a:rPr sz="1450" b="1" i="0">
-                <a:solidFill>
-                  <a:srgbClr val="2C3E50"/>
-                </a:solidFill>
-                <a:latin typeface="Arial"/>
-              </a:rPr>
-              <a:t>• 3-way ablation: </a:t>
-            </a:r>
-            <a:r>
-              <a:rPr sz="1450" b="0" i="0">
-                <a:solidFill>
-                  <a:srgbClr val="2C3E50"/>
-                </a:solidFill>
-                <a:latin typeface="Arial"/>
-              </a:rPr>
-              <a:t>linear interp / CHOMP / CHOMP + spill — on a mug, with and without obstacles.</a:t>
-            </a:r>
-          </a:p>
-          <a:p>
-            <a:pPr algn="l">
-              <a:lnSpc>
-                <a:spcPct val="112000"/>
-              </a:lnSpc>
-            </a:pPr>
-            <a:r>
-              <a:rPr sz="1450" b="1" i="0">
-                <a:solidFill>
-                  <a:srgbClr val="2C3E50"/>
-                </a:solidFill>
-                <a:latin typeface="Arial"/>
-              </a:rPr>
-              <a:t>• Metrics: </a:t>
-            </a:r>
-            <a:r>
-              <a:rPr sz="1450" b="0" i="0">
-                <a:solidFill>
-                  <a:srgbClr val="2C3E50"/>
-                </a:solidFill>
-                <a:latin typeface="Arial"/>
-              </a:rPr>
-              <a:t>spill ratio, path length, smoothness (jerk), plan time; run across grasps to show the margin differs.</a:t>
-            </a:r>
-          </a:p>
-          <a:p>
-            <a:pPr algn="l">
-              <a:lnSpc>
-                <a:spcPct val="112000"/>
-              </a:lnSpc>
-            </a:pPr>
-            <a:r>
-              <a:rPr sz="1450" b="1" i="0">
-                <a:solidFill>
-                  <a:srgbClr val="2C3E50"/>
-                </a:solidFill>
-                <a:latin typeface="Arial"/>
-              </a:rPr>
-              <a:t>• Demo: </a:t>
-            </a:r>
-            <a:r>
-              <a:rPr sz="1450" b="0" i="0">
-                <a:solidFill>
-                  <a:srgbClr val="2C3E50"/>
-                </a:solidFill>
-                <a:latin typeface="Arial"/>
-              </a:rPr>
-              <a:t>SAPIEN particles on the liquid surface → count how many cross the rim.</a:t>
-            </a:r>
-          </a:p>
-          <a:p>
-            <a:pPr algn="l">
-              <a:lnSpc>
-                <a:spcPct val="112000"/>
-              </a:lnSpc>
-            </a:pPr>
-            <a:r>
-              <a:rPr sz="1450" b="1" i="0">
-                <a:solidFill>
-                  <a:srgbClr val="2C3E50"/>
-                </a:solidFill>
-                <a:latin typeface="Arial"/>
-              </a:rPr>
-              <a:t>• Timeline: </a:t>
-            </a:r>
-            <a:r>
-              <a:rPr sz="1450" b="0" i="0">
-                <a:solidFill>
-                  <a:srgbClr val="2C3E50"/>
-                </a:solidFill>
-                <a:latin typeface="Arial"/>
-              </a:rPr>
-              <a:t>implementation + ablation within ~1 week  (proposal 06-08 → report 06-15).</a:t>
-            </a:r>
-          </a:p>
-        </p:txBody>
-      </p:sp>
-      <p:sp>
-        <p:nvSpPr>
-          <p:cNvPr id="6" name="TextBox 5"/>
-          <p:cNvSpPr txBox="1"/>
-          <p:nvPr/>
-        </p:nvSpPr>
-        <p:spPr>
-          <a:xfrm>
-            <a:off x="11612880" y="6400800"/>
-            <a:ext cx="457200" cy="320040"/>
-          </a:xfrm>
-          <a:prstGeom prst="rect">
-            <a:avLst/>
-          </a:prstGeom>
-          <a:noFill/>
-        </p:spPr>
-        <p:txBody>
-          <a:bodyPr wrap="square" anchor="t">
-            <a:spAutoFit/>
-          </a:bodyPr>
-          <a:lstStyle/>
-          <a:p>
-            <a:pPr algn="r">
-              <a:lnSpc>
-                <a:spcPct val="105000"/>
-              </a:lnSpc>
-            </a:pPr>
-            <a:r>
-              <a:rPr sz="1200" b="0" i="0">
-                <a:solidFill>
-                  <a:srgbClr val="666666"/>
-                </a:solidFill>
-                <a:latin typeface="Arial"/>
-              </a:rPr>
-              <a:t>9</a:t>
             </a:r>
           </a:p>
         </p:txBody>

--- a/docs/slides_proposal_editable.pptx
+++ b/docs/slides_proposal_editable.pptx
@@ -12,7 +12,6 @@
     <p:sldId id="260" r:id="rId11"/>
     <p:sldId id="261" r:id="rId12"/>
     <p:sldId id="262" r:id="rId13"/>
-    <p:sldId id="263" r:id="rId14"/>
   </p:sldIdLst>
   <p:sldSz cx="12191695" cy="6858000" type="screen4x3"/>
   <p:notesSz cx="6858000" cy="9144000"/>
@@ -5714,30 +5713,50 @@
           </a:p>
         </p:txBody>
       </p:sp>
-      <p:pic>
-        <p:nvPicPr>
-          <p:cNvPr id="4" name="Picture 3" descr="grasp_mechanism.png"/>
-          <p:cNvPicPr>
-            <a:picLocks noChangeAspect="1"/>
-          </p:cNvPicPr>
-          <p:nvPr/>
-        </p:nvPicPr>
-        <p:blipFill>
-          <a:blip r:embed="rId2"/>
-          <a:stretch>
-            <a:fillRect/>
-          </a:stretch>
-        </p:blipFill>
-        <p:spPr>
-          <a:xfrm>
-            <a:off x="3056485" y="1371600"/>
-            <a:ext cx="6078723" cy="2788920"/>
+      <p:sp>
+        <p:nvSpPr>
+          <p:cNvPr id="4" name="Rectangle 3"/>
+          <p:cNvSpPr/>
+          <p:nvPr/>
+        </p:nvSpPr>
+        <p:spPr>
+          <a:xfrm>
+            <a:off x="6053328" y="1554480"/>
+            <a:ext cx="15240" cy="2103120"/>
           </a:xfrm>
           <a:prstGeom prst="rect">
             <a:avLst/>
           </a:prstGeom>
-        </p:spPr>
-      </p:pic>
+          <a:solidFill>
+            <a:srgbClr val="DDDDDD"/>
+          </a:solidFill>
+          <a:ln>
+            <a:noFill/>
+          </a:ln>
+          <a:effectLst/>
+        </p:spPr>
+        <p:style>
+          <a:lnRef idx="1">
+            <a:schemeClr val="accent1"/>
+          </a:lnRef>
+          <a:fillRef idx="3">
+            <a:schemeClr val="accent1"/>
+          </a:fillRef>
+          <a:effectRef idx="2">
+            <a:schemeClr val="accent1"/>
+          </a:effectRef>
+          <a:fontRef idx="minor">
+            <a:schemeClr val="lt1"/>
+          </a:fontRef>
+        </p:style>
+        <p:txBody>
+          <a:bodyPr rtlCol="0" anchor="ctr"/>
+          <a:lstStyle/>
+          <a:p>
+            <a:pPr algn="ctr"/>
+          </a:p>
+        </p:txBody>
+      </p:sp>
       <p:sp>
         <p:nvSpPr>
           <p:cNvPr id="5" name="TextBox 4"/>
@@ -5746,8 +5765,8 @@
         </p:nvSpPr>
         <p:spPr>
           <a:xfrm>
-            <a:off x="640080" y="4297680"/>
-            <a:ext cx="11064240" cy="2011680"/>
+            <a:off x="1417320" y="1463040"/>
+            <a:ext cx="3291840" cy="365760"/>
           </a:xfrm>
           <a:prstGeom prst="rect">
             <a:avLst/>
@@ -5760,101 +5779,1361 @@
           </a:bodyPr>
           <a:lstStyle/>
           <a:p>
+            <a:pPr algn="ctr">
+              <a:lnSpc>
+                <a:spcPct val="105000"/>
+              </a:lnSpc>
+            </a:pPr>
+            <a:r>
+              <a:rPr sz="1250" b="1" i="0">
+                <a:solidFill>
+                  <a:srgbClr val="27865A"/>
+                </a:solidFill>
+                <a:latin typeface="Arial"/>
+              </a:rPr>
+              <a:t>handle grip  —  large offset r</a:t>
+            </a:r>
+          </a:p>
+        </p:txBody>
+      </p:sp>
+      <p:sp>
+        <p:nvSpPr>
+          <p:cNvPr id="6" name="Rectangle 5"/>
+          <p:cNvSpPr/>
+          <p:nvPr/>
+        </p:nvSpPr>
+        <p:spPr>
+          <a:xfrm>
+            <a:off x="1709928" y="3246120"/>
+            <a:ext cx="512064" cy="128016"/>
+          </a:xfrm>
+          <a:prstGeom prst="rect">
+            <a:avLst/>
+          </a:prstGeom>
+          <a:solidFill>
+            <a:srgbClr val="2C3E50"/>
+          </a:solidFill>
+          <a:ln>
+            <a:noFill/>
+          </a:ln>
+          <a:effectLst/>
+        </p:spPr>
+        <p:style>
+          <a:lnRef idx="1">
+            <a:schemeClr val="accent1"/>
+          </a:lnRef>
+          <a:fillRef idx="3">
+            <a:schemeClr val="accent1"/>
+          </a:fillRef>
+          <a:effectRef idx="2">
+            <a:schemeClr val="accent1"/>
+          </a:effectRef>
+          <a:fontRef idx="minor">
+            <a:schemeClr val="lt1"/>
+          </a:fontRef>
+        </p:style>
+        <p:txBody>
+          <a:bodyPr rtlCol="0" anchor="ctr"/>
+          <a:lstStyle/>
+          <a:p>
+            <a:pPr algn="ctr"/>
+          </a:p>
+        </p:txBody>
+      </p:sp>
+      <p:sp>
+        <p:nvSpPr>
+          <p:cNvPr id="7" name="Rectangle 6"/>
+          <p:cNvSpPr/>
+          <p:nvPr/>
+        </p:nvSpPr>
+        <p:spPr>
+          <a:xfrm>
+            <a:off x="1709928" y="2953512"/>
+            <a:ext cx="118872" cy="310896"/>
+          </a:xfrm>
+          <a:prstGeom prst="rect">
+            <a:avLst/>
+          </a:prstGeom>
+          <a:solidFill>
+            <a:srgbClr val="2C3E50"/>
+          </a:solidFill>
+          <a:ln>
+            <a:noFill/>
+          </a:ln>
+          <a:effectLst/>
+        </p:spPr>
+        <p:style>
+          <a:lnRef idx="1">
+            <a:schemeClr val="accent1"/>
+          </a:lnRef>
+          <a:fillRef idx="3">
+            <a:schemeClr val="accent1"/>
+          </a:fillRef>
+          <a:effectRef idx="2">
+            <a:schemeClr val="accent1"/>
+          </a:effectRef>
+          <a:fontRef idx="minor">
+            <a:schemeClr val="lt1"/>
+          </a:fontRef>
+        </p:style>
+        <p:txBody>
+          <a:bodyPr rtlCol="0" anchor="ctr"/>
+          <a:lstStyle/>
+          <a:p>
+            <a:pPr algn="ctr"/>
+          </a:p>
+        </p:txBody>
+      </p:sp>
+      <p:sp>
+        <p:nvSpPr>
+          <p:cNvPr id="8" name="Rectangle 7"/>
+          <p:cNvSpPr/>
+          <p:nvPr/>
+        </p:nvSpPr>
+        <p:spPr>
+          <a:xfrm>
+            <a:off x="2103120" y="2953512"/>
+            <a:ext cx="118872" cy="310896"/>
+          </a:xfrm>
+          <a:prstGeom prst="rect">
+            <a:avLst/>
+          </a:prstGeom>
+          <a:solidFill>
+            <a:srgbClr val="2C3E50"/>
+          </a:solidFill>
+          <a:ln>
+            <a:noFill/>
+          </a:ln>
+          <a:effectLst/>
+        </p:spPr>
+        <p:style>
+          <a:lnRef idx="1">
+            <a:schemeClr val="accent1"/>
+          </a:lnRef>
+          <a:fillRef idx="3">
+            <a:schemeClr val="accent1"/>
+          </a:fillRef>
+          <a:effectRef idx="2">
+            <a:schemeClr val="accent1"/>
+          </a:effectRef>
+          <a:fontRef idx="minor">
+            <a:schemeClr val="lt1"/>
+          </a:fontRef>
+        </p:style>
+        <p:txBody>
+          <a:bodyPr rtlCol="0" anchor="ctr"/>
+          <a:lstStyle/>
+          <a:p>
+            <a:pPr algn="ctr"/>
+          </a:p>
+        </p:txBody>
+      </p:sp>
+      <p:sp>
+        <p:nvSpPr>
+          <p:cNvPr id="9" name="TextBox 8"/>
+          <p:cNvSpPr txBox="1"/>
+          <p:nvPr/>
+        </p:nvSpPr>
+        <p:spPr>
+          <a:xfrm>
+            <a:off x="1371600" y="3401568"/>
+            <a:ext cx="1188720" cy="274320"/>
+          </a:xfrm>
+          <a:prstGeom prst="rect">
+            <a:avLst/>
+          </a:prstGeom>
+          <a:noFill/>
+        </p:spPr>
+        <p:txBody>
+          <a:bodyPr wrap="square" anchor="t">
+            <a:spAutoFit/>
+          </a:bodyPr>
+          <a:lstStyle/>
+          <a:p>
+            <a:pPr algn="ctr">
+              <a:lnSpc>
+                <a:spcPct val="105000"/>
+              </a:lnSpc>
+            </a:pPr>
+            <a:r>
+              <a:rPr sz="950" b="0" i="0">
+                <a:solidFill>
+                  <a:srgbClr val="2C3E50"/>
+                </a:solidFill>
+                <a:latin typeface="Arial"/>
+              </a:rPr>
+              <a:t>EE / wrist</a:t>
+            </a:r>
+          </a:p>
+        </p:txBody>
+      </p:sp>
+      <p:sp>
+        <p:nvSpPr>
+          <p:cNvPr id="10" name="Trapezoid 9"/>
+          <p:cNvSpPr/>
+          <p:nvPr/>
+        </p:nvSpPr>
+        <p:spPr>
+          <a:xfrm rot="10800000">
+            <a:off x="3054096" y="1828800"/>
+            <a:ext cx="749808" cy="914400"/>
+          </a:xfrm>
+          <a:prstGeom prst="trapezoid">
+            <a:avLst/>
+          </a:prstGeom>
+          <a:solidFill>
+            <a:srgbClr val="EEF2F7"/>
+          </a:solidFill>
+          <a:ln w="22225">
+            <a:solidFill>
+              <a:srgbClr val="27865A"/>
+            </a:solidFill>
+          </a:ln>
+          <a:effectLst/>
+        </p:spPr>
+        <p:style>
+          <a:lnRef idx="1">
+            <a:schemeClr val="accent1"/>
+          </a:lnRef>
+          <a:fillRef idx="3">
+            <a:schemeClr val="accent1"/>
+          </a:fillRef>
+          <a:effectRef idx="2">
+            <a:schemeClr val="accent1"/>
+          </a:effectRef>
+          <a:fontRef idx="minor">
+            <a:schemeClr val="lt1"/>
+          </a:fontRef>
+        </p:style>
+        <p:txBody>
+          <a:bodyPr rtlCol="0" anchor="ctr"/>
+          <a:lstStyle/>
+          <a:p>
+            <a:pPr algn="ctr"/>
+          </a:p>
+        </p:txBody>
+      </p:sp>
+      <p:cxnSp>
+        <p:nvCxnSpPr>
+          <p:cNvPr id="11" name="Connector 10"/>
+          <p:cNvCxnSpPr/>
+          <p:nvPr/>
+        </p:nvCxnSpPr>
+        <p:spPr>
+          <a:xfrm flipV="1">
+            <a:off x="2148840" y="2697480"/>
+            <a:ext cx="1097280" cy="502920"/>
+          </a:xfrm>
+          <a:prstGeom prst="line">
+            <a:avLst/>
+          </a:prstGeom>
+          <a:ln w="25400">
+            <a:solidFill>
+              <a:srgbClr val="27865A"/>
+            </a:solidFill>
+            <a:prstDash val="dash"/>
+            <a:tailEnd type="triangle" w="med" len="med"/>
+          </a:ln>
+        </p:spPr>
+        <p:style>
+          <a:lnRef idx="2">
+            <a:schemeClr val="accent1"/>
+          </a:lnRef>
+          <a:fillRef idx="0">
+            <a:schemeClr val="accent1"/>
+          </a:fillRef>
+          <a:effectRef idx="1">
+            <a:schemeClr val="accent1"/>
+          </a:effectRef>
+          <a:fontRef idx="minor">
+            <a:schemeClr val="tx1"/>
+          </a:fontRef>
+        </p:style>
+      </p:cxnSp>
+      <p:sp>
+        <p:nvSpPr>
+          <p:cNvPr id="12" name="TextBox 11"/>
+          <p:cNvSpPr txBox="1"/>
+          <p:nvPr/>
+        </p:nvSpPr>
+        <p:spPr>
+          <a:xfrm>
+            <a:off x="2633472" y="2670048"/>
+            <a:ext cx="274320" cy="274320"/>
+          </a:xfrm>
+          <a:prstGeom prst="rect">
+            <a:avLst/>
+          </a:prstGeom>
+          <a:noFill/>
+        </p:spPr>
+        <p:txBody>
+          <a:bodyPr wrap="square" anchor="t">
+            <a:spAutoFit/>
+          </a:bodyPr>
+          <a:lstStyle/>
+          <a:p>
             <a:pPr algn="l">
               <a:lnSpc>
-                <a:spcPct val="115000"/>
+                <a:spcPct val="105000"/>
               </a:lnSpc>
             </a:pPr>
             <a:r>
-              <a:rPr sz="1500" b="1" i="0">
-                <a:solidFill>
-                  <a:srgbClr val="2C3E50"/>
+              <a:rPr sz="1400" b="1" i="0">
+                <a:solidFill>
+                  <a:srgbClr val="27865A"/>
                 </a:solidFill>
                 <a:latin typeface="Arial"/>
               </a:rPr>
-              <a:t>• The grasp fixes  T(hand→cup): </a:t>
-            </a:r>
-            <a:r>
-              <a:rPr sz="1500" b="0" i="0">
-                <a:solidFill>
-                  <a:srgbClr val="2C3E50"/>
+              <a:t>r</a:t>
+            </a:r>
+          </a:p>
+        </p:txBody>
+      </p:sp>
+      <p:cxnSp>
+        <p:nvCxnSpPr>
+          <p:cNvPr id="13" name="Connector 12"/>
+          <p:cNvCxnSpPr/>
+          <p:nvPr/>
+        </p:nvCxnSpPr>
+        <p:spPr>
+          <a:xfrm>
+            <a:off x="3429000" y="2240280"/>
+            <a:ext cx="868680" cy="0"/>
+          </a:xfrm>
+          <a:prstGeom prst="line">
+            <a:avLst/>
+          </a:prstGeom>
+          <a:ln w="33020">
+            <a:solidFill>
+              <a:srgbClr val="C0392B"/>
+            </a:solidFill>
+            <a:tailEnd type="triangle" w="med" len="med"/>
+          </a:ln>
+        </p:spPr>
+        <p:style>
+          <a:lnRef idx="2">
+            <a:schemeClr val="accent1"/>
+          </a:lnRef>
+          <a:fillRef idx="0">
+            <a:schemeClr val="accent1"/>
+          </a:fillRef>
+          <a:effectRef idx="1">
+            <a:schemeClr val="accent1"/>
+          </a:effectRef>
+          <a:fontRef idx="minor">
+            <a:schemeClr val="tx1"/>
+          </a:fontRef>
+        </p:style>
+      </p:cxnSp>
+      <p:sp>
+        <p:nvSpPr>
+          <p:cNvPr id="14" name="TextBox 13"/>
+          <p:cNvSpPr txBox="1"/>
+          <p:nvPr/>
+        </p:nvSpPr>
+        <p:spPr>
+          <a:xfrm>
+            <a:off x="4315968" y="2084831"/>
+            <a:ext cx="822960" cy="274320"/>
+          </a:xfrm>
+          <a:prstGeom prst="rect">
+            <a:avLst/>
+          </a:prstGeom>
+          <a:noFill/>
+        </p:spPr>
+        <p:txBody>
+          <a:bodyPr wrap="square" anchor="t">
+            <a:spAutoFit/>
+          </a:bodyPr>
+          <a:lstStyle/>
+          <a:p>
+            <a:pPr algn="l">
+              <a:lnSpc>
+                <a:spcPct val="105000"/>
+              </a:lnSpc>
+            </a:pPr>
+            <a:r>
+              <a:rPr sz="1100" b="0" i="0">
+                <a:solidFill>
+                  <a:srgbClr val="C0392B"/>
                 </a:solidFill>
                 <a:latin typeface="Arial"/>
               </a:rPr>
-              <a:t>the cup's offset r and orientation relative to the wrist.</a:t>
-            </a:r>
-          </a:p>
+              <a:t>a_cup</a:t>
+            </a:r>
+          </a:p>
+        </p:txBody>
+      </p:sp>
+      <p:cxnSp>
+        <p:nvCxnSpPr>
+          <p:cNvPr id="15" name="Connector 14"/>
+          <p:cNvCxnSpPr/>
+          <p:nvPr/>
+        </p:nvCxnSpPr>
+        <p:spPr>
+          <a:xfrm>
+            <a:off x="1717341" y="3115164"/>
+            <a:ext cx="75983" cy="97254"/>
+          </a:xfrm>
+          <a:prstGeom prst="line">
+            <a:avLst/>
+          </a:prstGeom>
+          <a:ln w="25400">
+            <a:solidFill>
+              <a:srgbClr val="2C6FBB"/>
+            </a:solidFill>
+          </a:ln>
+        </p:spPr>
+        <p:style>
+          <a:lnRef idx="2">
+            <a:schemeClr val="accent1"/>
+          </a:lnRef>
+          <a:fillRef idx="0">
+            <a:schemeClr val="accent1"/>
+          </a:fillRef>
+          <a:effectRef idx="1">
+            <a:schemeClr val="accent1"/>
+          </a:effectRef>
+          <a:fontRef idx="minor">
+            <a:schemeClr val="tx1"/>
+          </a:fontRef>
+        </p:style>
+      </p:cxnSp>
+      <p:cxnSp>
+        <p:nvCxnSpPr>
+          <p:cNvPr id="16" name="Connector 15"/>
+          <p:cNvCxnSpPr/>
+          <p:nvPr/>
+        </p:nvCxnSpPr>
+        <p:spPr>
+          <a:xfrm>
+            <a:off x="1793324" y="3212418"/>
+            <a:ext cx="110927" cy="54103"/>
+          </a:xfrm>
+          <a:prstGeom prst="line">
+            <a:avLst/>
+          </a:prstGeom>
+          <a:ln w="25400">
+            <a:solidFill>
+              <a:srgbClr val="2C6FBB"/>
+            </a:solidFill>
+          </a:ln>
+        </p:spPr>
+        <p:style>
+          <a:lnRef idx="2">
+            <a:schemeClr val="accent1"/>
+          </a:lnRef>
+          <a:fillRef idx="0">
+            <a:schemeClr val="accent1"/>
+          </a:fillRef>
+          <a:effectRef idx="1">
+            <a:schemeClr val="accent1"/>
+          </a:effectRef>
+          <a:fontRef idx="minor">
+            <a:schemeClr val="tx1"/>
+          </a:fontRef>
+        </p:style>
+      </p:cxnSp>
+      <p:cxnSp>
+        <p:nvCxnSpPr>
+          <p:cNvPr id="17" name="Connector 16"/>
+          <p:cNvCxnSpPr/>
+          <p:nvPr/>
+        </p:nvCxnSpPr>
+        <p:spPr>
+          <a:xfrm>
+            <a:off x="1904251" y="3266521"/>
+            <a:ext cx="123417" cy="0"/>
+          </a:xfrm>
+          <a:prstGeom prst="line">
+            <a:avLst/>
+          </a:prstGeom>
+          <a:ln w="25400">
+            <a:solidFill>
+              <a:srgbClr val="2C6FBB"/>
+            </a:solidFill>
+          </a:ln>
+        </p:spPr>
+        <p:style>
+          <a:lnRef idx="2">
+            <a:schemeClr val="accent1"/>
+          </a:lnRef>
+          <a:fillRef idx="0">
+            <a:schemeClr val="accent1"/>
+          </a:fillRef>
+          <a:effectRef idx="1">
+            <a:schemeClr val="accent1"/>
+          </a:effectRef>
+          <a:fontRef idx="minor">
+            <a:schemeClr val="tx1"/>
+          </a:fontRef>
+        </p:style>
+      </p:cxnSp>
+      <p:cxnSp>
+        <p:nvCxnSpPr>
+          <p:cNvPr id="18" name="Connector 17"/>
+          <p:cNvCxnSpPr/>
+          <p:nvPr/>
+        </p:nvCxnSpPr>
+        <p:spPr>
+          <a:xfrm flipV="1">
+            <a:off x="2027668" y="3212418"/>
+            <a:ext cx="110927" cy="54103"/>
+          </a:xfrm>
+          <a:prstGeom prst="line">
+            <a:avLst/>
+          </a:prstGeom>
+          <a:ln w="25400">
+            <a:solidFill>
+              <a:srgbClr val="2C6FBB"/>
+            </a:solidFill>
+          </a:ln>
+        </p:spPr>
+        <p:style>
+          <a:lnRef idx="2">
+            <a:schemeClr val="accent1"/>
+          </a:lnRef>
+          <a:fillRef idx="0">
+            <a:schemeClr val="accent1"/>
+          </a:fillRef>
+          <a:effectRef idx="1">
+            <a:schemeClr val="accent1"/>
+          </a:effectRef>
+          <a:fontRef idx="minor">
+            <a:schemeClr val="tx1"/>
+          </a:fontRef>
+        </p:style>
+      </p:cxnSp>
+      <p:cxnSp>
+        <p:nvCxnSpPr>
+          <p:cNvPr id="19" name="Connector 18"/>
+          <p:cNvCxnSpPr/>
+          <p:nvPr/>
+        </p:nvCxnSpPr>
+        <p:spPr>
+          <a:xfrm flipV="1">
+            <a:off x="2138595" y="3115164"/>
+            <a:ext cx="75983" cy="97254"/>
+          </a:xfrm>
+          <a:prstGeom prst="line">
+            <a:avLst/>
+          </a:prstGeom>
+          <a:ln w="25400">
+            <a:solidFill>
+              <a:srgbClr val="2C6FBB"/>
+            </a:solidFill>
+            <a:tailEnd type="triangle"/>
+          </a:ln>
+        </p:spPr>
+        <p:style>
+          <a:lnRef idx="2">
+            <a:schemeClr val="accent1"/>
+          </a:lnRef>
+          <a:fillRef idx="0">
+            <a:schemeClr val="accent1"/>
+          </a:fillRef>
+          <a:effectRef idx="1">
+            <a:schemeClr val="accent1"/>
+          </a:effectRef>
+          <a:fontRef idx="minor">
+            <a:schemeClr val="tx1"/>
+          </a:fontRef>
+        </p:style>
+      </p:cxnSp>
+      <p:sp>
+        <p:nvSpPr>
+          <p:cNvPr id="20" name="TextBox 19"/>
+          <p:cNvSpPr txBox="1"/>
+          <p:nvPr/>
+        </p:nvSpPr>
+        <p:spPr>
+          <a:xfrm>
+            <a:off x="868680" y="2578608"/>
+            <a:ext cx="1005840" cy="274320"/>
+          </a:xfrm>
+          <a:prstGeom prst="rect">
+            <a:avLst/>
+          </a:prstGeom>
+          <a:noFill/>
+        </p:spPr>
+        <p:txBody>
+          <a:bodyPr wrap="square" anchor="t">
+            <a:spAutoFit/>
+          </a:bodyPr>
+          <a:lstStyle/>
+          <a:p>
+            <a:pPr algn="r">
+              <a:lnSpc>
+                <a:spcPct val="105000"/>
+              </a:lnSpc>
+            </a:pPr>
+            <a:r>
+              <a:rPr sz="1000" b="0" i="0">
+                <a:solidFill>
+                  <a:srgbClr val="2C6FBB"/>
+                </a:solidFill>
+                <a:latin typeface="Arial"/>
+              </a:rPr>
+              <a:t>α (same)</a:t>
+            </a:r>
+          </a:p>
+        </p:txBody>
+      </p:sp>
+      <p:sp>
+        <p:nvSpPr>
+          <p:cNvPr id="21" name="TextBox 20"/>
+          <p:cNvSpPr txBox="1"/>
+          <p:nvPr/>
+        </p:nvSpPr>
+        <p:spPr>
+          <a:xfrm>
+            <a:off x="6766560" y="1463040"/>
+            <a:ext cx="3291840" cy="365760"/>
+          </a:xfrm>
+          <a:prstGeom prst="rect">
+            <a:avLst/>
+          </a:prstGeom>
+          <a:noFill/>
+        </p:spPr>
+        <p:txBody>
+          <a:bodyPr wrap="square" anchor="t">
+            <a:spAutoFit/>
+          </a:bodyPr>
+          <a:lstStyle/>
+          <a:p>
+            <a:pPr algn="ctr">
+              <a:lnSpc>
+                <a:spcPct val="105000"/>
+              </a:lnSpc>
+            </a:pPr>
+            <a:r>
+              <a:rPr sz="1250" b="1" i="0">
+                <a:solidFill>
+                  <a:srgbClr val="C0392B"/>
+                </a:solidFill>
+                <a:latin typeface="Arial"/>
+              </a:rPr>
+              <a:t>body grip  —  small offset r</a:t>
+            </a:r>
+          </a:p>
+        </p:txBody>
+      </p:sp>
+      <p:sp>
+        <p:nvSpPr>
+          <p:cNvPr id="22" name="Rectangle 21"/>
+          <p:cNvSpPr/>
+          <p:nvPr/>
+        </p:nvSpPr>
+        <p:spPr>
+          <a:xfrm>
+            <a:off x="7699248" y="3246120"/>
+            <a:ext cx="512064" cy="128016"/>
+          </a:xfrm>
+          <a:prstGeom prst="rect">
+            <a:avLst/>
+          </a:prstGeom>
+          <a:solidFill>
+            <a:srgbClr val="2C3E50"/>
+          </a:solidFill>
+          <a:ln>
+            <a:noFill/>
+          </a:ln>
+          <a:effectLst/>
+        </p:spPr>
+        <p:style>
+          <a:lnRef idx="1">
+            <a:schemeClr val="accent1"/>
+          </a:lnRef>
+          <a:fillRef idx="3">
+            <a:schemeClr val="accent1"/>
+          </a:fillRef>
+          <a:effectRef idx="2">
+            <a:schemeClr val="accent1"/>
+          </a:effectRef>
+          <a:fontRef idx="minor">
+            <a:schemeClr val="lt1"/>
+          </a:fontRef>
+        </p:style>
+        <p:txBody>
+          <a:bodyPr rtlCol="0" anchor="ctr"/>
+          <a:lstStyle/>
+          <a:p>
+            <a:pPr algn="ctr"/>
+          </a:p>
+        </p:txBody>
+      </p:sp>
+      <p:sp>
+        <p:nvSpPr>
+          <p:cNvPr id="23" name="Rectangle 22"/>
+          <p:cNvSpPr/>
+          <p:nvPr/>
+        </p:nvSpPr>
+        <p:spPr>
+          <a:xfrm>
+            <a:off x="7699248" y="2953512"/>
+            <a:ext cx="118872" cy="310896"/>
+          </a:xfrm>
+          <a:prstGeom prst="rect">
+            <a:avLst/>
+          </a:prstGeom>
+          <a:solidFill>
+            <a:srgbClr val="2C3E50"/>
+          </a:solidFill>
+          <a:ln>
+            <a:noFill/>
+          </a:ln>
+          <a:effectLst/>
+        </p:spPr>
+        <p:style>
+          <a:lnRef idx="1">
+            <a:schemeClr val="accent1"/>
+          </a:lnRef>
+          <a:fillRef idx="3">
+            <a:schemeClr val="accent1"/>
+          </a:fillRef>
+          <a:effectRef idx="2">
+            <a:schemeClr val="accent1"/>
+          </a:effectRef>
+          <a:fontRef idx="minor">
+            <a:schemeClr val="lt1"/>
+          </a:fontRef>
+        </p:style>
+        <p:txBody>
+          <a:bodyPr rtlCol="0" anchor="ctr"/>
+          <a:lstStyle/>
+          <a:p>
+            <a:pPr algn="ctr"/>
+          </a:p>
+        </p:txBody>
+      </p:sp>
+      <p:sp>
+        <p:nvSpPr>
+          <p:cNvPr id="24" name="Rectangle 23"/>
+          <p:cNvSpPr/>
+          <p:nvPr/>
+        </p:nvSpPr>
+        <p:spPr>
+          <a:xfrm>
+            <a:off x="8092440" y="2953512"/>
+            <a:ext cx="118872" cy="310896"/>
+          </a:xfrm>
+          <a:prstGeom prst="rect">
+            <a:avLst/>
+          </a:prstGeom>
+          <a:solidFill>
+            <a:srgbClr val="2C3E50"/>
+          </a:solidFill>
+          <a:ln>
+            <a:noFill/>
+          </a:ln>
+          <a:effectLst/>
+        </p:spPr>
+        <p:style>
+          <a:lnRef idx="1">
+            <a:schemeClr val="accent1"/>
+          </a:lnRef>
+          <a:fillRef idx="3">
+            <a:schemeClr val="accent1"/>
+          </a:fillRef>
+          <a:effectRef idx="2">
+            <a:schemeClr val="accent1"/>
+          </a:effectRef>
+          <a:fontRef idx="minor">
+            <a:schemeClr val="lt1"/>
+          </a:fontRef>
+        </p:style>
+        <p:txBody>
+          <a:bodyPr rtlCol="0" anchor="ctr"/>
+          <a:lstStyle/>
+          <a:p>
+            <a:pPr algn="ctr"/>
+          </a:p>
+        </p:txBody>
+      </p:sp>
+      <p:sp>
+        <p:nvSpPr>
+          <p:cNvPr id="25" name="TextBox 24"/>
+          <p:cNvSpPr txBox="1"/>
+          <p:nvPr/>
+        </p:nvSpPr>
+        <p:spPr>
+          <a:xfrm>
+            <a:off x="7360920" y="3401568"/>
+            <a:ext cx="1188720" cy="274320"/>
+          </a:xfrm>
+          <a:prstGeom prst="rect">
+            <a:avLst/>
+          </a:prstGeom>
+          <a:noFill/>
+        </p:spPr>
+        <p:txBody>
+          <a:bodyPr wrap="square" anchor="t">
+            <a:spAutoFit/>
+          </a:bodyPr>
+          <a:lstStyle/>
+          <a:p>
+            <a:pPr algn="ctr">
+              <a:lnSpc>
+                <a:spcPct val="105000"/>
+              </a:lnSpc>
+            </a:pPr>
+            <a:r>
+              <a:rPr sz="950" b="0" i="0">
+                <a:solidFill>
+                  <a:srgbClr val="2C3E50"/>
+                </a:solidFill>
+                <a:latin typeface="Arial"/>
+              </a:rPr>
+              <a:t>EE / wrist</a:t>
+            </a:r>
+          </a:p>
+        </p:txBody>
+      </p:sp>
+      <p:sp>
+        <p:nvSpPr>
+          <p:cNvPr id="26" name="Trapezoid 25"/>
+          <p:cNvSpPr/>
+          <p:nvPr/>
+        </p:nvSpPr>
+        <p:spPr>
+          <a:xfrm rot="10800000">
+            <a:off x="7872984" y="2148840"/>
+            <a:ext cx="676656" cy="822960"/>
+          </a:xfrm>
+          <a:prstGeom prst="trapezoid">
+            <a:avLst/>
+          </a:prstGeom>
+          <a:solidFill>
+            <a:srgbClr val="EEF2F7"/>
+          </a:solidFill>
+          <a:ln w="22225">
+            <a:solidFill>
+              <a:srgbClr val="C0392B"/>
+            </a:solidFill>
+          </a:ln>
+          <a:effectLst/>
+        </p:spPr>
+        <p:style>
+          <a:lnRef idx="1">
+            <a:schemeClr val="accent1"/>
+          </a:lnRef>
+          <a:fillRef idx="3">
+            <a:schemeClr val="accent1"/>
+          </a:fillRef>
+          <a:effectRef idx="2">
+            <a:schemeClr val="accent1"/>
+          </a:effectRef>
+          <a:fontRef idx="minor">
+            <a:schemeClr val="lt1"/>
+          </a:fontRef>
+        </p:style>
+        <p:txBody>
+          <a:bodyPr rtlCol="0" anchor="ctr"/>
+          <a:lstStyle/>
+          <a:p>
+            <a:pPr algn="ctr"/>
+          </a:p>
+        </p:txBody>
+      </p:sp>
+      <p:cxnSp>
+        <p:nvCxnSpPr>
+          <p:cNvPr id="27" name="Connector 26"/>
+          <p:cNvCxnSpPr/>
+          <p:nvPr/>
+        </p:nvCxnSpPr>
+        <p:spPr>
+          <a:xfrm flipV="1">
+            <a:off x="8046720" y="2971800"/>
+            <a:ext cx="164592" cy="228600"/>
+          </a:xfrm>
+          <a:prstGeom prst="line">
+            <a:avLst/>
+          </a:prstGeom>
+          <a:ln w="25400">
+            <a:solidFill>
+              <a:srgbClr val="C0392B"/>
+            </a:solidFill>
+            <a:prstDash val="dash"/>
+            <a:tailEnd type="triangle" w="med" len="med"/>
+          </a:ln>
+        </p:spPr>
+        <p:style>
+          <a:lnRef idx="2">
+            <a:schemeClr val="accent1"/>
+          </a:lnRef>
+          <a:fillRef idx="0">
+            <a:schemeClr val="accent1"/>
+          </a:fillRef>
+          <a:effectRef idx="1">
+            <a:schemeClr val="accent1"/>
+          </a:effectRef>
+          <a:fontRef idx="minor">
+            <a:schemeClr val="tx1"/>
+          </a:fontRef>
+        </p:style>
+      </p:cxnSp>
+      <p:sp>
+        <p:nvSpPr>
+          <p:cNvPr id="28" name="TextBox 27"/>
+          <p:cNvSpPr txBox="1"/>
+          <p:nvPr/>
+        </p:nvSpPr>
+        <p:spPr>
+          <a:xfrm>
+            <a:off x="7754112" y="2743200"/>
+            <a:ext cx="274320" cy="274320"/>
+          </a:xfrm>
+          <a:prstGeom prst="rect">
+            <a:avLst/>
+          </a:prstGeom>
+          <a:noFill/>
+        </p:spPr>
+        <p:txBody>
+          <a:bodyPr wrap="square" anchor="t">
+            <a:spAutoFit/>
+          </a:bodyPr>
+          <a:lstStyle/>
           <a:p>
             <a:pPr algn="l">
               <a:lnSpc>
-                <a:spcPct val="115000"/>
+                <a:spcPct val="105000"/>
               </a:lnSpc>
             </a:pPr>
             <a:r>
-              <a:rPr sz="1500" b="0" i="0">
-                <a:solidFill>
-                  <a:srgbClr val="2C3E50"/>
+              <a:rPr sz="1300" b="1" i="0">
+                <a:solidFill>
+                  <a:srgbClr val="C0392B"/>
                 </a:solidFill>
                 <a:latin typeface="Arial"/>
               </a:rPr>
-              <a:t>• Same arm motion → different cup acceleration  a_cup  (lever effect) → different spill margin.</a:t>
-            </a:r>
-          </a:p>
+              <a:t>r</a:t>
+            </a:r>
+          </a:p>
+        </p:txBody>
+      </p:sp>
+      <p:cxnSp>
+        <p:nvCxnSpPr>
+          <p:cNvPr id="29" name="Connector 28"/>
+          <p:cNvCxnSpPr/>
+          <p:nvPr/>
+        </p:nvCxnSpPr>
+        <p:spPr>
+          <a:xfrm>
+            <a:off x="8211312" y="2578608"/>
+            <a:ext cx="475488" cy="0"/>
+          </a:xfrm>
+          <a:prstGeom prst="line">
+            <a:avLst/>
+          </a:prstGeom>
+          <a:ln w="33020">
+            <a:solidFill>
+              <a:srgbClr val="C0392B"/>
+            </a:solidFill>
+            <a:tailEnd type="triangle" w="med" len="med"/>
+          </a:ln>
+        </p:spPr>
+        <p:style>
+          <a:lnRef idx="2">
+            <a:schemeClr val="accent1"/>
+          </a:lnRef>
+          <a:fillRef idx="0">
+            <a:schemeClr val="accent1"/>
+          </a:fillRef>
+          <a:effectRef idx="1">
+            <a:schemeClr val="accent1"/>
+          </a:effectRef>
+          <a:fontRef idx="minor">
+            <a:schemeClr val="tx1"/>
+          </a:fontRef>
+        </p:style>
+      </p:cxnSp>
+      <p:sp>
+        <p:nvSpPr>
+          <p:cNvPr id="30" name="TextBox 29"/>
+          <p:cNvSpPr txBox="1"/>
+          <p:nvPr/>
+        </p:nvSpPr>
+        <p:spPr>
+          <a:xfrm>
+            <a:off x="8705088" y="2423160"/>
+            <a:ext cx="822960" cy="274320"/>
+          </a:xfrm>
+          <a:prstGeom prst="rect">
+            <a:avLst/>
+          </a:prstGeom>
+          <a:noFill/>
+        </p:spPr>
+        <p:txBody>
+          <a:bodyPr wrap="square" anchor="t">
+            <a:spAutoFit/>
+          </a:bodyPr>
+          <a:lstStyle/>
           <a:p>
             <a:pPr algn="l">
               <a:lnSpc>
-                <a:spcPct val="115000"/>
+                <a:spcPct val="105000"/>
               </a:lnSpc>
             </a:pPr>
             <a:r>
-              <a:rPr sz="1500" b="0" i="0">
-                <a:solidFill>
-                  <a:srgbClr val="2C3E50"/>
+              <a:rPr sz="1100" b="0" i="0">
+                <a:solidFill>
+                  <a:srgbClr val="C0392B"/>
                 </a:solidFill>
                 <a:latin typeface="Arial"/>
               </a:rPr>
-              <a:t>• Plus arm reachability: some grasps keep the cup upright easily, others don't.</a:t>
-            </a:r>
-          </a:p>
+              <a:t>a_cup</a:t>
+            </a:r>
+          </a:p>
+        </p:txBody>
+      </p:sp>
+      <p:cxnSp>
+        <p:nvCxnSpPr>
+          <p:cNvPr id="31" name="Connector 30"/>
+          <p:cNvCxnSpPr/>
+          <p:nvPr/>
+        </p:nvCxnSpPr>
+        <p:spPr>
+          <a:xfrm>
+            <a:off x="7706661" y="3115164"/>
+            <a:ext cx="75983" cy="97254"/>
+          </a:xfrm>
+          <a:prstGeom prst="line">
+            <a:avLst/>
+          </a:prstGeom>
+          <a:ln w="25400">
+            <a:solidFill>
+              <a:srgbClr val="2C6FBB"/>
+            </a:solidFill>
+          </a:ln>
+        </p:spPr>
+        <p:style>
+          <a:lnRef idx="2">
+            <a:schemeClr val="accent1"/>
+          </a:lnRef>
+          <a:fillRef idx="0">
+            <a:schemeClr val="accent1"/>
+          </a:fillRef>
+          <a:effectRef idx="1">
+            <a:schemeClr val="accent1"/>
+          </a:effectRef>
+          <a:fontRef idx="minor">
+            <a:schemeClr val="tx1"/>
+          </a:fontRef>
+        </p:style>
+      </p:cxnSp>
+      <p:cxnSp>
+        <p:nvCxnSpPr>
+          <p:cNvPr id="32" name="Connector 31"/>
+          <p:cNvCxnSpPr/>
+          <p:nvPr/>
+        </p:nvCxnSpPr>
+        <p:spPr>
+          <a:xfrm>
+            <a:off x="7782644" y="3212418"/>
+            <a:ext cx="110927" cy="54103"/>
+          </a:xfrm>
+          <a:prstGeom prst="line">
+            <a:avLst/>
+          </a:prstGeom>
+          <a:ln w="25400">
+            <a:solidFill>
+              <a:srgbClr val="2C6FBB"/>
+            </a:solidFill>
+          </a:ln>
+        </p:spPr>
+        <p:style>
+          <a:lnRef idx="2">
+            <a:schemeClr val="accent1"/>
+          </a:lnRef>
+          <a:fillRef idx="0">
+            <a:schemeClr val="accent1"/>
+          </a:fillRef>
+          <a:effectRef idx="1">
+            <a:schemeClr val="accent1"/>
+          </a:effectRef>
+          <a:fontRef idx="minor">
+            <a:schemeClr val="tx1"/>
+          </a:fontRef>
+        </p:style>
+      </p:cxnSp>
+      <p:cxnSp>
+        <p:nvCxnSpPr>
+          <p:cNvPr id="33" name="Connector 32"/>
+          <p:cNvCxnSpPr/>
+          <p:nvPr/>
+        </p:nvCxnSpPr>
+        <p:spPr>
+          <a:xfrm>
+            <a:off x="7893571" y="3266521"/>
+            <a:ext cx="123417" cy="0"/>
+          </a:xfrm>
+          <a:prstGeom prst="line">
+            <a:avLst/>
+          </a:prstGeom>
+          <a:ln w="25400">
+            <a:solidFill>
+              <a:srgbClr val="2C6FBB"/>
+            </a:solidFill>
+          </a:ln>
+        </p:spPr>
+        <p:style>
+          <a:lnRef idx="2">
+            <a:schemeClr val="accent1"/>
+          </a:lnRef>
+          <a:fillRef idx="0">
+            <a:schemeClr val="accent1"/>
+          </a:fillRef>
+          <a:effectRef idx="1">
+            <a:schemeClr val="accent1"/>
+          </a:effectRef>
+          <a:fontRef idx="minor">
+            <a:schemeClr val="tx1"/>
+          </a:fontRef>
+        </p:style>
+      </p:cxnSp>
+      <p:cxnSp>
+        <p:nvCxnSpPr>
+          <p:cNvPr id="34" name="Connector 33"/>
+          <p:cNvCxnSpPr/>
+          <p:nvPr/>
+        </p:nvCxnSpPr>
+        <p:spPr>
+          <a:xfrm flipV="1">
+            <a:off x="8016988" y="3212418"/>
+            <a:ext cx="110927" cy="54103"/>
+          </a:xfrm>
+          <a:prstGeom prst="line">
+            <a:avLst/>
+          </a:prstGeom>
+          <a:ln w="25400">
+            <a:solidFill>
+              <a:srgbClr val="2C6FBB"/>
+            </a:solidFill>
+          </a:ln>
+        </p:spPr>
+        <p:style>
+          <a:lnRef idx="2">
+            <a:schemeClr val="accent1"/>
+          </a:lnRef>
+          <a:fillRef idx="0">
+            <a:schemeClr val="accent1"/>
+          </a:fillRef>
+          <a:effectRef idx="1">
+            <a:schemeClr val="accent1"/>
+          </a:effectRef>
+          <a:fontRef idx="minor">
+            <a:schemeClr val="tx1"/>
+          </a:fontRef>
+        </p:style>
+      </p:cxnSp>
+      <p:cxnSp>
+        <p:nvCxnSpPr>
+          <p:cNvPr id="35" name="Connector 34"/>
+          <p:cNvCxnSpPr/>
+          <p:nvPr/>
+        </p:nvCxnSpPr>
+        <p:spPr>
+          <a:xfrm flipV="1">
+            <a:off x="8127915" y="3115164"/>
+            <a:ext cx="75983" cy="97254"/>
+          </a:xfrm>
+          <a:prstGeom prst="line">
+            <a:avLst/>
+          </a:prstGeom>
+          <a:ln w="25400">
+            <a:solidFill>
+              <a:srgbClr val="2C6FBB"/>
+            </a:solidFill>
+            <a:tailEnd type="triangle"/>
+          </a:ln>
+        </p:spPr>
+        <p:style>
+          <a:lnRef idx="2">
+            <a:schemeClr val="accent1"/>
+          </a:lnRef>
+          <a:fillRef idx="0">
+            <a:schemeClr val="accent1"/>
+          </a:fillRef>
+          <a:effectRef idx="1">
+            <a:schemeClr val="accent1"/>
+          </a:effectRef>
+          <a:fontRef idx="minor">
+            <a:schemeClr val="tx1"/>
+          </a:fontRef>
+        </p:style>
+      </p:cxnSp>
+      <p:sp>
+        <p:nvSpPr>
+          <p:cNvPr id="36" name="TextBox 35"/>
+          <p:cNvSpPr txBox="1"/>
+          <p:nvPr/>
+        </p:nvSpPr>
+        <p:spPr>
+          <a:xfrm>
+            <a:off x="6858000" y="2578608"/>
+            <a:ext cx="1005840" cy="274320"/>
+          </a:xfrm>
+          <a:prstGeom prst="rect">
+            <a:avLst/>
+          </a:prstGeom>
+          <a:noFill/>
+        </p:spPr>
+        <p:txBody>
+          <a:bodyPr wrap="square" anchor="t">
+            <a:spAutoFit/>
+          </a:bodyPr>
+          <a:lstStyle/>
+          <a:p>
+            <a:pPr algn="r">
+              <a:lnSpc>
+                <a:spcPct val="105000"/>
+              </a:lnSpc>
+            </a:pPr>
+            <a:r>
+              <a:rPr sz="1000" b="0" i="0">
+                <a:solidFill>
+                  <a:srgbClr val="2C6FBB"/>
+                </a:solidFill>
+                <a:latin typeface="Arial"/>
+              </a:rPr>
+              <a:t>α (same)</a:t>
+            </a:r>
+          </a:p>
+        </p:txBody>
+      </p:sp>
+      <p:sp>
+        <p:nvSpPr>
+          <p:cNvPr id="37" name="TextBox 36"/>
+          <p:cNvSpPr txBox="1"/>
+          <p:nvPr/>
+        </p:nvSpPr>
+        <p:spPr>
+          <a:xfrm>
+            <a:off x="640080" y="3703320"/>
+            <a:ext cx="10972800" cy="411480"/>
+          </a:xfrm>
+          <a:prstGeom prst="rect">
+            <a:avLst/>
+          </a:prstGeom>
+          <a:noFill/>
+        </p:spPr>
+        <p:txBody>
+          <a:bodyPr wrap="square" anchor="t">
+            <a:spAutoFit/>
+          </a:bodyPr>
+          <a:lstStyle/>
+          <a:p>
+            <a:pPr algn="ctr">
+              <a:lnSpc>
+                <a:spcPct val="105000"/>
+              </a:lnSpc>
+            </a:pPr>
+            <a:r>
+              <a:rPr sz="1500" b="1" i="0">
+                <a:solidFill>
+                  <a:srgbClr val="1A365D"/>
+                </a:solidFill>
+                <a:latin typeface="Arial"/>
+              </a:rPr>
+              <a:t>a = a_ee + α×r + ω×(ω×r)</a:t>
+            </a:r>
+            <a:r>
+              <a:rPr sz="1200" b="0" i="0">
+                <a:solidFill>
+                  <a:srgbClr val="2C3E50"/>
+                </a:solidFill>
+                <a:latin typeface="Arial"/>
+              </a:rPr>
+              <a:t>      same arm motion, different offset r → different acceleration at the liquid</a:t>
+            </a:r>
+          </a:p>
+        </p:txBody>
+      </p:sp>
+      <p:sp>
+        <p:nvSpPr>
+          <p:cNvPr id="38" name="TextBox 37"/>
+          <p:cNvSpPr txBox="1"/>
+          <p:nvPr/>
+        </p:nvSpPr>
+        <p:spPr>
+          <a:xfrm>
+            <a:off x="640080" y="4270248"/>
+            <a:ext cx="11064240" cy="1463040"/>
+          </a:xfrm>
+          <a:prstGeom prst="rect">
+            <a:avLst/>
+          </a:prstGeom>
+          <a:noFill/>
+        </p:spPr>
+        <p:txBody>
+          <a:bodyPr wrap="square" anchor="t">
+            <a:spAutoFit/>
+          </a:bodyPr>
+          <a:lstStyle/>
           <a:p>
             <a:pPr algn="l">
               <a:lnSpc>
-                <a:spcPct val="115000"/>
+                <a:spcPct val="125000"/>
               </a:lnSpc>
             </a:pPr>
             <a:r>
-              <a:rPr sz="1500" b="0" i="0">
-                <a:solidFill>
-                  <a:srgbClr val="2C3E50"/>
+              <a:rPr sz="1650" b="1" i="0">
+                <a:solidFill>
+                  <a:srgbClr val="1A365D"/>
                 </a:solidFill>
                 <a:latin typeface="Arial"/>
               </a:rPr>
-              <a:t>• The two effects can conflict → </a:t>
-            </a:r>
-            <a:r>
-              <a:rPr sz="1500" b="1" i="0">
-                <a:solidFill>
-                  <a:srgbClr val="A93226"/>
+              <a:t>•  Grasp reshapes the margin</a:t>
+            </a:r>
+            <a:r>
+              <a:rPr sz="1650" b="0" i="0">
+                <a:solidFill>
+                  <a:srgbClr val="2C3E50"/>
                 </a:solidFill>
                 <a:latin typeface="Arial"/>
               </a:rPr>
-              <a:t>which grasp is safest is measured, not assumed</a:t>
-            </a:r>
-            <a:r>
-              <a:rPr sz="1500" b="0" i="0">
+              <a:t> — it sets the cup's offset r (lever effect on  a_cup) and how easily the arm keeps the cup upright (reachability).</a:t>
+            </a:r>
+          </a:p>
+          <a:p>
+            <a:pPr algn="l">
+              <a:lnSpc>
+                <a:spcPct val="125000"/>
+              </a:lnSpc>
+            </a:pPr>
+            <a:r>
+              <a:rPr sz="1650" b="0" i="0">
                 <a:solidFill>
                   <a:srgbClr val="2C3E50"/>
                 </a:solidFill>
                 <a:latin typeface="Arial"/>
               </a:rPr>
-              <a:t>  (see Method).</a:t>
-            </a:r>
-          </a:p>
-        </p:txBody>
-      </p:sp>
-      <p:sp>
-        <p:nvSpPr>
-          <p:cNvPr id="6" name="TextBox 5"/>
+              <a:t>•  So which grasp is safest is </a:t>
+            </a:r>
+            <a:r>
+              <a:rPr sz="1650" b="1" i="0">
+                <a:solidFill>
+                  <a:srgbClr val="A93226"/>
+                </a:solidFill>
+                <a:latin typeface="Arial"/>
+              </a:rPr>
+              <a:t>measured, not assumed</a:t>
+            </a:r>
+            <a:r>
+              <a:rPr sz="1650" b="0" i="0">
+                <a:solidFill>
+                  <a:srgbClr val="2C3E50"/>
+                </a:solidFill>
+                <a:latin typeface="Arial"/>
+              </a:rPr>
+              <a:t> — the planner scores each grasp  (→ next: Method).</a:t>
+            </a:r>
+          </a:p>
+        </p:txBody>
+      </p:sp>
+      <p:sp>
+        <p:nvSpPr>
+          <p:cNvPr id="39" name="TextBox 38"/>
           <p:cNvSpPr txBox="1"/>
           <p:nvPr/>
         </p:nvSpPr>
@@ -6096,7 +7375,7 @@
                           <a:latin typeface="Arial"/>
                         </a:rPr>
                         <a:t>Anti-slosh / spill-free planning
-(Muchacho '22, Gandhi '24)</a:t>
+(Muchacho '22, Abderezaei '24)</a:t>
                       </a:r>
                     </a:p>
                   </a:txBody>
@@ -6234,7 +7513,7 @@
                           <a:latin typeface="Arial"/>
                         </a:rPr>
                         <a:t>Affordance / task-oriented grasping
-("Grasping for a Purpose" '14, Dang '12)</a:t>
+(Dang &amp; Allen '12, Quispe &amp; Stilman '16)</a:t>
                       </a:r>
                     </a:p>
                   </a:txBody>
@@ -6450,7 +7729,7 @@
                 </a:solidFill>
                 <a:latin typeface="Arial"/>
               </a:rPr>
-              <a:t>Method — spill-aware CHOMP</a:t>
+              <a:t>Method — spill-aware CHOMP, run per grasp as an evaluator</a:t>
             </a:r>
           </a:p>
         </p:txBody>
@@ -6498,30 +7777,70 @@
           </a:p>
         </p:txBody>
       </p:sp>
-      <p:pic>
-        <p:nvPicPr>
-          <p:cNvPr id="4" name="Picture 3" descr="method_pipeline.png"/>
-          <p:cNvPicPr>
-            <a:picLocks noChangeAspect="1"/>
-          </p:cNvPicPr>
-          <p:nvPr/>
-        </p:nvPicPr>
-        <p:blipFill>
-          <a:blip r:embed="rId2"/>
-          <a:stretch>
-            <a:fillRect/>
-          </a:stretch>
-        </p:blipFill>
-        <p:spPr>
-          <a:xfrm>
-            <a:off x="766582" y="1417320"/>
-            <a:ext cx="10658530" cy="2743200"/>
+      <p:sp>
+        <p:nvSpPr>
+          <p:cNvPr id="4" name="TextBox 3"/>
+          <p:cNvSpPr txBox="1"/>
+          <p:nvPr/>
+        </p:nvSpPr>
+        <p:spPr>
+          <a:xfrm>
+            <a:off x="457200" y="1353312"/>
+            <a:ext cx="11247120" cy="822960"/>
           </a:xfrm>
           <a:prstGeom prst="rect">
             <a:avLst/>
           </a:prstGeom>
-        </p:spPr>
-      </p:pic>
+          <a:noFill/>
+        </p:spPr>
+        <p:txBody>
+          <a:bodyPr wrap="square" anchor="t">
+            <a:spAutoFit/>
+          </a:bodyPr>
+          <a:lstStyle/>
+          <a:p>
+            <a:pPr algn="ctr">
+              <a:lnSpc>
+                <a:spcPct val="115000"/>
+              </a:lnSpc>
+            </a:pPr>
+            <a:r>
+              <a:rPr sz="1600" b="1" i="0">
+                <a:solidFill>
+                  <a:srgbClr val="1A365D"/>
+                </a:solidFill>
+                <a:latin typeface="Arial"/>
+              </a:rPr>
+              <a:t>J(ξ) = J_smooth + J_obs + λₛ J_spill</a:t>
+            </a:r>
+            <a:r>
+              <a:rPr sz="1250" b="0" i="0">
+                <a:solidFill>
+                  <a:srgbClr val="2C3E50"/>
+                </a:solidFill>
+                <a:latin typeface="Arial"/>
+              </a:rPr>
+              <a:t>     (course CHOMP, Lec. 8  +  our spill term) ;     ξ ← ξ − η A⁻¹ ∇J</a:t>
+            </a:r>
+          </a:p>
+          <a:p>
+            <a:pPr algn="ctr">
+              <a:lnSpc>
+                <a:spcPct val="115000"/>
+              </a:lnSpc>
+            </a:pPr>
+            <a:r>
+              <a:rPr sz="1350" b="1" i="0">
+                <a:solidFill>
+                  <a:srgbClr val="A93226"/>
+                </a:solidFill>
+                <a:latin typeface="Arial"/>
+              </a:rPr>
+              <a:t>J_spill = Σₜ max( 0,  cos θmax − n·û )² ,    û = (a − g) / ‖a − g‖ ,    n = cup axis</a:t>
+            </a:r>
+          </a:p>
+        </p:txBody>
+      </p:sp>
       <p:sp>
         <p:nvSpPr>
           <p:cNvPr id="5" name="TextBox 4"/>
@@ -6530,8 +7849,8 @@
         </p:nvSpPr>
         <p:spPr>
           <a:xfrm>
-            <a:off x="640080" y="4343400"/>
-            <a:ext cx="10972800" cy="548640"/>
+            <a:off x="411480" y="2304288"/>
+            <a:ext cx="2743200" cy="548640"/>
           </a:xfrm>
           <a:prstGeom prst="rect">
             <a:avLst/>
@@ -6550,36 +7869,368 @@
               </a:lnSpc>
             </a:pPr>
             <a:r>
-              <a:rPr sz="2000" b="1" i="0">
-                <a:solidFill>
-                  <a:srgbClr val="1A365D"/>
+              <a:rPr sz="1200" b="1" i="0">
+                <a:solidFill>
+                  <a:srgbClr val="2C3E50"/>
                 </a:solidFill>
                 <a:latin typeface="Arial"/>
               </a:rPr>
-              <a:t>J(ξ) = J_smooth + J_obs + λₛ · J_spill</a:t>
-            </a:r>
-            <a:r>
-              <a:rPr sz="1800" b="0" i="0">
-                <a:solidFill>
-                  <a:srgbClr val="2C3E50"/>
+              <a:t>candidate grasps
+(taxonomy / region)</a:t>
+            </a:r>
+          </a:p>
+        </p:txBody>
+      </p:sp>
+      <p:sp>
+        <p:nvSpPr>
+          <p:cNvPr id="6" name="Rounded Rectangle 5"/>
+          <p:cNvSpPr/>
+          <p:nvPr/>
+        </p:nvSpPr>
+        <p:spPr>
+          <a:xfrm>
+            <a:off x="548640" y="2788920"/>
+            <a:ext cx="2240280" cy="530352"/>
+          </a:xfrm>
+          <a:prstGeom prst="roundRect">
+            <a:avLst/>
+          </a:prstGeom>
+          <a:solidFill>
+            <a:srgbClr val="FFFFFF"/>
+          </a:solidFill>
+          <a:ln w="19050">
+            <a:solidFill>
+              <a:srgbClr val="27865A"/>
+            </a:solidFill>
+          </a:ln>
+          <a:effectLst/>
+        </p:spPr>
+        <p:style>
+          <a:lnRef idx="1">
+            <a:schemeClr val="accent1"/>
+          </a:lnRef>
+          <a:fillRef idx="3">
+            <a:schemeClr val="accent1"/>
+          </a:fillRef>
+          <a:effectRef idx="2">
+            <a:schemeClr val="accent1"/>
+          </a:effectRef>
+          <a:fontRef idx="minor">
+            <a:schemeClr val="lt1"/>
+          </a:fontRef>
+        </p:style>
+        <p:txBody>
+          <a:bodyPr rtlCol="0" anchor="ctr" wrap="square" lIns="45720" rIns="45720" tIns="18288" bIns="18288"/>
+          <a:lstStyle/>
+          <a:p>
+            <a:pPr algn="ctr"/>
+            <a:r>
+              <a:rPr sz="1300" b="1">
+                <a:solidFill>
+                  <a:srgbClr val="27865A"/>
                 </a:solidFill>
                 <a:latin typeface="Arial"/>
               </a:rPr>
-              <a:t>          ξ ← ξ − η A⁻¹ ∇J(ξ)</a:t>
-            </a:r>
-          </a:p>
-        </p:txBody>
-      </p:sp>
-      <p:sp>
-        <p:nvSpPr>
-          <p:cNvPr id="6" name="TextBox 5"/>
+              <a:t>handle grip</a:t>
+            </a:r>
+          </a:p>
+        </p:txBody>
+      </p:sp>
+      <p:sp>
+        <p:nvSpPr>
+          <p:cNvPr id="7" name="Rounded Rectangle 6"/>
+          <p:cNvSpPr/>
+          <p:nvPr/>
+        </p:nvSpPr>
+        <p:spPr>
+          <a:xfrm>
+            <a:off x="548640" y="3520440"/>
+            <a:ext cx="2240280" cy="530352"/>
+          </a:xfrm>
+          <a:prstGeom prst="roundRect">
+            <a:avLst/>
+          </a:prstGeom>
+          <a:solidFill>
+            <a:srgbClr val="FFFFFF"/>
+          </a:solidFill>
+          <a:ln w="19050">
+            <a:solidFill>
+              <a:srgbClr val="2C6FBB"/>
+            </a:solidFill>
+          </a:ln>
+          <a:effectLst/>
+        </p:spPr>
+        <p:style>
+          <a:lnRef idx="1">
+            <a:schemeClr val="accent1"/>
+          </a:lnRef>
+          <a:fillRef idx="3">
+            <a:schemeClr val="accent1"/>
+          </a:fillRef>
+          <a:effectRef idx="2">
+            <a:schemeClr val="accent1"/>
+          </a:effectRef>
+          <a:fontRef idx="minor">
+            <a:schemeClr val="lt1"/>
+          </a:fontRef>
+        </p:style>
+        <p:txBody>
+          <a:bodyPr rtlCol="0" anchor="ctr" wrap="square" lIns="45720" rIns="45720" tIns="18288" bIns="18288"/>
+          <a:lstStyle/>
+          <a:p>
+            <a:pPr algn="ctr"/>
+            <a:r>
+              <a:rPr sz="1300" b="1">
+                <a:solidFill>
+                  <a:srgbClr val="2C6FBB"/>
+                </a:solidFill>
+                <a:latin typeface="Arial"/>
+              </a:rPr>
+              <a:t>rim grip</a:t>
+            </a:r>
+          </a:p>
+        </p:txBody>
+      </p:sp>
+      <p:sp>
+        <p:nvSpPr>
+          <p:cNvPr id="8" name="Rounded Rectangle 7"/>
+          <p:cNvSpPr/>
+          <p:nvPr/>
+        </p:nvSpPr>
+        <p:spPr>
+          <a:xfrm>
+            <a:off x="548640" y="4251960"/>
+            <a:ext cx="2240280" cy="530352"/>
+          </a:xfrm>
+          <a:prstGeom prst="roundRect">
+            <a:avLst/>
+          </a:prstGeom>
+          <a:solidFill>
+            <a:srgbClr val="FFFFFF"/>
+          </a:solidFill>
+          <a:ln w="19050">
+            <a:solidFill>
+              <a:srgbClr val="C0392B"/>
+            </a:solidFill>
+          </a:ln>
+          <a:effectLst/>
+        </p:spPr>
+        <p:style>
+          <a:lnRef idx="1">
+            <a:schemeClr val="accent1"/>
+          </a:lnRef>
+          <a:fillRef idx="3">
+            <a:schemeClr val="accent1"/>
+          </a:fillRef>
+          <a:effectRef idx="2">
+            <a:schemeClr val="accent1"/>
+          </a:effectRef>
+          <a:fontRef idx="minor">
+            <a:schemeClr val="lt1"/>
+          </a:fontRef>
+        </p:style>
+        <p:txBody>
+          <a:bodyPr rtlCol="0" anchor="ctr" wrap="square" lIns="45720" rIns="45720" tIns="18288" bIns="18288"/>
+          <a:lstStyle/>
+          <a:p>
+            <a:pPr algn="ctr"/>
+            <a:r>
+              <a:rPr sz="1300" b="1">
+                <a:solidFill>
+                  <a:srgbClr val="C0392B"/>
+                </a:solidFill>
+                <a:latin typeface="Arial"/>
+              </a:rPr>
+              <a:t>body grip</a:t>
+            </a:r>
+          </a:p>
+        </p:txBody>
+      </p:sp>
+      <p:sp>
+        <p:nvSpPr>
+          <p:cNvPr id="9" name="Rounded Rectangle 8"/>
+          <p:cNvSpPr/>
+          <p:nvPr/>
+        </p:nvSpPr>
+        <p:spPr>
+          <a:xfrm>
+            <a:off x="3611880" y="3108960"/>
+            <a:ext cx="2148840" cy="1097280"/>
+          </a:xfrm>
+          <a:prstGeom prst="roundRect">
+            <a:avLst/>
+          </a:prstGeom>
+          <a:solidFill>
+            <a:srgbClr val="FFFFFF"/>
+          </a:solidFill>
+          <a:ln w="19050">
+            <a:solidFill>
+              <a:srgbClr val="C0392B"/>
+            </a:solidFill>
+          </a:ln>
+          <a:effectLst/>
+        </p:spPr>
+        <p:style>
+          <a:lnRef idx="1">
+            <a:schemeClr val="accent1"/>
+          </a:lnRef>
+          <a:fillRef idx="3">
+            <a:schemeClr val="accent1"/>
+          </a:fillRef>
+          <a:effectRef idx="2">
+            <a:schemeClr val="accent1"/>
+          </a:effectRef>
+          <a:fontRef idx="minor">
+            <a:schemeClr val="lt1"/>
+          </a:fontRef>
+        </p:style>
+        <p:txBody>
+          <a:bodyPr rtlCol="0" anchor="ctr" wrap="square" lIns="45720" rIns="45720" tIns="18288" bIns="18288"/>
+          <a:lstStyle/>
+          <a:p>
+            <a:pPr algn="ctr"/>
+            <a:r>
+              <a:rPr sz="1300" b="1">
+                <a:solidFill>
+                  <a:srgbClr val="2C3E50"/>
+                </a:solidFill>
+                <a:latin typeface="Arial"/>
+              </a:rPr>
+              <a:t>Spill-aware CHOMP</a:t>
+            </a:r>
+          </a:p>
+          <a:p>
+            <a:pPr algn="ctr"/>
+            <a:r>
+              <a:rPr sz="1100" b="0">
+                <a:solidFill>
+                  <a:srgbClr val="2C3E50"/>
+                </a:solidFill>
+                <a:latin typeface="Arial"/>
+              </a:rPr>
+              <a:t>(per grasp)</a:t>
+            </a:r>
+          </a:p>
+        </p:txBody>
+      </p:sp>
+      <p:cxnSp>
+        <p:nvCxnSpPr>
+          <p:cNvPr id="10" name="Connector 9"/>
+          <p:cNvCxnSpPr/>
+          <p:nvPr/>
+        </p:nvCxnSpPr>
+        <p:spPr>
+          <a:xfrm>
+            <a:off x="2807208" y="3054096"/>
+            <a:ext cx="786384" cy="603504"/>
+          </a:xfrm>
+          <a:prstGeom prst="line">
+            <a:avLst/>
+          </a:prstGeom>
+          <a:ln w="19050">
+            <a:solidFill>
+              <a:srgbClr val="27865A"/>
+            </a:solidFill>
+            <a:tailEnd type="triangle" w="med" len="med"/>
+          </a:ln>
+        </p:spPr>
+        <p:style>
+          <a:lnRef idx="2">
+            <a:schemeClr val="accent1"/>
+          </a:lnRef>
+          <a:fillRef idx="0">
+            <a:schemeClr val="accent1"/>
+          </a:fillRef>
+          <a:effectRef idx="1">
+            <a:schemeClr val="accent1"/>
+          </a:effectRef>
+          <a:fontRef idx="minor">
+            <a:schemeClr val="tx1"/>
+          </a:fontRef>
+        </p:style>
+      </p:cxnSp>
+      <p:cxnSp>
+        <p:nvCxnSpPr>
+          <p:cNvPr id="11" name="Connector 10"/>
+          <p:cNvCxnSpPr/>
+          <p:nvPr/>
+        </p:nvCxnSpPr>
+        <p:spPr>
+          <a:xfrm flipV="1">
+            <a:off x="2807208" y="3657600"/>
+            <a:ext cx="786384" cy="128015"/>
+          </a:xfrm>
+          <a:prstGeom prst="line">
+            <a:avLst/>
+          </a:prstGeom>
+          <a:ln w="19050">
+            <a:solidFill>
+              <a:srgbClr val="2C6FBB"/>
+            </a:solidFill>
+            <a:tailEnd type="triangle" w="med" len="med"/>
+          </a:ln>
+        </p:spPr>
+        <p:style>
+          <a:lnRef idx="2">
+            <a:schemeClr val="accent1"/>
+          </a:lnRef>
+          <a:fillRef idx="0">
+            <a:schemeClr val="accent1"/>
+          </a:fillRef>
+          <a:effectRef idx="1">
+            <a:schemeClr val="accent1"/>
+          </a:effectRef>
+          <a:fontRef idx="minor">
+            <a:schemeClr val="tx1"/>
+          </a:fontRef>
+        </p:style>
+      </p:cxnSp>
+      <p:cxnSp>
+        <p:nvCxnSpPr>
+          <p:cNvPr id="12" name="Connector 11"/>
+          <p:cNvCxnSpPr/>
+          <p:nvPr/>
+        </p:nvCxnSpPr>
+        <p:spPr>
+          <a:xfrm flipV="1">
+            <a:off x="2807208" y="3657600"/>
+            <a:ext cx="786384" cy="859536"/>
+          </a:xfrm>
+          <a:prstGeom prst="line">
+            <a:avLst/>
+          </a:prstGeom>
+          <a:ln w="19050">
+            <a:solidFill>
+              <a:srgbClr val="C0392B"/>
+            </a:solidFill>
+            <a:tailEnd type="triangle" w="med" len="med"/>
+          </a:ln>
+        </p:spPr>
+        <p:style>
+          <a:lnRef idx="2">
+            <a:schemeClr val="accent1"/>
+          </a:lnRef>
+          <a:fillRef idx="0">
+            <a:schemeClr val="accent1"/>
+          </a:fillRef>
+          <a:effectRef idx="1">
+            <a:schemeClr val="accent1"/>
+          </a:effectRef>
+          <a:fontRef idx="minor">
+            <a:schemeClr val="tx1"/>
+          </a:fontRef>
+        </p:style>
+      </p:cxnSp>
+      <p:sp>
+        <p:nvSpPr>
+          <p:cNvPr id="13" name="TextBox 12"/>
           <p:cNvSpPr txBox="1"/>
           <p:nvPr/>
         </p:nvSpPr>
         <p:spPr>
           <a:xfrm>
-            <a:off x="640080" y="5029200"/>
-            <a:ext cx="10972800" cy="731520"/>
+            <a:off x="6309360" y="2350008"/>
+            <a:ext cx="5394960" cy="365760"/>
           </a:xfrm>
           <a:prstGeom prst="rect">
             <a:avLst/>
@@ -6598,38 +8249,537 @@
               </a:lnSpc>
             </a:pPr>
             <a:r>
-              <a:rPr sz="1400" b="0" i="0">
-                <a:solidFill>
-                  <a:srgbClr val="2C3E50"/>
+              <a:rPr sz="1200" b="1" i="0">
+                <a:solidFill>
+                  <a:srgbClr val="1A365D"/>
                 </a:solidFill>
                 <a:latin typeface="Arial"/>
               </a:rPr>
-              <a:t>Course CHOMP (Lecture 8) + </a:t>
-            </a:r>
-            <a:r>
-              <a:rPr sz="1400" b="1" i="0">
-                <a:solidFill>
-                  <a:srgbClr val="A93226"/>
+              <a:t>achievable margin to spill cone  (score)</a:t>
+            </a:r>
+          </a:p>
+        </p:txBody>
+      </p:sp>
+      <p:cxnSp>
+        <p:nvCxnSpPr>
+          <p:cNvPr id="14" name="Connector 13"/>
+          <p:cNvCxnSpPr/>
+          <p:nvPr/>
+        </p:nvCxnSpPr>
+        <p:spPr>
+          <a:xfrm>
+            <a:off x="5779008" y="3657600"/>
+            <a:ext cx="1033272" cy="0"/>
+          </a:xfrm>
+          <a:prstGeom prst="line">
+            <a:avLst/>
+          </a:prstGeom>
+          <a:ln w="25400">
+            <a:solidFill>
+              <a:srgbClr val="888888"/>
+            </a:solidFill>
+            <a:tailEnd type="triangle" w="med" len="med"/>
+          </a:ln>
+        </p:spPr>
+        <p:style>
+          <a:lnRef idx="2">
+            <a:schemeClr val="accent1"/>
+          </a:lnRef>
+          <a:fillRef idx="0">
+            <a:schemeClr val="accent1"/>
+          </a:fillRef>
+          <a:effectRef idx="1">
+            <a:schemeClr val="accent1"/>
+          </a:effectRef>
+          <a:fontRef idx="minor">
+            <a:schemeClr val="tx1"/>
+          </a:fontRef>
+        </p:style>
+      </p:cxnSp>
+      <p:sp>
+        <p:nvSpPr>
+          <p:cNvPr id="15" name="Rectangle 14"/>
+          <p:cNvSpPr/>
+          <p:nvPr/>
+        </p:nvSpPr>
+        <p:spPr>
+          <a:xfrm>
+            <a:off x="6903720" y="2788920"/>
+            <a:ext cx="3915783" cy="502920"/>
+          </a:xfrm>
+          <a:prstGeom prst="rect">
+            <a:avLst/>
+          </a:prstGeom>
+          <a:solidFill>
+            <a:srgbClr val="27865A"/>
+          </a:solidFill>
+          <a:ln>
+            <a:noFill/>
+          </a:ln>
+          <a:effectLst/>
+        </p:spPr>
+        <p:style>
+          <a:lnRef idx="1">
+            <a:schemeClr val="accent1"/>
+          </a:lnRef>
+          <a:fillRef idx="3">
+            <a:schemeClr val="accent1"/>
+          </a:fillRef>
+          <a:effectRef idx="2">
+            <a:schemeClr val="accent1"/>
+          </a:effectRef>
+          <a:fontRef idx="minor">
+            <a:schemeClr val="lt1"/>
+          </a:fontRef>
+        </p:style>
+        <p:txBody>
+          <a:bodyPr rtlCol="0" anchor="ctr"/>
+          <a:lstStyle/>
+          <a:p>
+            <a:pPr algn="ctr"/>
+          </a:p>
+        </p:txBody>
+      </p:sp>
+      <p:sp>
+        <p:nvSpPr>
+          <p:cNvPr id="16" name="TextBox 15"/>
+          <p:cNvSpPr txBox="1"/>
+          <p:nvPr/>
+        </p:nvSpPr>
+        <p:spPr>
+          <a:xfrm>
+            <a:off x="6976872" y="2788920"/>
+            <a:ext cx="1280160" cy="502920"/>
+          </a:xfrm>
+          <a:prstGeom prst="rect">
+            <a:avLst/>
+          </a:prstGeom>
+          <a:noFill/>
+        </p:spPr>
+        <p:txBody>
+          <a:bodyPr wrap="square" anchor="ctr">
+            <a:spAutoFit/>
+          </a:bodyPr>
+          <a:lstStyle/>
+          <a:p>
+            <a:pPr algn="l">
+              <a:lnSpc>
+                <a:spcPct val="105000"/>
+              </a:lnSpc>
+            </a:pPr>
+            <a:r>
+              <a:rPr sz="1200" b="1" i="0">
+                <a:solidFill>
+                  <a:srgbClr val="FFFFFF"/>
                 </a:solidFill>
                 <a:latin typeface="Arial"/>
               </a:rPr>
-              <a:t>one differentiable spill term</a:t>
-            </a:r>
-            <a:r>
-              <a:rPr sz="1400" b="0" i="0">
-                <a:solidFill>
-                  <a:srgbClr val="2C3E50"/>
+              <a:t>handle</a:t>
+            </a:r>
+          </a:p>
+        </p:txBody>
+      </p:sp>
+      <p:sp>
+        <p:nvSpPr>
+          <p:cNvPr id="17" name="TextBox 16"/>
+          <p:cNvSpPr txBox="1"/>
+          <p:nvPr/>
+        </p:nvSpPr>
+        <p:spPr>
+          <a:xfrm>
+            <a:off x="10892655" y="2788920"/>
+            <a:ext cx="640080" cy="502920"/>
+          </a:xfrm>
+          <a:prstGeom prst="rect">
+            <a:avLst/>
+          </a:prstGeom>
+          <a:noFill/>
+        </p:spPr>
+        <p:txBody>
+          <a:bodyPr wrap="square" anchor="ctr">
+            <a:spAutoFit/>
+          </a:bodyPr>
+          <a:lstStyle/>
+          <a:p>
+            <a:pPr algn="l">
+              <a:lnSpc>
+                <a:spcPct val="105000"/>
+              </a:lnSpc>
+            </a:pPr>
+            <a:r>
+              <a:rPr sz="1300" b="1" i="0">
+                <a:solidFill>
+                  <a:srgbClr val="27865A"/>
                 </a:solidFill>
                 <a:latin typeface="Arial"/>
               </a:rPr>
-              <a:t>.  a_cup comes from finite differences of ξ — the same operator as the smoothness term, so the spill gradient is analytic.</a:t>
-            </a:r>
-          </a:p>
-        </p:txBody>
-      </p:sp>
-      <p:sp>
-        <p:nvSpPr>
-          <p:cNvPr id="7" name="TextBox 6"/>
+              <a:t>32</a:t>
+            </a:r>
+          </a:p>
+        </p:txBody>
+      </p:sp>
+      <p:sp>
+        <p:nvSpPr>
+          <p:cNvPr id="18" name="Rectangle 17"/>
+          <p:cNvSpPr/>
+          <p:nvPr/>
+        </p:nvSpPr>
+        <p:spPr>
+          <a:xfrm>
+            <a:off x="6903720" y="3520440"/>
+            <a:ext cx="2692101" cy="502920"/>
+          </a:xfrm>
+          <a:prstGeom prst="rect">
+            <a:avLst/>
+          </a:prstGeom>
+          <a:solidFill>
+            <a:srgbClr val="2C6FBB"/>
+          </a:solidFill>
+          <a:ln>
+            <a:noFill/>
+          </a:ln>
+          <a:effectLst/>
+        </p:spPr>
+        <p:style>
+          <a:lnRef idx="1">
+            <a:schemeClr val="accent1"/>
+          </a:lnRef>
+          <a:fillRef idx="3">
+            <a:schemeClr val="accent1"/>
+          </a:fillRef>
+          <a:effectRef idx="2">
+            <a:schemeClr val="accent1"/>
+          </a:effectRef>
+          <a:fontRef idx="minor">
+            <a:schemeClr val="lt1"/>
+          </a:fontRef>
+        </p:style>
+        <p:txBody>
+          <a:bodyPr rtlCol="0" anchor="ctr"/>
+          <a:lstStyle/>
+          <a:p>
+            <a:pPr algn="ctr"/>
+          </a:p>
+        </p:txBody>
+      </p:sp>
+      <p:sp>
+        <p:nvSpPr>
+          <p:cNvPr id="19" name="TextBox 18"/>
+          <p:cNvSpPr txBox="1"/>
+          <p:nvPr/>
+        </p:nvSpPr>
+        <p:spPr>
+          <a:xfrm>
+            <a:off x="6976872" y="3520440"/>
+            <a:ext cx="1280160" cy="502920"/>
+          </a:xfrm>
+          <a:prstGeom prst="rect">
+            <a:avLst/>
+          </a:prstGeom>
+          <a:noFill/>
+        </p:spPr>
+        <p:txBody>
+          <a:bodyPr wrap="square" anchor="ctr">
+            <a:spAutoFit/>
+          </a:bodyPr>
+          <a:lstStyle/>
+          <a:p>
+            <a:pPr algn="l">
+              <a:lnSpc>
+                <a:spcPct val="105000"/>
+              </a:lnSpc>
+            </a:pPr>
+            <a:r>
+              <a:rPr sz="1200" b="1" i="0">
+                <a:solidFill>
+                  <a:srgbClr val="FFFFFF"/>
+                </a:solidFill>
+                <a:latin typeface="Arial"/>
+              </a:rPr>
+              <a:t>rim</a:t>
+            </a:r>
+          </a:p>
+        </p:txBody>
+      </p:sp>
+      <p:sp>
+        <p:nvSpPr>
+          <p:cNvPr id="20" name="TextBox 19"/>
+          <p:cNvSpPr txBox="1"/>
+          <p:nvPr/>
+        </p:nvSpPr>
+        <p:spPr>
+          <a:xfrm>
+            <a:off x="9668973" y="3520440"/>
+            <a:ext cx="640080" cy="502920"/>
+          </a:xfrm>
+          <a:prstGeom prst="rect">
+            <a:avLst/>
+          </a:prstGeom>
+          <a:noFill/>
+        </p:spPr>
+        <p:txBody>
+          <a:bodyPr wrap="square" anchor="ctr">
+            <a:spAutoFit/>
+          </a:bodyPr>
+          <a:lstStyle/>
+          <a:p>
+            <a:pPr algn="l">
+              <a:lnSpc>
+                <a:spcPct val="105000"/>
+              </a:lnSpc>
+            </a:pPr>
+            <a:r>
+              <a:rPr sz="1300" b="1" i="0">
+                <a:solidFill>
+                  <a:srgbClr val="2C6FBB"/>
+                </a:solidFill>
+                <a:latin typeface="Arial"/>
+              </a:rPr>
+              <a:t>22</a:t>
+            </a:r>
+          </a:p>
+        </p:txBody>
+      </p:sp>
+      <p:sp>
+        <p:nvSpPr>
+          <p:cNvPr id="21" name="Rectangle 20"/>
+          <p:cNvSpPr/>
+          <p:nvPr/>
+        </p:nvSpPr>
+        <p:spPr>
+          <a:xfrm>
+            <a:off x="6903720" y="4251960"/>
+            <a:ext cx="1468418" cy="502920"/>
+          </a:xfrm>
+          <a:prstGeom prst="rect">
+            <a:avLst/>
+          </a:prstGeom>
+          <a:solidFill>
+            <a:srgbClr val="C0392B"/>
+          </a:solidFill>
+          <a:ln>
+            <a:noFill/>
+          </a:ln>
+          <a:effectLst/>
+        </p:spPr>
+        <p:style>
+          <a:lnRef idx="1">
+            <a:schemeClr val="accent1"/>
+          </a:lnRef>
+          <a:fillRef idx="3">
+            <a:schemeClr val="accent1"/>
+          </a:fillRef>
+          <a:effectRef idx="2">
+            <a:schemeClr val="accent1"/>
+          </a:effectRef>
+          <a:fontRef idx="minor">
+            <a:schemeClr val="lt1"/>
+          </a:fontRef>
+        </p:style>
+        <p:txBody>
+          <a:bodyPr rtlCol="0" anchor="ctr"/>
+          <a:lstStyle/>
+          <a:p>
+            <a:pPr algn="ctr"/>
+          </a:p>
+        </p:txBody>
+      </p:sp>
+      <p:sp>
+        <p:nvSpPr>
+          <p:cNvPr id="22" name="TextBox 21"/>
+          <p:cNvSpPr txBox="1"/>
+          <p:nvPr/>
+        </p:nvSpPr>
+        <p:spPr>
+          <a:xfrm>
+            <a:off x="6976872" y="4251960"/>
+            <a:ext cx="1280160" cy="502920"/>
+          </a:xfrm>
+          <a:prstGeom prst="rect">
+            <a:avLst/>
+          </a:prstGeom>
+          <a:noFill/>
+        </p:spPr>
+        <p:txBody>
+          <a:bodyPr wrap="square" anchor="ctr">
+            <a:spAutoFit/>
+          </a:bodyPr>
+          <a:lstStyle/>
+          <a:p>
+            <a:pPr algn="l">
+              <a:lnSpc>
+                <a:spcPct val="105000"/>
+              </a:lnSpc>
+            </a:pPr>
+            <a:r>
+              <a:rPr sz="1200" b="1" i="0">
+                <a:solidFill>
+                  <a:srgbClr val="FFFFFF"/>
+                </a:solidFill>
+                <a:latin typeface="Arial"/>
+              </a:rPr>
+              <a:t>body</a:t>
+            </a:r>
+          </a:p>
+        </p:txBody>
+      </p:sp>
+      <p:sp>
+        <p:nvSpPr>
+          <p:cNvPr id="23" name="TextBox 22"/>
+          <p:cNvSpPr txBox="1"/>
+          <p:nvPr/>
+        </p:nvSpPr>
+        <p:spPr>
+          <a:xfrm>
+            <a:off x="8445290" y="4251960"/>
+            <a:ext cx="640080" cy="502920"/>
+          </a:xfrm>
+          <a:prstGeom prst="rect">
+            <a:avLst/>
+          </a:prstGeom>
+          <a:noFill/>
+        </p:spPr>
+        <p:txBody>
+          <a:bodyPr wrap="square" anchor="ctr">
+            <a:spAutoFit/>
+          </a:bodyPr>
+          <a:lstStyle/>
+          <a:p>
+            <a:pPr algn="l">
+              <a:lnSpc>
+                <a:spcPct val="105000"/>
+              </a:lnSpc>
+            </a:pPr>
+            <a:r>
+              <a:rPr sz="1300" b="1" i="0">
+                <a:solidFill>
+                  <a:srgbClr val="C0392B"/>
+                </a:solidFill>
+                <a:latin typeface="Arial"/>
+              </a:rPr>
+              <a:t>12</a:t>
+            </a:r>
+          </a:p>
+        </p:txBody>
+      </p:sp>
+      <p:sp>
+        <p:nvSpPr>
+          <p:cNvPr id="24" name="TextBox 23"/>
+          <p:cNvSpPr txBox="1"/>
+          <p:nvPr/>
+        </p:nvSpPr>
+        <p:spPr>
+          <a:xfrm>
+            <a:off x="6858000" y="4892040"/>
+            <a:ext cx="4754880" cy="365760"/>
+          </a:xfrm>
+          <a:prstGeom prst="rect">
+            <a:avLst/>
+          </a:prstGeom>
+          <a:noFill/>
+        </p:spPr>
+        <p:txBody>
+          <a:bodyPr wrap="square" anchor="t">
+            <a:spAutoFit/>
+          </a:bodyPr>
+          <a:lstStyle/>
+          <a:p>
+            <a:pPr algn="l">
+              <a:lnSpc>
+                <a:spcPct val="105000"/>
+              </a:lnSpc>
+            </a:pPr>
+            <a:r>
+              <a:rPr sz="1000" b="0" i="1">
+                <a:solidFill>
+                  <a:srgbClr val="666666"/>
+                </a:solidFill>
+                <a:latin typeface="Arial"/>
+              </a:rPr>
+              <a:t>wider margin = easier, safer carry  (illustrative)</a:t>
+            </a:r>
+          </a:p>
+        </p:txBody>
+      </p:sp>
+      <p:cxnSp>
+        <p:nvCxnSpPr>
+          <p:cNvPr id="25" name="Connector 24"/>
+          <p:cNvCxnSpPr/>
+          <p:nvPr/>
+        </p:nvCxnSpPr>
+        <p:spPr>
+          <a:xfrm flipH="1">
+            <a:off x="1645920" y="5349240"/>
+            <a:ext cx="8961120" cy="0"/>
+          </a:xfrm>
+          <a:prstGeom prst="line">
+            <a:avLst/>
+          </a:prstGeom>
+          <a:ln w="22860">
+            <a:solidFill>
+              <a:srgbClr val="1A365D"/>
+            </a:solidFill>
+            <a:prstDash val="dash"/>
+            <a:tailEnd type="triangle" w="med" len="med"/>
+          </a:ln>
+        </p:spPr>
+        <p:style>
+          <a:lnRef idx="2">
+            <a:schemeClr val="accent1"/>
+          </a:lnRef>
+          <a:fillRef idx="0">
+            <a:schemeClr val="accent1"/>
+          </a:fillRef>
+          <a:effectRef idx="1">
+            <a:schemeClr val="accent1"/>
+          </a:effectRef>
+          <a:fontRef idx="minor">
+            <a:schemeClr val="tx1"/>
+          </a:fontRef>
+        </p:style>
+      </p:cxnSp>
+      <p:sp>
+        <p:nvSpPr>
+          <p:cNvPr id="26" name="TextBox 25"/>
+          <p:cNvSpPr txBox="1"/>
+          <p:nvPr/>
+        </p:nvSpPr>
+        <p:spPr>
+          <a:xfrm>
+            <a:off x="1371600" y="5513832"/>
+            <a:ext cx="9509760" cy="365760"/>
+          </a:xfrm>
+          <a:prstGeom prst="rect">
+            <a:avLst/>
+          </a:prstGeom>
+          <a:noFill/>
+        </p:spPr>
+        <p:txBody>
+          <a:bodyPr wrap="square" anchor="t">
+            <a:spAutoFit/>
+          </a:bodyPr>
+          <a:lstStyle/>
+          <a:p>
+            <a:pPr algn="ctr">
+              <a:lnSpc>
+                <a:spcPct val="105000"/>
+              </a:lnSpc>
+            </a:pPr>
+            <a:r>
+              <a:rPr sz="1200" b="0" i="1">
+                <a:solidFill>
+                  <a:srgbClr val="1A365D"/>
+                </a:solidFill>
+                <a:latin typeface="Arial"/>
+              </a:rPr>
+              <a:t>future (thesis): spill margin → grasp-generation reward — close the loop</a:t>
+            </a:r>
+          </a:p>
+        </p:txBody>
+      </p:sp>
+      <p:sp>
+        <p:nvSpPr>
+          <p:cNvPr id="27" name="TextBox 26"/>
           <p:cNvSpPr txBox="1"/>
           <p:nvPr/>
         </p:nvSpPr>
@@ -6718,1081 +8868,6 @@
                 </a:solidFill>
                 <a:latin typeface="Arial"/>
               </a:rPr>
-              <a:t>Method — the optimizer as a grasp evaluator</a:t>
-            </a:r>
-          </a:p>
-        </p:txBody>
-      </p:sp>
-      <p:sp>
-        <p:nvSpPr>
-          <p:cNvPr id="3" name="Rectangle 2"/>
-          <p:cNvSpPr/>
-          <p:nvPr/>
-        </p:nvSpPr>
-        <p:spPr>
-          <a:xfrm>
-            <a:off x="548640" y="1115568"/>
-            <a:ext cx="11064240" cy="27940"/>
-          </a:xfrm>
-          <a:prstGeom prst="rect">
-            <a:avLst/>
-          </a:prstGeom>
-          <a:solidFill>
-            <a:srgbClr val="CCCCCC"/>
-          </a:solidFill>
-          <a:ln>
-            <a:noFill/>
-          </a:ln>
-        </p:spPr>
-        <p:style>
-          <a:lnRef idx="1">
-            <a:schemeClr val="accent1"/>
-          </a:lnRef>
-          <a:fillRef idx="3">
-            <a:schemeClr val="accent1"/>
-          </a:fillRef>
-          <a:effectRef idx="2">
-            <a:schemeClr val="accent1"/>
-          </a:effectRef>
-          <a:fontRef idx="minor">
-            <a:schemeClr val="lt1"/>
-          </a:fontRef>
-        </p:style>
-        <p:txBody>
-          <a:bodyPr rtlCol="0" anchor="ctr"/>
-          <a:lstStyle/>
-          <a:p>
-            <a:pPr algn="ctr"/>
-          </a:p>
-        </p:txBody>
-      </p:sp>
-      <p:sp>
-        <p:nvSpPr>
-          <p:cNvPr id="4" name="TextBox 3"/>
-          <p:cNvSpPr txBox="1"/>
-          <p:nvPr/>
-        </p:nvSpPr>
-        <p:spPr>
-          <a:xfrm>
-            <a:off x="411480" y="1463040"/>
-            <a:ext cx="2743200" cy="640080"/>
-          </a:xfrm>
-          <a:prstGeom prst="rect">
-            <a:avLst/>
-          </a:prstGeom>
-          <a:noFill/>
-        </p:spPr>
-        <p:txBody>
-          <a:bodyPr wrap="square" anchor="t">
-            <a:spAutoFit/>
-          </a:bodyPr>
-          <a:lstStyle/>
-          <a:p>
-            <a:pPr algn="ctr">
-              <a:lnSpc>
-                <a:spcPct val="105000"/>
-              </a:lnSpc>
-            </a:pPr>
-            <a:r>
-              <a:rPr sz="1250" b="1" i="0">
-                <a:solidFill>
-                  <a:srgbClr val="2C3E50"/>
-                </a:solidFill>
-                <a:latin typeface="Arial"/>
-              </a:rPr>
-              <a:t>candidate grasps
-(taxonomy / region)</a:t>
-            </a:r>
-          </a:p>
-        </p:txBody>
-      </p:sp>
-      <p:sp>
-        <p:nvSpPr>
-          <p:cNvPr id="5" name="Rounded Rectangle 4"/>
-          <p:cNvSpPr/>
-          <p:nvPr/>
-        </p:nvSpPr>
-        <p:spPr>
-          <a:xfrm>
-            <a:off x="548640" y="2331720"/>
-            <a:ext cx="2240280" cy="566928"/>
-          </a:xfrm>
-          <a:prstGeom prst="roundRect">
-            <a:avLst/>
-          </a:prstGeom>
-          <a:solidFill>
-            <a:srgbClr val="FFFFFF"/>
-          </a:solidFill>
-          <a:ln w="19050">
-            <a:solidFill>
-              <a:srgbClr val="27865A"/>
-            </a:solidFill>
-          </a:ln>
-          <a:effectLst/>
-        </p:spPr>
-        <p:style>
-          <a:lnRef idx="1">
-            <a:schemeClr val="accent1"/>
-          </a:lnRef>
-          <a:fillRef idx="3">
-            <a:schemeClr val="accent1"/>
-          </a:fillRef>
-          <a:effectRef idx="2">
-            <a:schemeClr val="accent1"/>
-          </a:effectRef>
-          <a:fontRef idx="minor">
-            <a:schemeClr val="lt1"/>
-          </a:fontRef>
-        </p:style>
-        <p:txBody>
-          <a:bodyPr rtlCol="0" anchor="ctr" wrap="square" lIns="45720" rIns="45720" tIns="18288" bIns="18288"/>
-          <a:lstStyle/>
-          <a:p>
-            <a:pPr algn="ctr"/>
-            <a:r>
-              <a:rPr sz="1300" b="1">
-                <a:solidFill>
-                  <a:srgbClr val="27865A"/>
-                </a:solidFill>
-                <a:latin typeface="Arial"/>
-              </a:rPr>
-              <a:t>handle grip</a:t>
-            </a:r>
-          </a:p>
-        </p:txBody>
-      </p:sp>
-      <p:sp>
-        <p:nvSpPr>
-          <p:cNvPr id="6" name="Rounded Rectangle 5"/>
-          <p:cNvSpPr/>
-          <p:nvPr/>
-        </p:nvSpPr>
-        <p:spPr>
-          <a:xfrm>
-            <a:off x="548640" y="3154680"/>
-            <a:ext cx="2240280" cy="566928"/>
-          </a:xfrm>
-          <a:prstGeom prst="roundRect">
-            <a:avLst/>
-          </a:prstGeom>
-          <a:solidFill>
-            <a:srgbClr val="FFFFFF"/>
-          </a:solidFill>
-          <a:ln w="19050">
-            <a:solidFill>
-              <a:srgbClr val="2C6FBB"/>
-            </a:solidFill>
-          </a:ln>
-          <a:effectLst/>
-        </p:spPr>
-        <p:style>
-          <a:lnRef idx="1">
-            <a:schemeClr val="accent1"/>
-          </a:lnRef>
-          <a:fillRef idx="3">
-            <a:schemeClr val="accent1"/>
-          </a:fillRef>
-          <a:effectRef idx="2">
-            <a:schemeClr val="accent1"/>
-          </a:effectRef>
-          <a:fontRef idx="minor">
-            <a:schemeClr val="lt1"/>
-          </a:fontRef>
-        </p:style>
-        <p:txBody>
-          <a:bodyPr rtlCol="0" anchor="ctr" wrap="square" lIns="45720" rIns="45720" tIns="18288" bIns="18288"/>
-          <a:lstStyle/>
-          <a:p>
-            <a:pPr algn="ctr"/>
-            <a:r>
-              <a:rPr sz="1300" b="1">
-                <a:solidFill>
-                  <a:srgbClr val="2C6FBB"/>
-                </a:solidFill>
-                <a:latin typeface="Arial"/>
-              </a:rPr>
-              <a:t>rim grip</a:t>
-            </a:r>
-          </a:p>
-        </p:txBody>
-      </p:sp>
-      <p:sp>
-        <p:nvSpPr>
-          <p:cNvPr id="7" name="Rounded Rectangle 6"/>
-          <p:cNvSpPr/>
-          <p:nvPr/>
-        </p:nvSpPr>
-        <p:spPr>
-          <a:xfrm>
-            <a:off x="548640" y="3977639"/>
-            <a:ext cx="2240280" cy="566928"/>
-          </a:xfrm>
-          <a:prstGeom prst="roundRect">
-            <a:avLst/>
-          </a:prstGeom>
-          <a:solidFill>
-            <a:srgbClr val="FFFFFF"/>
-          </a:solidFill>
-          <a:ln w="19050">
-            <a:solidFill>
-              <a:srgbClr val="C0392B"/>
-            </a:solidFill>
-          </a:ln>
-          <a:effectLst/>
-        </p:spPr>
-        <p:style>
-          <a:lnRef idx="1">
-            <a:schemeClr val="accent1"/>
-          </a:lnRef>
-          <a:fillRef idx="3">
-            <a:schemeClr val="accent1"/>
-          </a:fillRef>
-          <a:effectRef idx="2">
-            <a:schemeClr val="accent1"/>
-          </a:effectRef>
-          <a:fontRef idx="minor">
-            <a:schemeClr val="lt1"/>
-          </a:fontRef>
-        </p:style>
-        <p:txBody>
-          <a:bodyPr rtlCol="0" anchor="ctr" wrap="square" lIns="45720" rIns="45720" tIns="18288" bIns="18288"/>
-          <a:lstStyle/>
-          <a:p>
-            <a:pPr algn="ctr"/>
-            <a:r>
-              <a:rPr sz="1300" b="1">
-                <a:solidFill>
-                  <a:srgbClr val="C0392B"/>
-                </a:solidFill>
-                <a:latin typeface="Arial"/>
-              </a:rPr>
-              <a:t>body grip</a:t>
-            </a:r>
-          </a:p>
-        </p:txBody>
-      </p:sp>
-      <p:sp>
-        <p:nvSpPr>
-          <p:cNvPr id="8" name="Rounded Rectangle 7"/>
-          <p:cNvSpPr/>
-          <p:nvPr/>
-        </p:nvSpPr>
-        <p:spPr>
-          <a:xfrm>
-            <a:off x="3611880" y="2743200"/>
-            <a:ext cx="2148840" cy="1234440"/>
-          </a:xfrm>
-          <a:prstGeom prst="roundRect">
-            <a:avLst/>
-          </a:prstGeom>
-          <a:solidFill>
-            <a:srgbClr val="FFFFFF"/>
-          </a:solidFill>
-          <a:ln w="19050">
-            <a:solidFill>
-              <a:srgbClr val="C0392B"/>
-            </a:solidFill>
-          </a:ln>
-          <a:effectLst/>
-        </p:spPr>
-        <p:style>
-          <a:lnRef idx="1">
-            <a:schemeClr val="accent1"/>
-          </a:lnRef>
-          <a:fillRef idx="3">
-            <a:schemeClr val="accent1"/>
-          </a:fillRef>
-          <a:effectRef idx="2">
-            <a:schemeClr val="accent1"/>
-          </a:effectRef>
-          <a:fontRef idx="minor">
-            <a:schemeClr val="lt1"/>
-          </a:fontRef>
-        </p:style>
-        <p:txBody>
-          <a:bodyPr rtlCol="0" anchor="ctr" wrap="square" lIns="45720" rIns="45720" tIns="18288" bIns="18288"/>
-          <a:lstStyle/>
-          <a:p>
-            <a:pPr algn="ctr"/>
-            <a:r>
-              <a:rPr sz="1300" b="1">
-                <a:solidFill>
-                  <a:srgbClr val="2C3E50"/>
-                </a:solidFill>
-                <a:latin typeface="Arial"/>
-              </a:rPr>
-              <a:t>Spill-aware CHOMP</a:t>
-            </a:r>
-          </a:p>
-          <a:p>
-            <a:pPr algn="ctr"/>
-            <a:r>
-              <a:rPr sz="1100" b="0">
-                <a:solidFill>
-                  <a:srgbClr val="2C3E50"/>
-                </a:solidFill>
-                <a:latin typeface="Arial"/>
-              </a:rPr>
-              <a:t>(per grasp)</a:t>
-            </a:r>
-          </a:p>
-        </p:txBody>
-      </p:sp>
-      <p:cxnSp>
-        <p:nvCxnSpPr>
-          <p:cNvPr id="9" name="Connector 8"/>
-          <p:cNvCxnSpPr/>
-          <p:nvPr/>
-        </p:nvCxnSpPr>
-        <p:spPr>
-          <a:xfrm>
-            <a:off x="2807208" y="2615184"/>
-            <a:ext cx="786384" cy="749808"/>
-          </a:xfrm>
-          <a:prstGeom prst="line">
-            <a:avLst/>
-          </a:prstGeom>
-          <a:ln w="19050">
-            <a:solidFill>
-              <a:srgbClr val="27865A"/>
-            </a:solidFill>
-            <a:tailEnd type="triangle" w="med" len="med"/>
-          </a:ln>
-        </p:spPr>
-        <p:style>
-          <a:lnRef idx="2">
-            <a:schemeClr val="accent1"/>
-          </a:lnRef>
-          <a:fillRef idx="0">
-            <a:schemeClr val="accent1"/>
-          </a:fillRef>
-          <a:effectRef idx="1">
-            <a:schemeClr val="accent1"/>
-          </a:effectRef>
-          <a:fontRef idx="minor">
-            <a:schemeClr val="tx1"/>
-          </a:fontRef>
-        </p:style>
-      </p:cxnSp>
-      <p:cxnSp>
-        <p:nvCxnSpPr>
-          <p:cNvPr id="10" name="Connector 9"/>
-          <p:cNvCxnSpPr/>
-          <p:nvPr/>
-        </p:nvCxnSpPr>
-        <p:spPr>
-          <a:xfrm flipV="1">
-            <a:off x="2807208" y="3364992"/>
-            <a:ext cx="786384" cy="73152"/>
-          </a:xfrm>
-          <a:prstGeom prst="line">
-            <a:avLst/>
-          </a:prstGeom>
-          <a:ln w="19050">
-            <a:solidFill>
-              <a:srgbClr val="2C6FBB"/>
-            </a:solidFill>
-            <a:tailEnd type="triangle" w="med" len="med"/>
-          </a:ln>
-        </p:spPr>
-        <p:style>
-          <a:lnRef idx="2">
-            <a:schemeClr val="accent1"/>
-          </a:lnRef>
-          <a:fillRef idx="0">
-            <a:schemeClr val="accent1"/>
-          </a:fillRef>
-          <a:effectRef idx="1">
-            <a:schemeClr val="accent1"/>
-          </a:effectRef>
-          <a:fontRef idx="minor">
-            <a:schemeClr val="tx1"/>
-          </a:fontRef>
-        </p:style>
-      </p:cxnSp>
-      <p:cxnSp>
-        <p:nvCxnSpPr>
-          <p:cNvPr id="11" name="Connector 10"/>
-          <p:cNvCxnSpPr/>
-          <p:nvPr/>
-        </p:nvCxnSpPr>
-        <p:spPr>
-          <a:xfrm flipV="1">
-            <a:off x="2807208" y="3364992"/>
-            <a:ext cx="786384" cy="896111"/>
-          </a:xfrm>
-          <a:prstGeom prst="line">
-            <a:avLst/>
-          </a:prstGeom>
-          <a:ln w="19050">
-            <a:solidFill>
-              <a:srgbClr val="C0392B"/>
-            </a:solidFill>
-            <a:tailEnd type="triangle" w="med" len="med"/>
-          </a:ln>
-        </p:spPr>
-        <p:style>
-          <a:lnRef idx="2">
-            <a:schemeClr val="accent1"/>
-          </a:lnRef>
-          <a:fillRef idx="0">
-            <a:schemeClr val="accent1"/>
-          </a:fillRef>
-          <a:effectRef idx="1">
-            <a:schemeClr val="accent1"/>
-          </a:effectRef>
-          <a:fontRef idx="minor">
-            <a:schemeClr val="tx1"/>
-          </a:fontRef>
-        </p:style>
-      </p:cxnSp>
-      <p:sp>
-        <p:nvSpPr>
-          <p:cNvPr id="12" name="TextBox 11"/>
-          <p:cNvSpPr txBox="1"/>
-          <p:nvPr/>
-        </p:nvSpPr>
-        <p:spPr>
-          <a:xfrm>
-            <a:off x="6309360" y="1481328"/>
-            <a:ext cx="5394960" cy="411480"/>
-          </a:xfrm>
-          <a:prstGeom prst="rect">
-            <a:avLst/>
-          </a:prstGeom>
-          <a:noFill/>
-        </p:spPr>
-        <p:txBody>
-          <a:bodyPr wrap="square" anchor="t">
-            <a:spAutoFit/>
-          </a:bodyPr>
-          <a:lstStyle/>
-          <a:p>
-            <a:pPr algn="ctr">
-              <a:lnSpc>
-                <a:spcPct val="105000"/>
-              </a:lnSpc>
-            </a:pPr>
-            <a:r>
-              <a:rPr sz="1250" b="1" i="0">
-                <a:solidFill>
-                  <a:srgbClr val="1A365D"/>
-                </a:solidFill>
-                <a:latin typeface="Arial"/>
-              </a:rPr>
-              <a:t>achievable spill margin  θmax  (score)</a:t>
-            </a:r>
-          </a:p>
-        </p:txBody>
-      </p:sp>
-      <p:cxnSp>
-        <p:nvCxnSpPr>
-          <p:cNvPr id="13" name="Connector 12"/>
-          <p:cNvCxnSpPr/>
-          <p:nvPr/>
-        </p:nvCxnSpPr>
-        <p:spPr>
-          <a:xfrm>
-            <a:off x="5779008" y="3364992"/>
-            <a:ext cx="1033272" cy="0"/>
-          </a:xfrm>
-          <a:prstGeom prst="line">
-            <a:avLst/>
-          </a:prstGeom>
-          <a:ln w="25400">
-            <a:solidFill>
-              <a:srgbClr val="888888"/>
-            </a:solidFill>
-            <a:tailEnd type="triangle" w="med" len="med"/>
-          </a:ln>
-        </p:spPr>
-        <p:style>
-          <a:lnRef idx="2">
-            <a:schemeClr val="accent1"/>
-          </a:lnRef>
-          <a:fillRef idx="0">
-            <a:schemeClr val="accent1"/>
-          </a:fillRef>
-          <a:effectRef idx="1">
-            <a:schemeClr val="accent1"/>
-          </a:effectRef>
-          <a:fontRef idx="minor">
-            <a:schemeClr val="tx1"/>
-          </a:fontRef>
-        </p:style>
-      </p:cxnSp>
-      <p:sp>
-        <p:nvSpPr>
-          <p:cNvPr id="14" name="Rectangle 13"/>
-          <p:cNvSpPr/>
-          <p:nvPr/>
-        </p:nvSpPr>
-        <p:spPr>
-          <a:xfrm>
-            <a:off x="6903720" y="2286000"/>
-            <a:ext cx="3915783" cy="548640"/>
-          </a:xfrm>
-          <a:prstGeom prst="rect">
-            <a:avLst/>
-          </a:prstGeom>
-          <a:solidFill>
-            <a:srgbClr val="27865A"/>
-          </a:solidFill>
-          <a:ln>
-            <a:noFill/>
-          </a:ln>
-          <a:effectLst/>
-        </p:spPr>
-        <p:style>
-          <a:lnRef idx="1">
-            <a:schemeClr val="accent1"/>
-          </a:lnRef>
-          <a:fillRef idx="3">
-            <a:schemeClr val="accent1"/>
-          </a:fillRef>
-          <a:effectRef idx="2">
-            <a:schemeClr val="accent1"/>
-          </a:effectRef>
-          <a:fontRef idx="minor">
-            <a:schemeClr val="lt1"/>
-          </a:fontRef>
-        </p:style>
-        <p:txBody>
-          <a:bodyPr rtlCol="0" anchor="ctr"/>
-          <a:lstStyle/>
-          <a:p>
-            <a:pPr algn="ctr"/>
-          </a:p>
-        </p:txBody>
-      </p:sp>
-      <p:sp>
-        <p:nvSpPr>
-          <p:cNvPr id="15" name="TextBox 14"/>
-          <p:cNvSpPr txBox="1"/>
-          <p:nvPr/>
-        </p:nvSpPr>
-        <p:spPr>
-          <a:xfrm>
-            <a:off x="6976872" y="2304288"/>
-            <a:ext cx="1280160" cy="502920"/>
-          </a:xfrm>
-          <a:prstGeom prst="rect">
-            <a:avLst/>
-          </a:prstGeom>
-          <a:noFill/>
-        </p:spPr>
-        <p:txBody>
-          <a:bodyPr wrap="square" anchor="ctr">
-            <a:spAutoFit/>
-          </a:bodyPr>
-          <a:lstStyle/>
-          <a:p>
-            <a:pPr algn="l">
-              <a:lnSpc>
-                <a:spcPct val="105000"/>
-              </a:lnSpc>
-            </a:pPr>
-            <a:r>
-              <a:rPr sz="1200" b="1" i="0">
-                <a:solidFill>
-                  <a:srgbClr val="FFFFFF"/>
-                </a:solidFill>
-                <a:latin typeface="Arial"/>
-              </a:rPr>
-              <a:t>handle</a:t>
-            </a:r>
-          </a:p>
-        </p:txBody>
-      </p:sp>
-      <p:sp>
-        <p:nvSpPr>
-          <p:cNvPr id="16" name="TextBox 15"/>
-          <p:cNvSpPr txBox="1"/>
-          <p:nvPr/>
-        </p:nvSpPr>
-        <p:spPr>
-          <a:xfrm>
-            <a:off x="10892655" y="2304288"/>
-            <a:ext cx="640080" cy="502920"/>
-          </a:xfrm>
-          <a:prstGeom prst="rect">
-            <a:avLst/>
-          </a:prstGeom>
-          <a:noFill/>
-        </p:spPr>
-        <p:txBody>
-          <a:bodyPr wrap="square" anchor="ctr">
-            <a:spAutoFit/>
-          </a:bodyPr>
-          <a:lstStyle/>
-          <a:p>
-            <a:pPr algn="l">
-              <a:lnSpc>
-                <a:spcPct val="105000"/>
-              </a:lnSpc>
-            </a:pPr>
-            <a:r>
-              <a:rPr sz="1300" b="1" i="0">
-                <a:solidFill>
-                  <a:srgbClr val="27865A"/>
-                </a:solidFill>
-                <a:latin typeface="Arial"/>
-              </a:rPr>
-              <a:t>32</a:t>
-            </a:r>
-          </a:p>
-        </p:txBody>
-      </p:sp>
-      <p:sp>
-        <p:nvSpPr>
-          <p:cNvPr id="17" name="Rectangle 16"/>
-          <p:cNvSpPr/>
-          <p:nvPr/>
-        </p:nvSpPr>
-        <p:spPr>
-          <a:xfrm>
-            <a:off x="6903720" y="3154680"/>
-            <a:ext cx="2692101" cy="548640"/>
-          </a:xfrm>
-          <a:prstGeom prst="rect">
-            <a:avLst/>
-          </a:prstGeom>
-          <a:solidFill>
-            <a:srgbClr val="2C6FBB"/>
-          </a:solidFill>
-          <a:ln>
-            <a:noFill/>
-          </a:ln>
-          <a:effectLst/>
-        </p:spPr>
-        <p:style>
-          <a:lnRef idx="1">
-            <a:schemeClr val="accent1"/>
-          </a:lnRef>
-          <a:fillRef idx="3">
-            <a:schemeClr val="accent1"/>
-          </a:fillRef>
-          <a:effectRef idx="2">
-            <a:schemeClr val="accent1"/>
-          </a:effectRef>
-          <a:fontRef idx="minor">
-            <a:schemeClr val="lt1"/>
-          </a:fontRef>
-        </p:style>
-        <p:txBody>
-          <a:bodyPr rtlCol="0" anchor="ctr"/>
-          <a:lstStyle/>
-          <a:p>
-            <a:pPr algn="ctr"/>
-          </a:p>
-        </p:txBody>
-      </p:sp>
-      <p:sp>
-        <p:nvSpPr>
-          <p:cNvPr id="18" name="TextBox 17"/>
-          <p:cNvSpPr txBox="1"/>
-          <p:nvPr/>
-        </p:nvSpPr>
-        <p:spPr>
-          <a:xfrm>
-            <a:off x="6976872" y="3172968"/>
-            <a:ext cx="1280160" cy="502920"/>
-          </a:xfrm>
-          <a:prstGeom prst="rect">
-            <a:avLst/>
-          </a:prstGeom>
-          <a:noFill/>
-        </p:spPr>
-        <p:txBody>
-          <a:bodyPr wrap="square" anchor="ctr">
-            <a:spAutoFit/>
-          </a:bodyPr>
-          <a:lstStyle/>
-          <a:p>
-            <a:pPr algn="l">
-              <a:lnSpc>
-                <a:spcPct val="105000"/>
-              </a:lnSpc>
-            </a:pPr>
-            <a:r>
-              <a:rPr sz="1200" b="1" i="0">
-                <a:solidFill>
-                  <a:srgbClr val="FFFFFF"/>
-                </a:solidFill>
-                <a:latin typeface="Arial"/>
-              </a:rPr>
-              <a:t>rim</a:t>
-            </a:r>
-          </a:p>
-        </p:txBody>
-      </p:sp>
-      <p:sp>
-        <p:nvSpPr>
-          <p:cNvPr id="19" name="TextBox 18"/>
-          <p:cNvSpPr txBox="1"/>
-          <p:nvPr/>
-        </p:nvSpPr>
-        <p:spPr>
-          <a:xfrm>
-            <a:off x="9668973" y="3172968"/>
-            <a:ext cx="640080" cy="502920"/>
-          </a:xfrm>
-          <a:prstGeom prst="rect">
-            <a:avLst/>
-          </a:prstGeom>
-          <a:noFill/>
-        </p:spPr>
-        <p:txBody>
-          <a:bodyPr wrap="square" anchor="ctr">
-            <a:spAutoFit/>
-          </a:bodyPr>
-          <a:lstStyle/>
-          <a:p>
-            <a:pPr algn="l">
-              <a:lnSpc>
-                <a:spcPct val="105000"/>
-              </a:lnSpc>
-            </a:pPr>
-            <a:r>
-              <a:rPr sz="1300" b="1" i="0">
-                <a:solidFill>
-                  <a:srgbClr val="2C6FBB"/>
-                </a:solidFill>
-                <a:latin typeface="Arial"/>
-              </a:rPr>
-              <a:t>22</a:t>
-            </a:r>
-          </a:p>
-        </p:txBody>
-      </p:sp>
-      <p:sp>
-        <p:nvSpPr>
-          <p:cNvPr id="20" name="Rectangle 19"/>
-          <p:cNvSpPr/>
-          <p:nvPr/>
-        </p:nvSpPr>
-        <p:spPr>
-          <a:xfrm>
-            <a:off x="6903720" y="4023360"/>
-            <a:ext cx="1468418" cy="548640"/>
-          </a:xfrm>
-          <a:prstGeom prst="rect">
-            <a:avLst/>
-          </a:prstGeom>
-          <a:solidFill>
-            <a:srgbClr val="C0392B"/>
-          </a:solidFill>
-          <a:ln>
-            <a:noFill/>
-          </a:ln>
-          <a:effectLst/>
-        </p:spPr>
-        <p:style>
-          <a:lnRef idx="1">
-            <a:schemeClr val="accent1"/>
-          </a:lnRef>
-          <a:fillRef idx="3">
-            <a:schemeClr val="accent1"/>
-          </a:fillRef>
-          <a:effectRef idx="2">
-            <a:schemeClr val="accent1"/>
-          </a:effectRef>
-          <a:fontRef idx="minor">
-            <a:schemeClr val="lt1"/>
-          </a:fontRef>
-        </p:style>
-        <p:txBody>
-          <a:bodyPr rtlCol="0" anchor="ctr"/>
-          <a:lstStyle/>
-          <a:p>
-            <a:pPr algn="ctr"/>
-          </a:p>
-        </p:txBody>
-      </p:sp>
-      <p:sp>
-        <p:nvSpPr>
-          <p:cNvPr id="21" name="TextBox 20"/>
-          <p:cNvSpPr txBox="1"/>
-          <p:nvPr/>
-        </p:nvSpPr>
-        <p:spPr>
-          <a:xfrm>
-            <a:off x="6976872" y="4041648"/>
-            <a:ext cx="1280160" cy="502920"/>
-          </a:xfrm>
-          <a:prstGeom prst="rect">
-            <a:avLst/>
-          </a:prstGeom>
-          <a:noFill/>
-        </p:spPr>
-        <p:txBody>
-          <a:bodyPr wrap="square" anchor="ctr">
-            <a:spAutoFit/>
-          </a:bodyPr>
-          <a:lstStyle/>
-          <a:p>
-            <a:pPr algn="l">
-              <a:lnSpc>
-                <a:spcPct val="105000"/>
-              </a:lnSpc>
-            </a:pPr>
-            <a:r>
-              <a:rPr sz="1200" b="1" i="0">
-                <a:solidFill>
-                  <a:srgbClr val="FFFFFF"/>
-                </a:solidFill>
-                <a:latin typeface="Arial"/>
-              </a:rPr>
-              <a:t>body</a:t>
-            </a:r>
-          </a:p>
-        </p:txBody>
-      </p:sp>
-      <p:sp>
-        <p:nvSpPr>
-          <p:cNvPr id="22" name="TextBox 21"/>
-          <p:cNvSpPr txBox="1"/>
-          <p:nvPr/>
-        </p:nvSpPr>
-        <p:spPr>
-          <a:xfrm>
-            <a:off x="8445290" y="4041648"/>
-            <a:ext cx="640080" cy="502920"/>
-          </a:xfrm>
-          <a:prstGeom prst="rect">
-            <a:avLst/>
-          </a:prstGeom>
-          <a:noFill/>
-        </p:spPr>
-        <p:txBody>
-          <a:bodyPr wrap="square" anchor="ctr">
-            <a:spAutoFit/>
-          </a:bodyPr>
-          <a:lstStyle/>
-          <a:p>
-            <a:pPr algn="l">
-              <a:lnSpc>
-                <a:spcPct val="105000"/>
-              </a:lnSpc>
-            </a:pPr>
-            <a:r>
-              <a:rPr sz="1300" b="1" i="0">
-                <a:solidFill>
-                  <a:srgbClr val="C0392B"/>
-                </a:solidFill>
-                <a:latin typeface="Arial"/>
-              </a:rPr>
-              <a:t>12</a:t>
-            </a:r>
-          </a:p>
-        </p:txBody>
-      </p:sp>
-      <p:sp>
-        <p:nvSpPr>
-          <p:cNvPr id="23" name="TextBox 22"/>
-          <p:cNvSpPr txBox="1"/>
-          <p:nvPr/>
-        </p:nvSpPr>
-        <p:spPr>
-          <a:xfrm>
-            <a:off x="6858000" y="4754880"/>
-            <a:ext cx="4754880" cy="365760"/>
-          </a:xfrm>
-          <a:prstGeom prst="rect">
-            <a:avLst/>
-          </a:prstGeom>
-          <a:noFill/>
-        </p:spPr>
-        <p:txBody>
-          <a:bodyPr wrap="square" anchor="t">
-            <a:spAutoFit/>
-          </a:bodyPr>
-          <a:lstStyle/>
-          <a:p>
-            <a:pPr algn="l">
-              <a:lnSpc>
-                <a:spcPct val="105000"/>
-              </a:lnSpc>
-            </a:pPr>
-            <a:r>
-              <a:rPr sz="1000" b="0" i="1">
-                <a:solidFill>
-                  <a:srgbClr val="666666"/>
-                </a:solidFill>
-                <a:latin typeface="Arial"/>
-              </a:rPr>
-              <a:t>wider margin = easier, safer carry  (illustrative)</a:t>
-            </a:r>
-          </a:p>
-        </p:txBody>
-      </p:sp>
-      <p:cxnSp>
-        <p:nvCxnSpPr>
-          <p:cNvPr id="24" name="Connector 23"/>
-          <p:cNvCxnSpPr/>
-          <p:nvPr/>
-        </p:nvCxnSpPr>
-        <p:spPr>
-          <a:xfrm flipH="1">
-            <a:off x="1645920" y="5440680"/>
-            <a:ext cx="8961120" cy="0"/>
-          </a:xfrm>
-          <a:prstGeom prst="line">
-            <a:avLst/>
-          </a:prstGeom>
-          <a:ln w="22860">
-            <a:solidFill>
-              <a:srgbClr val="1A365D"/>
-            </a:solidFill>
-            <a:prstDash val="dash"/>
-            <a:tailEnd type="triangle" w="med" len="med"/>
-          </a:ln>
-        </p:spPr>
-        <p:style>
-          <a:lnRef idx="2">
-            <a:schemeClr val="accent1"/>
-          </a:lnRef>
-          <a:fillRef idx="0">
-            <a:schemeClr val="accent1"/>
-          </a:fillRef>
-          <a:effectRef idx="1">
-            <a:schemeClr val="accent1"/>
-          </a:effectRef>
-          <a:fontRef idx="minor">
-            <a:schemeClr val="tx1"/>
-          </a:fontRef>
-        </p:style>
-      </p:cxnSp>
-      <p:sp>
-        <p:nvSpPr>
-          <p:cNvPr id="25" name="TextBox 24"/>
-          <p:cNvSpPr txBox="1"/>
-          <p:nvPr/>
-        </p:nvSpPr>
-        <p:spPr>
-          <a:xfrm>
-            <a:off x="1371600" y="5596128"/>
-            <a:ext cx="9509760" cy="365760"/>
-          </a:xfrm>
-          <a:prstGeom prst="rect">
-            <a:avLst/>
-          </a:prstGeom>
-          <a:noFill/>
-        </p:spPr>
-        <p:txBody>
-          <a:bodyPr wrap="square" anchor="t">
-            <a:spAutoFit/>
-          </a:bodyPr>
-          <a:lstStyle/>
-          <a:p>
-            <a:pPr algn="ctr">
-              <a:lnSpc>
-                <a:spcPct val="105000"/>
-              </a:lnSpc>
-            </a:pPr>
-            <a:r>
-              <a:rPr sz="1200" b="0" i="1">
-                <a:solidFill>
-                  <a:srgbClr val="1A365D"/>
-                </a:solidFill>
-                <a:latin typeface="Arial"/>
-              </a:rPr>
-              <a:t>future (thesis): spill margin → grasp-generation reward — close the loop</a:t>
-            </a:r>
-          </a:p>
-        </p:txBody>
-      </p:sp>
-      <p:sp>
-        <p:nvSpPr>
-          <p:cNvPr id="26" name="TextBox 25"/>
-          <p:cNvSpPr txBox="1"/>
-          <p:nvPr/>
-        </p:nvSpPr>
-        <p:spPr>
-          <a:xfrm>
-            <a:off x="11612880" y="6400800"/>
-            <a:ext cx="457200" cy="320040"/>
-          </a:xfrm>
-          <a:prstGeom prst="rect">
-            <a:avLst/>
-          </a:prstGeom>
-          <a:noFill/>
-        </p:spPr>
-        <p:txBody>
-          <a:bodyPr wrap="square" anchor="t">
-            <a:spAutoFit/>
-          </a:bodyPr>
-          <a:lstStyle/>
-          <a:p>
-            <a:pPr algn="r">
-              <a:lnSpc>
-                <a:spcPct val="105000"/>
-              </a:lnSpc>
-            </a:pPr>
-            <a:r>
-              <a:rPr sz="1200" b="0" i="0">
-                <a:solidFill>
-                  <a:srgbClr val="666666"/>
-                </a:solidFill>
-                <a:latin typeface="Arial"/>
-              </a:rPr>
-              <a:t>7</a:t>
-            </a:r>
-          </a:p>
-        </p:txBody>
-      </p:sp>
-    </p:spTree>
-  </p:cSld>
-  <p:clrMapOvr>
-    <a:masterClrMapping/>
-  </p:clrMapOvr>
-</p:sld>
-</file>
-
-<file path=ppt/slides/slide8.xml><?xml version="1.0" encoding="utf-8"?>
-<p:sld xmlns:a="http://schemas.openxmlformats.org/drawingml/2006/main" xmlns:p="http://schemas.openxmlformats.org/presentationml/2006/main" xmlns:r="http://schemas.openxmlformats.org/officeDocument/2006/relationships">
-  <p:cSld>
-    <p:spTree>
-      <p:nvGrpSpPr>
-        <p:cNvPr id="1" name=""/>
-        <p:cNvGrpSpPr/>
-        <p:nvPr/>
-      </p:nvGrpSpPr>
-      <p:grpSpPr/>
-      <p:sp>
-        <p:nvSpPr>
-          <p:cNvPr id="2" name="TextBox 1"/>
-          <p:cNvSpPr txBox="1"/>
-          <p:nvPr/>
-        </p:nvSpPr>
-        <p:spPr>
-          <a:xfrm>
-            <a:off x="502920" y="274320"/>
-            <a:ext cx="11155680" cy="868680"/>
-          </a:xfrm>
-          <a:prstGeom prst="rect">
-            <a:avLst/>
-          </a:prstGeom>
-          <a:noFill/>
-        </p:spPr>
-        <p:txBody>
-          <a:bodyPr wrap="square" anchor="ctr">
-            <a:spAutoFit/>
-          </a:bodyPr>
-          <a:lstStyle/>
-          <a:p>
-            <a:pPr algn="l">
-              <a:lnSpc>
-                <a:spcPct val="105000"/>
-              </a:lnSpc>
-            </a:pPr>
-            <a:r>
-              <a:rPr sz="3000" b="1" i="0">
-                <a:solidFill>
-                  <a:srgbClr val="1A365D"/>
-                </a:solidFill>
-                <a:latin typeface="Arial"/>
-              </a:rPr>
               <a:t>Evaluation &amp; plan</a:t>
             </a:r>
           </a:p>
@@ -8022,7 +9097,7 @@
                 </a:solidFill>
                 <a:latin typeface="Arial"/>
               </a:rPr>
-              <a:t>8</a:t>
+              <a:t>7</a:t>
             </a:r>
           </a:p>
         </p:txBody>
